--- a/assignment3/Team2_Presentation.pptx
+++ b/assignment3/Team2_Presentation.pptx
@@ -276,7 +276,7 @@
       </p15:sldGuideLst>
     </p:ext>
     <p:ext uri="GoogleSlidesCustomDataVersion2">
-      <go:slidesCustomData xmlns:go="http://customooxmlschemas.google.com/" r:id="rId27" roundtripDataSignature="AMtx7mjj3I9WCWnAQYE5GiaWc9iDLILi9g=="/>
+      <go:slidesCustomData xmlns:go="http://customooxmlschemas.google.com/" r:id="rId27" roundtripDataSignature="AMtx7mjam8hPzfhdRcOmO9srOgbsouq+Nw=="/>
     </p:ext>
   </p:extLst>
 </p:presentation>
@@ -812,7 +812,7 @@
   <p:cSld>
     <p:spTree>
       <p:nvGrpSpPr>
-        <p:cNvPr id="152" name="Shape 152"/>
+        <p:cNvPr id="156" name="Shape 156"/>
         <p:cNvGrpSpPr/>
         <p:nvPr/>
       </p:nvGrpSpPr>
@@ -826,7 +826,7 @@
       </p:grpSpPr>
       <p:sp>
         <p:nvSpPr>
-          <p:cNvPr id="153" name="Google Shape;153;p10:notes"/>
+          <p:cNvPr id="157" name="Google Shape;157;p10:notes"/>
           <p:cNvSpPr txBox="1"/>
           <p:nvPr>
             <p:ph idx="1" type="body"/>
@@ -865,7 +865,7 @@
       </p:sp>
       <p:sp>
         <p:nvSpPr>
-          <p:cNvPr id="154" name="Google Shape;154;p10:notes"/>
+          <p:cNvPr id="158" name="Google Shape;158;p10:notes"/>
           <p:cNvSpPr/>
           <p:nvPr>
             <p:ph idx="2" type="sldImg"/>
@@ -911,7 +911,7 @@
   <p:cSld>
     <p:spTree>
       <p:nvGrpSpPr>
-        <p:cNvPr id="160" name="Shape 160"/>
+        <p:cNvPr id="164" name="Shape 164"/>
         <p:cNvGrpSpPr/>
         <p:nvPr/>
       </p:nvGrpSpPr>
@@ -925,7 +925,7 @@
       </p:grpSpPr>
       <p:sp>
         <p:nvSpPr>
-          <p:cNvPr id="161" name="Google Shape;161;p9:notes"/>
+          <p:cNvPr id="165" name="Google Shape;165;p9:notes"/>
           <p:cNvSpPr txBox="1"/>
           <p:nvPr>
             <p:ph idx="1" type="body"/>
@@ -964,7 +964,7 @@
       </p:sp>
       <p:sp>
         <p:nvSpPr>
-          <p:cNvPr id="162" name="Google Shape;162;p9:notes"/>
+          <p:cNvPr id="166" name="Google Shape;166;p9:notes"/>
           <p:cNvSpPr/>
           <p:nvPr>
             <p:ph idx="2" type="sldImg"/>
@@ -1010,7 +1010,7 @@
   <p:cSld>
     <p:spTree>
       <p:nvGrpSpPr>
-        <p:cNvPr id="168" name="Shape 168"/>
+        <p:cNvPr id="172" name="Shape 172"/>
         <p:cNvGrpSpPr/>
         <p:nvPr/>
       </p:nvGrpSpPr>
@@ -1024,7 +1024,7 @@
       </p:grpSpPr>
       <p:sp>
         <p:nvSpPr>
-          <p:cNvPr id="169" name="Google Shape;169;p11:notes"/>
+          <p:cNvPr id="173" name="Google Shape;173;p11:notes"/>
           <p:cNvSpPr txBox="1"/>
           <p:nvPr>
             <p:ph idx="1" type="body"/>
@@ -1063,7 +1063,7 @@
       </p:sp>
       <p:sp>
         <p:nvSpPr>
-          <p:cNvPr id="170" name="Google Shape;170;p11:notes"/>
+          <p:cNvPr id="174" name="Google Shape;174;p11:notes"/>
           <p:cNvSpPr/>
           <p:nvPr>
             <p:ph idx="2" type="sldImg"/>
@@ -1109,7 +1109,7 @@
   <p:cSld>
     <p:spTree>
       <p:nvGrpSpPr>
-        <p:cNvPr id="179" name="Shape 179"/>
+        <p:cNvPr id="183" name="Shape 183"/>
         <p:cNvGrpSpPr/>
         <p:nvPr/>
       </p:nvGrpSpPr>
@@ -1123,7 +1123,7 @@
       </p:grpSpPr>
       <p:sp>
         <p:nvSpPr>
-          <p:cNvPr id="180" name="Google Shape;180;g3923dfd7fba_0_4:notes"/>
+          <p:cNvPr id="184" name="Google Shape;184;g3923dfd7fba_0_4:notes"/>
           <p:cNvSpPr/>
           <p:nvPr>
             <p:ph idx="2" type="sldImg"/>
@@ -1158,7 +1158,7 @@
       </p:sp>
       <p:sp>
         <p:nvSpPr>
-          <p:cNvPr id="181" name="Google Shape;181;g3923dfd7fba_0_4:notes"/>
+          <p:cNvPr id="185" name="Google Shape;185;g3923dfd7fba_0_4:notes"/>
           <p:cNvSpPr txBox="1"/>
           <p:nvPr>
             <p:ph idx="1" type="body"/>
@@ -1208,7 +1208,7 @@
   <p:cSld>
     <p:spTree>
       <p:nvGrpSpPr>
-        <p:cNvPr id="185" name="Shape 185"/>
+        <p:cNvPr id="189" name="Shape 189"/>
         <p:cNvGrpSpPr/>
         <p:nvPr/>
       </p:nvGrpSpPr>
@@ -1222,7 +1222,7 @@
       </p:grpSpPr>
       <p:sp>
         <p:nvSpPr>
-          <p:cNvPr id="186" name="Google Shape;186;p12:notes"/>
+          <p:cNvPr id="190" name="Google Shape;190;p12:notes"/>
           <p:cNvSpPr txBox="1"/>
           <p:nvPr>
             <p:ph idx="1" type="body"/>
@@ -1261,7 +1261,7 @@
       </p:sp>
       <p:sp>
         <p:nvSpPr>
-          <p:cNvPr id="187" name="Google Shape;187;p12:notes"/>
+          <p:cNvPr id="191" name="Google Shape;191;p12:notes"/>
           <p:cNvSpPr/>
           <p:nvPr>
             <p:ph idx="2" type="sldImg"/>
@@ -1307,7 +1307,7 @@
   <p:cSld>
     <p:spTree>
       <p:nvGrpSpPr>
-        <p:cNvPr id="193" name="Shape 193"/>
+        <p:cNvPr id="197" name="Shape 197"/>
         <p:cNvGrpSpPr/>
         <p:nvPr/>
       </p:nvGrpSpPr>
@@ -1321,7 +1321,7 @@
       </p:grpSpPr>
       <p:sp>
         <p:nvSpPr>
-          <p:cNvPr id="194" name="Google Shape;194;g3923dfd7fba_0_0:notes"/>
+          <p:cNvPr id="198" name="Google Shape;198;g3923dfd7fba_0_0:notes"/>
           <p:cNvSpPr/>
           <p:nvPr>
             <p:ph idx="2" type="sldImg"/>
@@ -1356,7 +1356,7 @@
       </p:sp>
       <p:sp>
         <p:nvSpPr>
-          <p:cNvPr id="195" name="Google Shape;195;g3923dfd7fba_0_0:notes"/>
+          <p:cNvPr id="199" name="Google Shape;199;g3923dfd7fba_0_0:notes"/>
           <p:cNvSpPr txBox="1"/>
           <p:nvPr>
             <p:ph idx="1" type="body"/>
@@ -1406,7 +1406,7 @@
   <p:cSld>
     <p:spTree>
       <p:nvGrpSpPr>
-        <p:cNvPr id="198" name="Shape 198"/>
+        <p:cNvPr id="202" name="Shape 202"/>
         <p:cNvGrpSpPr/>
         <p:nvPr/>
       </p:nvGrpSpPr>
@@ -1420,7 +1420,7 @@
       </p:grpSpPr>
       <p:sp>
         <p:nvSpPr>
-          <p:cNvPr id="199" name="Google Shape;199;p13:notes"/>
+          <p:cNvPr id="203" name="Google Shape;203;p13:notes"/>
           <p:cNvSpPr txBox="1"/>
           <p:nvPr>
             <p:ph idx="1" type="body"/>
@@ -1459,7 +1459,7 @@
       </p:sp>
       <p:sp>
         <p:nvSpPr>
-          <p:cNvPr id="200" name="Google Shape;200;p13:notes"/>
+          <p:cNvPr id="204" name="Google Shape;204;p13:notes"/>
           <p:cNvSpPr/>
           <p:nvPr>
             <p:ph idx="2" type="sldImg"/>
@@ -1505,7 +1505,7 @@
   <p:cSld>
     <p:spTree>
       <p:nvGrpSpPr>
-        <p:cNvPr id="206" name="Shape 206"/>
+        <p:cNvPr id="210" name="Shape 210"/>
         <p:cNvGrpSpPr/>
         <p:nvPr/>
       </p:nvGrpSpPr>
@@ -1519,7 +1519,7 @@
       </p:grpSpPr>
       <p:sp>
         <p:nvSpPr>
-          <p:cNvPr id="207" name="Google Shape;207;g3923dfd7fba_4_0:notes"/>
+          <p:cNvPr id="211" name="Google Shape;211;g3923dfd7fba_4_0:notes"/>
           <p:cNvSpPr/>
           <p:nvPr>
             <p:ph idx="2" type="sldImg"/>
@@ -1554,7 +1554,7 @@
       </p:sp>
       <p:sp>
         <p:nvSpPr>
-          <p:cNvPr id="208" name="Google Shape;208;g3923dfd7fba_4_0:notes"/>
+          <p:cNvPr id="212" name="Google Shape;212;g3923dfd7fba_4_0:notes"/>
           <p:cNvSpPr txBox="1"/>
           <p:nvPr>
             <p:ph idx="1" type="body"/>
@@ -1604,7 +1604,7 @@
   <p:cSld>
     <p:spTree>
       <p:nvGrpSpPr>
-        <p:cNvPr id="211" name="Shape 211"/>
+        <p:cNvPr id="215" name="Shape 215"/>
         <p:cNvGrpSpPr/>
         <p:nvPr/>
       </p:nvGrpSpPr>
@@ -1618,7 +1618,7 @@
       </p:grpSpPr>
       <p:sp>
         <p:nvSpPr>
-          <p:cNvPr id="212" name="Google Shape;212;p14:notes"/>
+          <p:cNvPr id="216" name="Google Shape;216;p14:notes"/>
           <p:cNvSpPr txBox="1"/>
           <p:nvPr>
             <p:ph idx="1" type="body"/>
@@ -1657,7 +1657,7 @@
       </p:sp>
       <p:sp>
         <p:nvSpPr>
-          <p:cNvPr id="213" name="Google Shape;213;p14:notes"/>
+          <p:cNvPr id="217" name="Google Shape;217;p14:notes"/>
           <p:cNvSpPr/>
           <p:nvPr>
             <p:ph idx="2" type="sldImg"/>
@@ -1703,7 +1703,7 @@
   <p:cSld>
     <p:spTree>
       <p:nvGrpSpPr>
-        <p:cNvPr id="222" name="Shape 222"/>
+        <p:cNvPr id="226" name="Shape 226"/>
         <p:cNvGrpSpPr/>
         <p:nvPr/>
       </p:nvGrpSpPr>
@@ -1717,7 +1717,7 @@
       </p:grpSpPr>
       <p:sp>
         <p:nvSpPr>
-          <p:cNvPr id="223" name="Google Shape;223;p15:notes"/>
+          <p:cNvPr id="227" name="Google Shape;227;p15:notes"/>
           <p:cNvSpPr txBox="1"/>
           <p:nvPr>
             <p:ph idx="1" type="body"/>
@@ -1756,7 +1756,7 @@
       </p:sp>
       <p:sp>
         <p:nvSpPr>
-          <p:cNvPr id="224" name="Google Shape;224;p15:notes"/>
+          <p:cNvPr id="228" name="Google Shape;228;p15:notes"/>
           <p:cNvSpPr/>
           <p:nvPr>
             <p:ph idx="2" type="sldImg"/>
@@ -1901,7 +1901,7 @@
   <p:cSld>
     <p:spTree>
       <p:nvGrpSpPr>
-        <p:cNvPr id="229" name="Shape 229"/>
+        <p:cNvPr id="233" name="Shape 233"/>
         <p:cNvGrpSpPr/>
         <p:nvPr/>
       </p:nvGrpSpPr>
@@ -1915,7 +1915,7 @@
       </p:grpSpPr>
       <p:sp>
         <p:nvSpPr>
-          <p:cNvPr id="230" name="Google Shape;230;p16:notes"/>
+          <p:cNvPr id="234" name="Google Shape;234;p16:notes"/>
           <p:cNvSpPr txBox="1"/>
           <p:nvPr>
             <p:ph idx="1" type="body"/>
@@ -1954,7 +1954,7 @@
       </p:sp>
       <p:sp>
         <p:nvSpPr>
-          <p:cNvPr id="231" name="Google Shape;231;p16:notes"/>
+          <p:cNvPr id="235" name="Google Shape;235;p16:notes"/>
           <p:cNvSpPr/>
           <p:nvPr>
             <p:ph idx="2" type="sldImg"/>
@@ -2410,7 +2410,7 @@
       </p:grpSpPr>
       <p:sp>
         <p:nvSpPr>
-          <p:cNvPr id="132" name="Google Shape;132;p7:notes"/>
+          <p:cNvPr id="132" name="Google Shape;132;g3923dfd7fba_4_5:notes"/>
           <p:cNvSpPr txBox="1"/>
           <p:nvPr>
             <p:ph idx="1" type="body"/>
@@ -2449,7 +2449,106 @@
       </p:sp>
       <p:sp>
         <p:nvSpPr>
-          <p:cNvPr id="133" name="Google Shape;133;p7:notes"/>
+          <p:cNvPr id="133" name="Google Shape;133;g3923dfd7fba_4_5:notes"/>
+          <p:cNvSpPr/>
+          <p:nvPr>
+            <p:ph idx="2" type="sldImg"/>
+          </p:nvPr>
+        </p:nvSpPr>
+        <p:spPr>
+          <a:xfrm>
+            <a:off x="1143225" y="685800"/>
+            <a:ext cx="4572300" cy="3429000"/>
+          </a:xfrm>
+          <a:custGeom>
+            <a:rect b="b" l="l" r="r" t="t"/>
+            <a:pathLst>
+              <a:path extrusionOk="0" h="120000" w="120000">
+                <a:moveTo>
+                  <a:pt x="0" y="0"/>
+                </a:moveTo>
+                <a:lnTo>
+                  <a:pt x="120000" y="0"/>
+                </a:lnTo>
+                <a:lnTo>
+                  <a:pt x="120000" y="120000"/>
+                </a:lnTo>
+                <a:lnTo>
+                  <a:pt x="0" y="120000"/>
+                </a:lnTo>
+                <a:close/>
+              </a:path>
+            </a:pathLst>
+          </a:custGeom>
+        </p:spPr>
+      </p:sp>
+    </p:spTree>
+  </p:cSld>
+  <p:clrMapOvr>
+    <a:masterClrMapping/>
+  </p:clrMapOvr>
+</p:notes>
+</file>
+
+<file path=ppt/notesSlides/notesSlide8.xml><?xml version="1.0" encoding="utf-8"?>
+<p:notes xmlns:a="http://schemas.openxmlformats.org/drawingml/2006/main" xmlns:r="http://schemas.openxmlformats.org/officeDocument/2006/relationships" xmlns:mc="http://schemas.openxmlformats.org/markup-compatibility/2006" xmlns:mv="urn:schemas-microsoft-com:mac:vml" xmlns:p="http://schemas.openxmlformats.org/presentationml/2006/main" xmlns:c="http://schemas.openxmlformats.org/drawingml/2006/chart" xmlns:dgm="http://schemas.openxmlformats.org/drawingml/2006/diagram" xmlns:o="urn:schemas-microsoft-com:office:office" xmlns:v="urn:schemas-microsoft-com:vml" xmlns:pvml="urn:schemas-microsoft-com:office:powerpoint" xmlns:com="http://schemas.openxmlformats.org/drawingml/2006/compatibility" xmlns:p14="http://schemas.microsoft.com/office/powerpoint/2010/main" xmlns:p15="http://schemas.microsoft.com/office/powerpoint/2012/main" xmlns:ahyp="http://schemas.microsoft.com/office/drawing/2018/hyperlinkcolor" showMasterPhAnim="0" showMasterSp="0">
+  <p:cSld>
+    <p:spTree>
+      <p:nvGrpSpPr>
+        <p:cNvPr id="140" name="Shape 140"/>
+        <p:cNvGrpSpPr/>
+        <p:nvPr/>
+      </p:nvGrpSpPr>
+      <p:grpSpPr>
+        <a:xfrm>
+          <a:off x="0" y="0"/>
+          <a:ext cx="0" cy="0"/>
+          <a:chOff x="0" y="0"/>
+          <a:chExt cx="0" cy="0"/>
+        </a:xfrm>
+      </p:grpSpPr>
+      <p:sp>
+        <p:nvSpPr>
+          <p:cNvPr id="141" name="Google Shape;141;p7:notes"/>
+          <p:cNvSpPr txBox="1"/>
+          <p:nvPr>
+            <p:ph idx="1" type="body"/>
+          </p:nvPr>
+        </p:nvSpPr>
+        <p:spPr>
+          <a:xfrm>
+            <a:off x="685800" y="4343400"/>
+            <a:ext cx="5486400" cy="4114800"/>
+          </a:xfrm>
+          <a:prstGeom prst="rect">
+            <a:avLst/>
+          </a:prstGeom>
+        </p:spPr>
+        <p:txBody>
+          <a:bodyPr anchorCtr="0" anchor="t" bIns="91425" lIns="91425" spcFirstLastPara="1" rIns="91425" wrap="square" tIns="91425">
+            <a:noAutofit/>
+          </a:bodyPr>
+          <a:lstStyle/>
+          <a:p>
+            <a:pPr indent="0" lvl="0" marL="0" rtl="0" algn="l">
+              <a:spcBef>
+                <a:spcPts val="0"/>
+              </a:spcBef>
+              <a:spcAft>
+                <a:spcPts val="0"/>
+              </a:spcAft>
+              <a:buNone/>
+            </a:pPr>
+            <a:r>
+              <a:t/>
+            </a:r>
+            <a:endParaRPr/>
+          </a:p>
+        </p:txBody>
+      </p:sp>
+      <p:sp>
+        <p:nvSpPr>
+          <p:cNvPr id="142" name="Google Shape;142;p7:notes"/>
           <p:cNvSpPr/>
           <p:nvPr>
             <p:ph idx="2" type="sldImg"/>
@@ -2490,12 +2589,12 @@
 </p:notes>
 </file>
 
-<file path=ppt/notesSlides/notesSlide8.xml><?xml version="1.0" encoding="utf-8"?>
+<file path=ppt/notesSlides/notesSlide9.xml><?xml version="1.0" encoding="utf-8"?>
 <p:notes xmlns:a="http://schemas.openxmlformats.org/drawingml/2006/main" xmlns:r="http://schemas.openxmlformats.org/officeDocument/2006/relationships" xmlns:mc="http://schemas.openxmlformats.org/markup-compatibility/2006" xmlns:mv="urn:schemas-microsoft-com:mac:vml" xmlns:p="http://schemas.openxmlformats.org/presentationml/2006/main" xmlns:c="http://schemas.openxmlformats.org/drawingml/2006/chart" xmlns:dgm="http://schemas.openxmlformats.org/drawingml/2006/diagram" xmlns:o="urn:schemas-microsoft-com:office:office" xmlns:v="urn:schemas-microsoft-com:vml" xmlns:pvml="urn:schemas-microsoft-com:office:powerpoint" xmlns:com="http://schemas.openxmlformats.org/drawingml/2006/compatibility" xmlns:p14="http://schemas.microsoft.com/office/powerpoint/2010/main" xmlns:p15="http://schemas.microsoft.com/office/powerpoint/2012/main" xmlns:ahyp="http://schemas.microsoft.com/office/drawing/2018/hyperlinkcolor" showMasterPhAnim="0" showMasterSp="0">
   <p:cSld>
     <p:spTree>
       <p:nvGrpSpPr>
-        <p:cNvPr id="139" name="Shape 139"/>
+        <p:cNvPr id="148" name="Shape 148"/>
         <p:cNvGrpSpPr/>
         <p:nvPr/>
       </p:nvGrpSpPr>
@@ -2509,42 +2608,7 @@
       </p:grpSpPr>
       <p:sp>
         <p:nvSpPr>
-          <p:cNvPr id="140" name="Google Shape;140;g3923dfd7fba_0_9:notes"/>
-          <p:cNvSpPr/>
-          <p:nvPr>
-            <p:ph idx="2" type="sldImg"/>
-          </p:nvPr>
-        </p:nvSpPr>
-        <p:spPr>
-          <a:xfrm>
-            <a:off x="1143225" y="685800"/>
-            <a:ext cx="4572300" cy="3429000"/>
-          </a:xfrm>
-          <a:custGeom>
-            <a:rect b="b" l="l" r="r" t="t"/>
-            <a:pathLst>
-              <a:path extrusionOk="0" h="120000" w="120000">
-                <a:moveTo>
-                  <a:pt x="0" y="0"/>
-                </a:moveTo>
-                <a:lnTo>
-                  <a:pt x="120000" y="0"/>
-                </a:lnTo>
-                <a:lnTo>
-                  <a:pt x="120000" y="120000"/>
-                </a:lnTo>
-                <a:lnTo>
-                  <a:pt x="0" y="120000"/>
-                </a:lnTo>
-                <a:close/>
-              </a:path>
-            </a:pathLst>
-          </a:custGeom>
-        </p:spPr>
-      </p:sp>
-      <p:sp>
-        <p:nvSpPr>
-          <p:cNvPr id="141" name="Google Shape;141;g3923dfd7fba_0_9:notes"/>
+          <p:cNvPr id="149" name="Google Shape;149;p8:notes"/>
           <p:cNvSpPr txBox="1"/>
           <p:nvPr>
             <p:ph idx="1" type="body"/>
@@ -2581,73 +2645,9 @@
           </a:p>
         </p:txBody>
       </p:sp>
-    </p:spTree>
-  </p:cSld>
-  <p:clrMapOvr>
-    <a:masterClrMapping/>
-  </p:clrMapOvr>
-</p:notes>
-</file>
-
-<file path=ppt/notesSlides/notesSlide9.xml><?xml version="1.0" encoding="utf-8"?>
-<p:notes xmlns:a="http://schemas.openxmlformats.org/drawingml/2006/main" xmlns:r="http://schemas.openxmlformats.org/officeDocument/2006/relationships" xmlns:mc="http://schemas.openxmlformats.org/markup-compatibility/2006" xmlns:mv="urn:schemas-microsoft-com:mac:vml" xmlns:p="http://schemas.openxmlformats.org/presentationml/2006/main" xmlns:c="http://schemas.openxmlformats.org/drawingml/2006/chart" xmlns:dgm="http://schemas.openxmlformats.org/drawingml/2006/diagram" xmlns:o="urn:schemas-microsoft-com:office:office" xmlns:v="urn:schemas-microsoft-com:vml" xmlns:pvml="urn:schemas-microsoft-com:office:powerpoint" xmlns:com="http://schemas.openxmlformats.org/drawingml/2006/compatibility" xmlns:p14="http://schemas.microsoft.com/office/powerpoint/2010/main" xmlns:p15="http://schemas.microsoft.com/office/powerpoint/2012/main" xmlns:ahyp="http://schemas.microsoft.com/office/drawing/2018/hyperlinkcolor" showMasterPhAnim="0" showMasterSp="0">
-  <p:cSld>
-    <p:spTree>
-      <p:nvGrpSpPr>
-        <p:cNvPr id="144" name="Shape 144"/>
-        <p:cNvGrpSpPr/>
-        <p:nvPr/>
-      </p:nvGrpSpPr>
-      <p:grpSpPr>
-        <a:xfrm>
-          <a:off x="0" y="0"/>
-          <a:ext cx="0" cy="0"/>
-          <a:chOff x="0" y="0"/>
-          <a:chExt cx="0" cy="0"/>
-        </a:xfrm>
-      </p:grpSpPr>
       <p:sp>
         <p:nvSpPr>
-          <p:cNvPr id="145" name="Google Shape;145;p8:notes"/>
-          <p:cNvSpPr txBox="1"/>
-          <p:nvPr>
-            <p:ph idx="1" type="body"/>
-          </p:nvPr>
-        </p:nvSpPr>
-        <p:spPr>
-          <a:xfrm>
-            <a:off x="685800" y="4343400"/>
-            <a:ext cx="5486400" cy="4114800"/>
-          </a:xfrm>
-          <a:prstGeom prst="rect">
-            <a:avLst/>
-          </a:prstGeom>
-        </p:spPr>
-        <p:txBody>
-          <a:bodyPr anchorCtr="0" anchor="t" bIns="91425" lIns="91425" spcFirstLastPara="1" rIns="91425" wrap="square" tIns="91425">
-            <a:noAutofit/>
-          </a:bodyPr>
-          <a:lstStyle/>
-          <a:p>
-            <a:pPr indent="0" lvl="0" marL="0" rtl="0" algn="l">
-              <a:spcBef>
-                <a:spcPts val="0"/>
-              </a:spcBef>
-              <a:spcAft>
-                <a:spcPts val="0"/>
-              </a:spcAft>
-              <a:buNone/>
-            </a:pPr>
-            <a:r>
-              <a:t/>
-            </a:r>
-            <a:endParaRPr/>
-          </a:p>
-        </p:txBody>
-      </p:sp>
-      <p:sp>
-        <p:nvSpPr>
-          <p:cNvPr id="146" name="Google Shape;146;p8:notes"/>
+          <p:cNvPr id="150" name="Google Shape;150;p8:notes"/>
           <p:cNvSpPr/>
           <p:nvPr>
             <p:ph idx="2" type="sldImg"/>
@@ -12414,7 +12414,7 @@
   <p:cSld>
     <p:spTree>
       <p:nvGrpSpPr>
-        <p:cNvPr id="155" name="Shape 155"/>
+        <p:cNvPr id="159" name="Shape 159"/>
         <p:cNvGrpSpPr/>
         <p:nvPr/>
       </p:nvGrpSpPr>
@@ -12428,14 +12428,14 @@
       </p:grpSpPr>
       <p:sp>
         <p:nvSpPr>
-          <p:cNvPr id="156" name="Google Shape;156;p10"/>
+          <p:cNvPr id="160" name="Google Shape;160;p10"/>
           <p:cNvSpPr txBox="1"/>
           <p:nvPr/>
         </p:nvSpPr>
         <p:spPr>
           <a:xfrm>
             <a:off x="457200" y="365760"/>
-            <a:ext cx="9144000" cy="731520"/>
+            <a:ext cx="9144000" cy="523200"/>
           </a:xfrm>
           <a:prstGeom prst="rect">
             <a:avLst/>
@@ -12461,16 +12461,12 @@
               <a:buNone/>
             </a:pPr>
             <a:r>
-              <a:rPr b="1" i="0" lang="en-US" sz="2800" u="none" cap="none" strike="noStrike">
+              <a:rPr i="0" lang="en-US" sz="2800" u="none" cap="none" strike="noStrike">
                 <a:solidFill>
                   <a:srgbClr val="000000"/>
                 </a:solidFill>
-                <a:latin typeface="Arial"/>
-                <a:ea typeface="Arial"/>
-                <a:cs typeface="Arial"/>
-                <a:sym typeface="Arial"/>
               </a:rPr>
-              <a:t>3. Insights - Anomaly Co-occurrence</a:t>
+              <a:t>Insights - Anomaly Co-occurrence</a:t>
             </a:r>
             <a:endParaRPr/>
           </a:p>
@@ -12478,7 +12474,7 @@
       </p:sp>
       <p:sp>
         <p:nvSpPr>
-          <p:cNvPr id="157" name="Google Shape;157;p10"/>
+          <p:cNvPr id="161" name="Google Shape;161;p10"/>
           <p:cNvSpPr txBox="1"/>
           <p:nvPr/>
         </p:nvSpPr>
@@ -12528,7 +12524,7 @@
       </p:sp>
       <p:sp>
         <p:nvSpPr>
-          <p:cNvPr id="158" name="Google Shape;158;p10"/>
+          <p:cNvPr id="162" name="Google Shape;162;p10"/>
           <p:cNvSpPr/>
           <p:nvPr/>
         </p:nvSpPr>
@@ -12586,7 +12582,7 @@
       </p:sp>
       <p:sp>
         <p:nvSpPr>
-          <p:cNvPr id="159" name="Google Shape;159;p10"/>
+          <p:cNvPr id="163" name="Google Shape;163;p10"/>
           <p:cNvSpPr txBox="1"/>
           <p:nvPr/>
         </p:nvSpPr>
@@ -12758,7 +12754,7 @@
   <p:cSld>
     <p:spTree>
       <p:nvGrpSpPr>
-        <p:cNvPr id="163" name="Shape 163"/>
+        <p:cNvPr id="167" name="Shape 167"/>
         <p:cNvGrpSpPr/>
         <p:nvPr/>
       </p:nvGrpSpPr>
@@ -12772,14 +12768,14 @@
       </p:grpSpPr>
       <p:sp>
         <p:nvSpPr>
-          <p:cNvPr id="164" name="Google Shape;164;p9"/>
+          <p:cNvPr id="168" name="Google Shape;168;p9"/>
           <p:cNvSpPr txBox="1"/>
           <p:nvPr/>
         </p:nvSpPr>
         <p:spPr>
           <a:xfrm>
             <a:off x="457200" y="365760"/>
-            <a:ext cx="9144000" cy="731520"/>
+            <a:ext cx="9144000" cy="523200"/>
           </a:xfrm>
           <a:prstGeom prst="rect">
             <a:avLst/>
@@ -12805,16 +12801,12 @@
               <a:buNone/>
             </a:pPr>
             <a:r>
-              <a:rPr b="1" i="0" lang="en-US" sz="2800" u="none" cap="none" strike="noStrike">
+              <a:rPr i="0" lang="en-US" sz="2800" u="none" cap="none" strike="noStrike">
                 <a:solidFill>
                   <a:srgbClr val="000000"/>
                 </a:solidFill>
-                <a:latin typeface="Arial"/>
-                <a:ea typeface="Arial"/>
-                <a:cs typeface="Arial"/>
-                <a:sym typeface="Arial"/>
               </a:rPr>
-              <a:t>3. Insights - Early Detection (First 30% of Run)</a:t>
+              <a:t>Insights - Early Detection (First 30% of Run)</a:t>
             </a:r>
             <a:endParaRPr/>
           </a:p>
@@ -12822,7 +12814,7 @@
       </p:sp>
       <p:sp>
         <p:nvSpPr>
-          <p:cNvPr id="165" name="Google Shape;165;p9"/>
+          <p:cNvPr id="169" name="Google Shape;169;p9"/>
           <p:cNvSpPr txBox="1"/>
           <p:nvPr/>
         </p:nvSpPr>
@@ -12872,7 +12864,7 @@
       </p:sp>
       <p:sp>
         <p:nvSpPr>
-          <p:cNvPr id="166" name="Google Shape;166;p9"/>
+          <p:cNvPr id="170" name="Google Shape;170;p9"/>
           <p:cNvSpPr/>
           <p:nvPr/>
         </p:nvSpPr>
@@ -12930,7 +12922,7 @@
       </p:sp>
       <p:graphicFrame>
         <p:nvGraphicFramePr>
-          <p:cNvPr id="167" name="Google Shape;167;p9"/>
+          <p:cNvPr id="171" name="Google Shape;171;p9"/>
           <p:cNvGraphicFramePr/>
           <p:nvPr/>
         </p:nvGraphicFramePr>
@@ -12943,7 +12935,7 @@
             <a:tbl>
               <a:tblPr bandRow="1" firstRow="1">
                 <a:noFill/>
-                <a:tableStyleId>{0D392F20-7D84-41F4-8EEE-C95BBEAEBAE5}</a:tableStyleId>
+                <a:tableStyleId>{6BF11DA5-D60C-43FA-A1B7-15BA222CE41B}</a:tableStyleId>
               </a:tblPr>
               <a:tblGrid>
                 <a:gridCol w="2194550"/>
@@ -13617,7 +13609,7 @@
   <p:cSld>
     <p:spTree>
       <p:nvGrpSpPr>
-        <p:cNvPr id="171" name="Shape 171"/>
+        <p:cNvPr id="175" name="Shape 175"/>
         <p:cNvGrpSpPr/>
         <p:nvPr/>
       </p:nvGrpSpPr>
@@ -13631,14 +13623,14 @@
       </p:grpSpPr>
       <p:sp>
         <p:nvSpPr>
-          <p:cNvPr id="172" name="Google Shape;172;p11"/>
+          <p:cNvPr id="176" name="Google Shape;176;p11"/>
           <p:cNvSpPr txBox="1"/>
           <p:nvPr/>
         </p:nvSpPr>
         <p:spPr>
           <a:xfrm>
             <a:off x="457200" y="365760"/>
-            <a:ext cx="9144000" cy="731520"/>
+            <a:ext cx="9144000" cy="523200"/>
           </a:xfrm>
           <a:prstGeom prst="rect">
             <a:avLst/>
@@ -13664,16 +13656,12 @@
               <a:buNone/>
             </a:pPr>
             <a:r>
-              <a:rPr b="1" i="0" lang="en-US" sz="2800" u="none" cap="none" strike="noStrike">
+              <a:rPr i="0" lang="en-US" sz="2800" u="none" cap="none" strike="noStrike">
                 <a:solidFill>
                   <a:srgbClr val="000000"/>
                 </a:solidFill>
-                <a:latin typeface="Arial"/>
-                <a:ea typeface="Arial"/>
-                <a:cs typeface="Arial"/>
-                <a:sym typeface="Arial"/>
               </a:rPr>
-              <a:t>3. Insights - Feature Signatures</a:t>
+              <a:t>Insights - Feature Signatures</a:t>
             </a:r>
             <a:endParaRPr/>
           </a:p>
@@ -13681,7 +13669,7 @@
       </p:sp>
       <p:sp>
         <p:nvSpPr>
-          <p:cNvPr id="173" name="Google Shape;173;p11"/>
+          <p:cNvPr id="177" name="Google Shape;177;p11"/>
           <p:cNvSpPr txBox="1"/>
           <p:nvPr/>
         </p:nvSpPr>
@@ -13731,7 +13719,7 @@
       </p:sp>
       <p:sp>
         <p:nvSpPr>
-          <p:cNvPr id="174" name="Google Shape;174;p11"/>
+          <p:cNvPr id="178" name="Google Shape;178;p11"/>
           <p:cNvSpPr/>
           <p:nvPr/>
         </p:nvSpPr>
@@ -13789,7 +13777,7 @@
       </p:sp>
       <p:sp>
         <p:nvSpPr>
-          <p:cNvPr id="175" name="Google Shape;175;p11"/>
+          <p:cNvPr id="179" name="Google Shape;179;p11"/>
           <p:cNvSpPr txBox="1"/>
           <p:nvPr/>
         </p:nvSpPr>
@@ -13839,7 +13827,7 @@
       </p:sp>
       <p:sp>
         <p:nvSpPr>
-          <p:cNvPr id="176" name="Google Shape;176;p11"/>
+          <p:cNvPr id="180" name="Google Shape;180;p11"/>
           <p:cNvSpPr txBox="1"/>
           <p:nvPr/>
         </p:nvSpPr>
@@ -13961,7 +13949,7 @@
       </p:sp>
       <p:sp>
         <p:nvSpPr>
-          <p:cNvPr id="177" name="Google Shape;177;p11"/>
+          <p:cNvPr id="181" name="Google Shape;181;p11"/>
           <p:cNvSpPr txBox="1"/>
           <p:nvPr/>
         </p:nvSpPr>
@@ -14011,7 +13999,7 @@
       </p:sp>
       <p:sp>
         <p:nvSpPr>
-          <p:cNvPr id="178" name="Google Shape;178;p11"/>
+          <p:cNvPr id="182" name="Google Shape;182;p11"/>
           <p:cNvSpPr txBox="1"/>
           <p:nvPr/>
         </p:nvSpPr>
@@ -14144,7 +14132,7 @@
   <p:cSld>
     <p:spTree>
       <p:nvGrpSpPr>
-        <p:cNvPr id="182" name="Shape 182"/>
+        <p:cNvPr id="186" name="Shape 186"/>
         <p:cNvGrpSpPr/>
         <p:nvPr/>
       </p:nvGrpSpPr>
@@ -14158,13 +14146,13 @@
       </p:grpSpPr>
       <p:sp>
         <p:nvSpPr>
-          <p:cNvPr id="183" name="Google Shape;183;g3923dfd7fba_0_4"/>
+          <p:cNvPr id="187" name="Google Shape;187;g3923dfd7fba_0_4"/>
           <p:cNvSpPr txBox="1"/>
           <p:nvPr/>
         </p:nvSpPr>
         <p:spPr>
           <a:xfrm>
-            <a:off x="1169825" y="1425700"/>
+            <a:off x="1169825" y="1670375"/>
             <a:ext cx="5044800" cy="3509400"/>
           </a:xfrm>
           <a:prstGeom prst="rect">
@@ -14367,14 +14355,14 @@
       </p:sp>
       <p:sp>
         <p:nvSpPr>
-          <p:cNvPr id="184" name="Google Shape;184;g3923dfd7fba_0_4"/>
+          <p:cNvPr id="188" name="Google Shape;188;g3923dfd7fba_0_4"/>
           <p:cNvSpPr txBox="1"/>
           <p:nvPr/>
         </p:nvSpPr>
         <p:spPr>
           <a:xfrm>
             <a:off x="6525575" y="1571950"/>
-            <a:ext cx="5666100" cy="3509400"/>
+            <a:ext cx="5262000" cy="3509400"/>
           </a:xfrm>
           <a:prstGeom prst="rect">
             <a:avLst/>
@@ -14587,7 +14575,7 @@
   <p:cSld>
     <p:spTree>
       <p:nvGrpSpPr>
-        <p:cNvPr id="188" name="Shape 188"/>
+        <p:cNvPr id="192" name="Shape 192"/>
         <p:cNvGrpSpPr/>
         <p:nvPr/>
       </p:nvGrpSpPr>
@@ -14601,7 +14589,7 @@
       </p:grpSpPr>
       <p:sp>
         <p:nvSpPr>
-          <p:cNvPr id="189" name="Google Shape;189;p12"/>
+          <p:cNvPr id="193" name="Google Shape;193;p12"/>
           <p:cNvSpPr txBox="1"/>
           <p:nvPr/>
         </p:nvSpPr>
@@ -14651,7 +14639,7 @@
       </p:sp>
       <p:sp>
         <p:nvSpPr>
-          <p:cNvPr id="190" name="Google Shape;190;p12"/>
+          <p:cNvPr id="194" name="Google Shape;194;p12"/>
           <p:cNvSpPr txBox="1"/>
           <p:nvPr/>
         </p:nvSpPr>
@@ -14701,7 +14689,7 @@
       </p:sp>
       <p:sp>
         <p:nvSpPr>
-          <p:cNvPr id="191" name="Google Shape;191;p12"/>
+          <p:cNvPr id="195" name="Google Shape;195;p12"/>
           <p:cNvSpPr/>
           <p:nvPr/>
         </p:nvSpPr>
@@ -14759,7 +14747,7 @@
       </p:sp>
       <p:sp>
         <p:nvSpPr>
-          <p:cNvPr id="192" name="Google Shape;192;p12"/>
+          <p:cNvPr id="196" name="Google Shape;196;p12"/>
           <p:cNvSpPr txBox="1"/>
           <p:nvPr/>
         </p:nvSpPr>
@@ -15038,7 +15026,7 @@
   <p:cSld>
     <p:spTree>
       <p:nvGrpSpPr>
-        <p:cNvPr id="196" name="Shape 196"/>
+        <p:cNvPr id="200" name="Shape 200"/>
         <p:cNvGrpSpPr/>
         <p:nvPr/>
       </p:nvGrpSpPr>
@@ -15052,7 +15040,7 @@
       </p:grpSpPr>
       <p:sp>
         <p:nvSpPr>
-          <p:cNvPr id="197" name="Google Shape;197;g3923dfd7fba_0_0"/>
+          <p:cNvPr id="201" name="Google Shape;201;g3923dfd7fba_0_0"/>
           <p:cNvSpPr txBox="1"/>
           <p:nvPr/>
         </p:nvSpPr>
@@ -15252,7 +15240,7 @@
   <p:cSld>
     <p:spTree>
       <p:nvGrpSpPr>
-        <p:cNvPr id="201" name="Shape 201"/>
+        <p:cNvPr id="205" name="Shape 205"/>
         <p:cNvGrpSpPr/>
         <p:nvPr/>
       </p:nvGrpSpPr>
@@ -15266,14 +15254,14 @@
       </p:grpSpPr>
       <p:sp>
         <p:nvSpPr>
-          <p:cNvPr id="202" name="Google Shape;202;p13"/>
+          <p:cNvPr id="206" name="Google Shape;206;p13"/>
           <p:cNvSpPr txBox="1"/>
           <p:nvPr/>
         </p:nvSpPr>
         <p:spPr>
           <a:xfrm>
             <a:off x="457200" y="365760"/>
-            <a:ext cx="9144000" cy="731520"/>
+            <a:ext cx="9144000" cy="523200"/>
           </a:xfrm>
           <a:prstGeom prst="rect">
             <a:avLst/>
@@ -15299,16 +15287,12 @@
               <a:buNone/>
             </a:pPr>
             <a:r>
-              <a:rPr b="1" i="0" lang="en-US" sz="2800" u="none" cap="none" strike="noStrike">
+              <a:rPr i="0" lang="en-US" sz="2800" u="none" cap="none" strike="noStrike">
                 <a:solidFill>
                   <a:srgbClr val="000000"/>
                 </a:solidFill>
-                <a:latin typeface="Arial"/>
-                <a:ea typeface="Arial"/>
-                <a:cs typeface="Arial"/>
-                <a:sym typeface="Arial"/>
               </a:rPr>
-              <a:t>4. Derived FOL Rules - Examples</a:t>
+              <a:t>Derived FOL Rules - Examples</a:t>
             </a:r>
             <a:endParaRPr/>
           </a:p>
@@ -15316,7 +15300,7 @@
       </p:sp>
       <p:sp>
         <p:nvSpPr>
-          <p:cNvPr id="203" name="Google Shape;203;p13"/>
+          <p:cNvPr id="207" name="Google Shape;207;p13"/>
           <p:cNvSpPr txBox="1"/>
           <p:nvPr/>
         </p:nvSpPr>
@@ -15366,7 +15350,7 @@
       </p:sp>
       <p:sp>
         <p:nvSpPr>
-          <p:cNvPr id="204" name="Google Shape;204;p13"/>
+          <p:cNvPr id="208" name="Google Shape;208;p13"/>
           <p:cNvSpPr/>
           <p:nvPr/>
         </p:nvSpPr>
@@ -15424,7 +15408,7 @@
       </p:sp>
       <p:sp>
         <p:nvSpPr>
-          <p:cNvPr id="205" name="Google Shape;205;p13"/>
+          <p:cNvPr id="209" name="Google Shape;209;p13"/>
           <p:cNvSpPr txBox="1"/>
           <p:nvPr/>
         </p:nvSpPr>
@@ -15725,7 +15709,7 @@
   <p:cSld>
     <p:spTree>
       <p:nvGrpSpPr>
-        <p:cNvPr id="209" name="Shape 209"/>
+        <p:cNvPr id="213" name="Shape 213"/>
         <p:cNvGrpSpPr/>
         <p:nvPr/>
       </p:nvGrpSpPr>
@@ -15739,7 +15723,7 @@
       </p:grpSpPr>
       <p:pic>
         <p:nvPicPr>
-          <p:cNvPr id="210" name="Google Shape;210;g3923dfd7fba_4_0" title="model_comparison_f1.png"/>
+          <p:cNvPr id="214" name="Google Shape;214;g3923dfd7fba_4_0" title="model_comparison_f1.png"/>
           <p:cNvPicPr preferRelativeResize="0"/>
           <p:nvPr/>
         </p:nvPicPr>
@@ -15753,8 +15737,8 @@
         </p:blipFill>
         <p:spPr>
           <a:xfrm>
-            <a:off x="152400" y="152400"/>
-            <a:ext cx="11886876" cy="5943438"/>
+            <a:off x="1167900" y="1276550"/>
+            <a:ext cx="10075874" cy="4761549"/>
           </a:xfrm>
           <a:prstGeom prst="rect">
             <a:avLst/>
@@ -15778,7 +15762,7 @@
   <p:cSld>
     <p:spTree>
       <p:nvGrpSpPr>
-        <p:cNvPr id="214" name="Shape 214"/>
+        <p:cNvPr id="218" name="Shape 218"/>
         <p:cNvGrpSpPr/>
         <p:nvPr/>
       </p:nvGrpSpPr>
@@ -15792,7 +15776,7 @@
       </p:grpSpPr>
       <p:sp>
         <p:nvSpPr>
-          <p:cNvPr id="215" name="Google Shape;215;p14"/>
+          <p:cNvPr id="219" name="Google Shape;219;p14"/>
           <p:cNvSpPr txBox="1"/>
           <p:nvPr/>
         </p:nvSpPr>
@@ -15842,7 +15826,7 @@
       </p:sp>
       <p:sp>
         <p:nvSpPr>
-          <p:cNvPr id="216" name="Google Shape;216;p14"/>
+          <p:cNvPr id="220" name="Google Shape;220;p14"/>
           <p:cNvSpPr txBox="1"/>
           <p:nvPr/>
         </p:nvSpPr>
@@ -15892,7 +15876,7 @@
       </p:sp>
       <p:sp>
         <p:nvSpPr>
-          <p:cNvPr id="217" name="Google Shape;217;p14"/>
+          <p:cNvPr id="221" name="Google Shape;221;p14"/>
           <p:cNvSpPr/>
           <p:nvPr/>
         </p:nvSpPr>
@@ -15950,7 +15934,7 @@
       </p:sp>
       <p:sp>
         <p:nvSpPr>
-          <p:cNvPr id="218" name="Google Shape;218;p14"/>
+          <p:cNvPr id="222" name="Google Shape;222;p14"/>
           <p:cNvSpPr txBox="1"/>
           <p:nvPr/>
         </p:nvSpPr>
@@ -16000,7 +15984,7 @@
       </p:sp>
       <p:sp>
         <p:nvSpPr>
-          <p:cNvPr id="219" name="Google Shape;219;p14"/>
+          <p:cNvPr id="223" name="Google Shape;223;p14"/>
           <p:cNvSpPr txBox="1"/>
           <p:nvPr/>
         </p:nvSpPr>
@@ -16098,7 +16082,7 @@
       </p:sp>
       <p:sp>
         <p:nvSpPr>
-          <p:cNvPr id="220" name="Google Shape;220;p14"/>
+          <p:cNvPr id="224" name="Google Shape;224;p14"/>
           <p:cNvSpPr txBox="1"/>
           <p:nvPr/>
         </p:nvSpPr>
@@ -16148,14 +16132,14 @@
       </p:sp>
       <p:sp>
         <p:nvSpPr>
-          <p:cNvPr id="221" name="Google Shape;221;p14"/>
+          <p:cNvPr id="225" name="Google Shape;225;p14"/>
           <p:cNvSpPr txBox="1"/>
           <p:nvPr/>
         </p:nvSpPr>
         <p:spPr>
           <a:xfrm>
             <a:off x="6217920" y="1920240"/>
-            <a:ext cx="5029200" cy="4114800"/>
+            <a:ext cx="5029200" cy="1923900"/>
           </a:xfrm>
           <a:prstGeom prst="rect">
             <a:avLst/>
@@ -16301,16 +16285,7 @@
               <a:buNone/>
             </a:pPr>
             <a:r>
-              <a:rPr b="0" i="0" lang="en-US" sz="1600" u="none" cap="none" strike="noStrike">
-                <a:solidFill>
-                  <a:srgbClr val="333333"/>
-                </a:solidFill>
-                <a:latin typeface="Arial"/>
-                <a:ea typeface="Arial"/>
-                <a:cs typeface="Arial"/>
-                <a:sym typeface="Arial"/>
-              </a:rPr>
-              <a:t>• Real-time monitoring integration</a:t>
+              <a:t/>
             </a:r>
             <a:endParaRPr/>
           </a:p>
@@ -16329,7 +16304,7 @@
   <p:cSld>
     <p:spTree>
       <p:nvGrpSpPr>
-        <p:cNvPr id="225" name="Shape 225"/>
+        <p:cNvPr id="229" name="Shape 229"/>
         <p:cNvGrpSpPr/>
         <p:nvPr/>
       </p:nvGrpSpPr>
@@ -16343,7 +16318,7 @@
       </p:grpSpPr>
       <p:sp>
         <p:nvSpPr>
-          <p:cNvPr id="226" name="Google Shape;226;p15"/>
+          <p:cNvPr id="230" name="Google Shape;230;p15"/>
           <p:cNvSpPr txBox="1"/>
           <p:nvPr/>
         </p:nvSpPr>
@@ -16393,7 +16368,7 @@
       </p:sp>
       <p:sp>
         <p:nvSpPr>
-          <p:cNvPr id="227" name="Google Shape;227;p15"/>
+          <p:cNvPr id="231" name="Google Shape;231;p15"/>
           <p:cNvSpPr/>
           <p:nvPr/>
         </p:nvSpPr>
@@ -16451,7 +16426,7 @@
       </p:sp>
       <p:sp>
         <p:nvSpPr>
-          <p:cNvPr id="228" name="Google Shape;228;p15"/>
+          <p:cNvPr id="232" name="Google Shape;232;p15"/>
           <p:cNvSpPr txBox="1"/>
           <p:nvPr/>
         </p:nvSpPr>
@@ -16863,7 +16838,7 @@
   <p:cSld>
     <p:spTree>
       <p:nvGrpSpPr>
-        <p:cNvPr id="232" name="Shape 232"/>
+        <p:cNvPr id="236" name="Shape 236"/>
         <p:cNvGrpSpPr/>
         <p:nvPr/>
       </p:nvGrpSpPr>
@@ -16877,7 +16852,7 @@
       </p:grpSpPr>
       <p:sp>
         <p:nvSpPr>
-          <p:cNvPr id="233" name="Google Shape;233;p16"/>
+          <p:cNvPr id="237" name="Google Shape;237;p16"/>
           <p:cNvSpPr txBox="1"/>
           <p:nvPr/>
         </p:nvSpPr>
@@ -16927,7 +16902,7 @@
       </p:sp>
       <p:sp>
         <p:nvSpPr>
-          <p:cNvPr id="234" name="Google Shape;234;p16"/>
+          <p:cNvPr id="238" name="Google Shape;238;p16"/>
           <p:cNvSpPr txBox="1"/>
           <p:nvPr/>
         </p:nvSpPr>
@@ -17488,7 +17463,7 @@
         <p:spPr>
           <a:xfrm>
             <a:off x="457200" y="365760"/>
-            <a:ext cx="9144000" cy="731520"/>
+            <a:ext cx="9144000" cy="523200"/>
           </a:xfrm>
           <a:prstGeom prst="rect">
             <a:avLst/>
@@ -17514,14 +17489,10 @@
               <a:buNone/>
             </a:pPr>
             <a:r>
-              <a:rPr b="1" i="0" lang="en-US" sz="2800" u="none" cap="none" strike="noStrike">
+              <a:rPr i="0" lang="en-US" sz="2800" u="none" cap="none" strike="noStrike">
                 <a:solidFill>
                   <a:srgbClr val="000000"/>
                 </a:solidFill>
-                <a:latin typeface="Arial"/>
-                <a:ea typeface="Arial"/>
-                <a:cs typeface="Arial"/>
-                <a:sym typeface="Arial"/>
               </a:rPr>
               <a:t>Data Sources</a:t>
             </a:r>
@@ -17957,7 +17928,7 @@
             <a:tbl>
               <a:tblPr bandRow="1" firstRow="1">
                 <a:noFill/>
-                <a:tableStyleId>{0D392F20-7D84-41F4-8EEE-C95BBEAEBAE5}</a:tableStyleId>
+                <a:tableStyleId>{6BF11DA5-D60C-43FA-A1B7-15BA222CE41B}</a:tableStyleId>
               </a:tblPr>
               <a:tblGrid>
                 <a:gridCol w="2743200"/>
@@ -19279,7 +19250,7 @@
         <p:spPr>
           <a:xfrm>
             <a:off x="457200" y="365760"/>
-            <a:ext cx="9144000" cy="731520"/>
+            <a:ext cx="9144000" cy="523200"/>
           </a:xfrm>
           <a:prstGeom prst="rect">
             <a:avLst/>
@@ -19305,16 +19276,12 @@
               <a:buNone/>
             </a:pPr>
             <a:r>
-              <a:rPr b="1" i="0" lang="en-US" sz="2800" u="none" cap="none" strike="noStrike">
+              <a:rPr lang="en-US" sz="2800" u="none" cap="none" strike="noStrike">
                 <a:solidFill>
                   <a:srgbClr val="000000"/>
                 </a:solidFill>
-                <a:latin typeface="Arial"/>
-                <a:ea typeface="Arial"/>
-                <a:cs typeface="Arial"/>
-                <a:sym typeface="Arial"/>
               </a:rPr>
-              <a:t>2. Anomaly Detectors</a:t>
+              <a:t>Anomaly Detectors</a:t>
             </a:r>
             <a:endParaRPr/>
           </a:p>
@@ -19755,7 +19722,7 @@
         <p:spPr>
           <a:xfrm>
             <a:off x="6217920" y="1920240"/>
-            <a:ext cx="5029200" cy="4114800"/>
+            <a:ext cx="5029200" cy="1523700"/>
           </a:xfrm>
           <a:prstGeom prst="rect">
             <a:avLst/>
@@ -19814,9 +19781,21 @@
                 <a:cs typeface="Arial"/>
                 <a:sym typeface="Arial"/>
               </a:rPr>
-              <a:t>• Captures complex multi-metric patterns</a:t>
+              <a:t>• C</a:t>
             </a:r>
-            <a:endParaRPr/>
+            <a:r>
+              <a:rPr lang="en-US" sz="1600">
+                <a:solidFill>
+                  <a:srgbClr val="333333"/>
+                </a:solidFill>
+              </a:rPr>
+              <a:t>aptures multi-metric abnormal patterns that rules may miss. </a:t>
+            </a:r>
+            <a:endParaRPr sz="1600">
+              <a:solidFill>
+                <a:srgbClr val="333333"/>
+              </a:solidFill>
+            </a:endParaRPr>
           </a:p>
           <a:p>
             <a:pPr indent="0" lvl="0" marL="0" marR="0" rtl="0" algn="l">
@@ -19853,16 +19832,7 @@
               <a:buNone/>
             </a:pPr>
             <a:r>
-              <a:rPr b="0" i="0" lang="en-US" sz="1600" u="none" cap="none" strike="noStrike">
-                <a:solidFill>
-                  <a:srgbClr val="333333"/>
-                </a:solidFill>
-                <a:latin typeface="Arial"/>
-                <a:ea typeface="Arial"/>
-                <a:cs typeface="Arial"/>
-                <a:sym typeface="Arial"/>
-              </a:rPr>
-              <a:t>• Complements rule-based detection</a:t>
+              <a:t/>
             </a:r>
             <a:endParaRPr/>
           </a:p>
@@ -19895,14 +19865,14 @@
       </p:grpSpPr>
       <p:sp>
         <p:nvSpPr>
-          <p:cNvPr id="135" name="Google Shape;135;p7"/>
+          <p:cNvPr id="135" name="Google Shape;135;g3923dfd7fba_4_5"/>
           <p:cNvSpPr txBox="1"/>
           <p:nvPr/>
         </p:nvSpPr>
         <p:spPr>
           <a:xfrm>
             <a:off x="457200" y="365760"/>
-            <a:ext cx="9144000" cy="369300"/>
+            <a:ext cx="9144000" cy="954300"/>
           </a:xfrm>
           <a:prstGeom prst="rect">
             <a:avLst/>
@@ -19918,7 +19888,7 @@
           </a:bodyPr>
           <a:lstStyle/>
           <a:p>
-            <a:pPr indent="0" lvl="0" marL="2743200" rtl="0" algn="l">
+            <a:pPr indent="0" lvl="0" marL="0" rtl="0" algn="l">
               <a:spcBef>
                 <a:spcPts val="800"/>
               </a:spcBef>
@@ -19932,28 +19902,39 @@
               <a:buNone/>
             </a:pPr>
             <a:r>
-              <a:rPr lang="en-US" sz="1800">
+              <a:rPr b="1" lang="en-US" sz="2800">
                 <a:solidFill>
                   <a:srgbClr val="333333"/>
                 </a:solidFill>
               </a:rPr>
-              <a:t>3. </a:t>
+              <a:t>3. Interesting Insights from Anomaly Detection </a:t>
             </a:r>
+            <a:endParaRPr b="1" sz="2800">
+              <a:solidFill>
+                <a:schemeClr val="dk1"/>
+              </a:solidFill>
+            </a:endParaRPr>
+          </a:p>
+          <a:p>
+            <a:pPr indent="0" lvl="0" marL="0" marR="0" rtl="0" algn="l">
+              <a:spcBef>
+                <a:spcPts val="0"/>
+              </a:spcBef>
+              <a:spcAft>
+                <a:spcPts val="0"/>
+              </a:spcAft>
+              <a:buNone/>
+            </a:pPr>
             <a:r>
-              <a:rPr lang="en-US" sz="1800">
-                <a:solidFill>
-                  <a:srgbClr val="333333"/>
-                </a:solidFill>
-              </a:rPr>
-              <a:t>Interesting Insights from Anomaly Detection </a:t>
+              <a:t/>
             </a:r>
-            <a:endParaRPr/>
+            <a:endParaRPr b="1" sz="2800"/>
           </a:p>
         </p:txBody>
       </p:sp>
       <p:sp>
         <p:nvSpPr>
-          <p:cNvPr id="136" name="Google Shape;136;p7"/>
+          <p:cNvPr id="136" name="Google Shape;136;g3923dfd7fba_4_5"/>
           <p:cNvSpPr txBox="1"/>
           <p:nvPr/>
         </p:nvSpPr>
@@ -19986,6 +19967,1057 @@
               <a:buNone/>
             </a:pPr>
             <a:r>
+              <a:rPr b="0" i="0" lang="en-US" sz="1400" u="none" cap="none" strike="noStrike">
+                <a:solidFill>
+                  <a:srgbClr val="666666"/>
+                </a:solidFill>
+                <a:latin typeface="Arial"/>
+                <a:ea typeface="Arial"/>
+                <a:cs typeface="Arial"/>
+                <a:sym typeface="Arial"/>
+              </a:rPr>
+              <a:t>~3 min</a:t>
+            </a:r>
+            <a:endParaRPr/>
+          </a:p>
+        </p:txBody>
+      </p:sp>
+      <p:sp>
+        <p:nvSpPr>
+          <p:cNvPr id="137" name="Google Shape;137;g3923dfd7fba_4_5"/>
+          <p:cNvSpPr/>
+          <p:nvPr/>
+        </p:nvSpPr>
+        <p:spPr>
+          <a:xfrm>
+            <a:off x="457200" y="1188720"/>
+            <a:ext cx="11277300" cy="18300"/>
+          </a:xfrm>
+          <a:prstGeom prst="rect">
+            <a:avLst/>
+          </a:prstGeom>
+          <a:solidFill>
+            <a:srgbClr val="C8C8C8"/>
+          </a:solidFill>
+          <a:ln>
+            <a:noFill/>
+          </a:ln>
+          <a:effectLst>
+            <a:outerShdw blurRad="40000" rotWithShape="0" dir="5400000" dist="23000">
+              <a:srgbClr val="000000">
+                <a:alpha val="34900"/>
+              </a:srgbClr>
+            </a:outerShdw>
+          </a:effectLst>
+        </p:spPr>
+        <p:txBody>
+          <a:bodyPr anchorCtr="0" anchor="ctr" bIns="45700" lIns="91425" spcFirstLastPara="1" rIns="91425" wrap="square" tIns="45700">
+            <a:noAutofit/>
+          </a:bodyPr>
+          <a:lstStyle/>
+          <a:p>
+            <a:pPr indent="0" lvl="0" marL="0" marR="0" rtl="0" algn="ctr">
+              <a:spcBef>
+                <a:spcPts val="0"/>
+              </a:spcBef>
+              <a:spcAft>
+                <a:spcPts val="0"/>
+              </a:spcAft>
+              <a:buNone/>
+            </a:pPr>
+            <a:r>
+              <a:t/>
+            </a:r>
+            <a:endParaRPr b="0" i="0" sz="1800" u="none" cap="none" strike="noStrike">
+              <a:solidFill>
+                <a:schemeClr val="dk1"/>
+              </a:solidFill>
+              <a:latin typeface="Calibri"/>
+              <a:ea typeface="Calibri"/>
+              <a:cs typeface="Calibri"/>
+              <a:sym typeface="Calibri"/>
+            </a:endParaRPr>
+          </a:p>
+        </p:txBody>
+      </p:sp>
+      <p:graphicFrame>
+        <p:nvGraphicFramePr>
+          <p:cNvPr id="138" name="Google Shape;138;g3923dfd7fba_4_5"/>
+          <p:cNvGraphicFramePr/>
+          <p:nvPr/>
+        </p:nvGraphicFramePr>
+        <p:xfrm>
+          <a:off x="640080" y="1463040"/>
+          <a:ext cx="3000000" cy="3000000"/>
+        </p:xfrm>
+        <a:graphic>
+          <a:graphicData uri="http://schemas.openxmlformats.org/drawingml/2006/table">
+            <a:tbl>
+              <a:tblPr bandRow="1" firstRow="1">
+                <a:noFill/>
+                <a:tableStyleId>{6BF11DA5-D60C-43FA-A1B7-15BA222CE41B}</a:tableStyleId>
+              </a:tblPr>
+              <a:tblGrid>
+                <a:gridCol w="2133600"/>
+                <a:gridCol w="2133600"/>
+                <a:gridCol w="2133600"/>
+              </a:tblGrid>
+              <a:tr h="365750">
+                <a:tc>
+                  <a:txBody>
+                    <a:bodyPr/>
+                    <a:lstStyle/>
+                    <a:p>
+                      <a:pPr indent="0" lvl="0" marL="0" marR="0" rtl="0" algn="l">
+                        <a:spcBef>
+                          <a:spcPts val="0"/>
+                        </a:spcBef>
+                        <a:spcAft>
+                          <a:spcPts val="0"/>
+                        </a:spcAft>
+                        <a:buNone/>
+                      </a:pPr>
+                      <a:r>
+                        <a:rPr b="1" lang="en-US" sz="1400" u="none" cap="none" strike="noStrike">
+                          <a:solidFill>
+                            <a:srgbClr val="000000"/>
+                          </a:solidFill>
+                          <a:latin typeface="Arial"/>
+                          <a:ea typeface="Arial"/>
+                          <a:cs typeface="Arial"/>
+                          <a:sym typeface="Arial"/>
+                        </a:rPr>
+                        <a:t>Anomaly Type</a:t>
+                      </a:r>
+                      <a:endParaRPr/>
+                    </a:p>
+                  </a:txBody>
+                  <a:tcPr marT="45725" marB="45725" marR="91450" marL="91450">
+                    <a:solidFill>
+                      <a:srgbClr val="F0F0F0"/>
+                    </a:solidFill>
+                  </a:tcPr>
+                </a:tc>
+                <a:tc>
+                  <a:txBody>
+                    <a:bodyPr/>
+                    <a:lstStyle/>
+                    <a:p>
+                      <a:pPr indent="0" lvl="0" marL="0" marR="0" rtl="0" algn="l">
+                        <a:spcBef>
+                          <a:spcPts val="0"/>
+                        </a:spcBef>
+                        <a:spcAft>
+                          <a:spcPts val="0"/>
+                        </a:spcAft>
+                        <a:buNone/>
+                      </a:pPr>
+                      <a:r>
+                        <a:rPr b="1" lang="en-US" sz="1400" u="none" cap="none" strike="noStrike">
+                          <a:solidFill>
+                            <a:srgbClr val="000000"/>
+                          </a:solidFill>
+                          <a:latin typeface="Arial"/>
+                          <a:ea typeface="Arial"/>
+                          <a:cs typeface="Arial"/>
+                          <a:sym typeface="Arial"/>
+                        </a:rPr>
+                        <a:t>Count</a:t>
+                      </a:r>
+                      <a:endParaRPr/>
+                    </a:p>
+                  </a:txBody>
+                  <a:tcPr marT="45725" marB="45725" marR="91450" marL="91450">
+                    <a:solidFill>
+                      <a:srgbClr val="F0F0F0"/>
+                    </a:solidFill>
+                  </a:tcPr>
+                </a:tc>
+                <a:tc>
+                  <a:txBody>
+                    <a:bodyPr/>
+                    <a:lstStyle/>
+                    <a:p>
+                      <a:pPr indent="0" lvl="0" marL="0" marR="0" rtl="0" algn="l">
+                        <a:spcBef>
+                          <a:spcPts val="0"/>
+                        </a:spcBef>
+                        <a:spcAft>
+                          <a:spcPts val="0"/>
+                        </a:spcAft>
+                        <a:buNone/>
+                      </a:pPr>
+                      <a:r>
+                        <a:rPr b="1" lang="en-US" sz="1400" u="none" cap="none" strike="noStrike">
+                          <a:solidFill>
+                            <a:srgbClr val="000000"/>
+                          </a:solidFill>
+                          <a:latin typeface="Arial"/>
+                          <a:ea typeface="Arial"/>
+                          <a:cs typeface="Arial"/>
+                          <a:sym typeface="Arial"/>
+                        </a:rPr>
+                        <a:t>% of Runs</a:t>
+                      </a:r>
+                      <a:endParaRPr/>
+                    </a:p>
+                  </a:txBody>
+                  <a:tcPr marT="45725" marB="45725" marR="91450" marL="91450">
+                    <a:solidFill>
+                      <a:srgbClr val="F0F0F0"/>
+                    </a:solidFill>
+                  </a:tcPr>
+                </a:tc>
+              </a:tr>
+              <a:tr h="365750">
+                <a:tc>
+                  <a:txBody>
+                    <a:bodyPr/>
+                    <a:lstStyle/>
+                    <a:p>
+                      <a:pPr indent="0" lvl="0" marL="0" marR="0" rtl="0" algn="l">
+                        <a:spcBef>
+                          <a:spcPts val="0"/>
+                        </a:spcBef>
+                        <a:spcAft>
+                          <a:spcPts val="0"/>
+                        </a:spcAft>
+                        <a:buNone/>
+                      </a:pPr>
+                      <a:r>
+                        <a:rPr lang="en-US" sz="1200" u="none" cap="none" strike="noStrike">
+                          <a:solidFill>
+                            <a:srgbClr val="333333"/>
+                          </a:solidFill>
+                          <a:latin typeface="Arial"/>
+                          <a:ea typeface="Arial"/>
+                          <a:cs typeface="Arial"/>
+                          <a:sym typeface="Arial"/>
+                        </a:rPr>
+                        <a:t>goal_failure</a:t>
+                      </a:r>
+                      <a:endParaRPr/>
+                    </a:p>
+                  </a:txBody>
+                  <a:tcPr marT="45725" marB="45725" marR="91450" marL="91450"/>
+                </a:tc>
+                <a:tc>
+                  <a:txBody>
+                    <a:bodyPr/>
+                    <a:lstStyle/>
+                    <a:p>
+                      <a:pPr indent="0" lvl="0" marL="0" marR="0" rtl="0" algn="l">
+                        <a:spcBef>
+                          <a:spcPts val="0"/>
+                        </a:spcBef>
+                        <a:spcAft>
+                          <a:spcPts val="0"/>
+                        </a:spcAft>
+                        <a:buNone/>
+                      </a:pPr>
+                      <a:r>
+                        <a:rPr lang="en-US" sz="1200" u="none" cap="none" strike="noStrike">
+                          <a:solidFill>
+                            <a:srgbClr val="333333"/>
+                          </a:solidFill>
+                          <a:latin typeface="Arial"/>
+                          <a:ea typeface="Arial"/>
+                          <a:cs typeface="Arial"/>
+                          <a:sym typeface="Arial"/>
+                        </a:rPr>
+                        <a:t>150</a:t>
+                      </a:r>
+                      <a:endParaRPr/>
+                    </a:p>
+                  </a:txBody>
+                  <a:tcPr marT="45725" marB="45725" marR="91450" marL="91450"/>
+                </a:tc>
+                <a:tc>
+                  <a:txBody>
+                    <a:bodyPr/>
+                    <a:lstStyle/>
+                    <a:p>
+                      <a:pPr indent="0" lvl="0" marL="0" marR="0" rtl="0" algn="l">
+                        <a:spcBef>
+                          <a:spcPts val="0"/>
+                        </a:spcBef>
+                        <a:spcAft>
+                          <a:spcPts val="0"/>
+                        </a:spcAft>
+                        <a:buNone/>
+                      </a:pPr>
+                      <a:r>
+                        <a:rPr lang="en-US" sz="1200" u="none" cap="none" strike="noStrike">
+                          <a:solidFill>
+                            <a:srgbClr val="333333"/>
+                          </a:solidFill>
+                          <a:latin typeface="Arial"/>
+                          <a:ea typeface="Arial"/>
+                          <a:cs typeface="Arial"/>
+                          <a:sym typeface="Arial"/>
+                        </a:rPr>
+                        <a:t>50.0%</a:t>
+                      </a:r>
+                      <a:endParaRPr/>
+                    </a:p>
+                  </a:txBody>
+                  <a:tcPr marT="45725" marB="45725" marR="91450" marL="91450"/>
+                </a:tc>
+              </a:tr>
+              <a:tr h="365750">
+                <a:tc>
+                  <a:txBody>
+                    <a:bodyPr/>
+                    <a:lstStyle/>
+                    <a:p>
+                      <a:pPr indent="0" lvl="0" marL="0" marR="0" rtl="0" algn="l">
+                        <a:spcBef>
+                          <a:spcPts val="0"/>
+                        </a:spcBef>
+                        <a:spcAft>
+                          <a:spcPts val="0"/>
+                        </a:spcAft>
+                        <a:buNone/>
+                      </a:pPr>
+                      <a:r>
+                        <a:rPr lang="en-US" sz="1200" u="none" cap="none" strike="noStrike">
+                          <a:solidFill>
+                            <a:srgbClr val="333333"/>
+                          </a:solidFill>
+                          <a:latin typeface="Arial"/>
+                          <a:ea typeface="Arial"/>
+                          <a:cs typeface="Arial"/>
+                          <a:sym typeface="Arial"/>
+                        </a:rPr>
+                        <a:t>stuck</a:t>
+                      </a:r>
+                      <a:endParaRPr/>
+                    </a:p>
+                  </a:txBody>
+                  <a:tcPr marT="45725" marB="45725" marR="91450" marL="91450"/>
+                </a:tc>
+                <a:tc>
+                  <a:txBody>
+                    <a:bodyPr/>
+                    <a:lstStyle/>
+                    <a:p>
+                      <a:pPr indent="0" lvl="0" marL="0" marR="0" rtl="0" algn="l">
+                        <a:spcBef>
+                          <a:spcPts val="0"/>
+                        </a:spcBef>
+                        <a:spcAft>
+                          <a:spcPts val="0"/>
+                        </a:spcAft>
+                        <a:buNone/>
+                      </a:pPr>
+                      <a:r>
+                        <a:rPr lang="en-US" sz="1200" u="none" cap="none" strike="noStrike">
+                          <a:solidFill>
+                            <a:srgbClr val="333333"/>
+                          </a:solidFill>
+                          <a:latin typeface="Arial"/>
+                          <a:ea typeface="Arial"/>
+                          <a:cs typeface="Arial"/>
+                          <a:sym typeface="Arial"/>
+                        </a:rPr>
+                        <a:t>115</a:t>
+                      </a:r>
+                      <a:endParaRPr/>
+                    </a:p>
+                  </a:txBody>
+                  <a:tcPr marT="45725" marB="45725" marR="91450" marL="91450"/>
+                </a:tc>
+                <a:tc>
+                  <a:txBody>
+                    <a:bodyPr/>
+                    <a:lstStyle/>
+                    <a:p>
+                      <a:pPr indent="0" lvl="0" marL="0" marR="0" rtl="0" algn="l">
+                        <a:spcBef>
+                          <a:spcPts val="0"/>
+                        </a:spcBef>
+                        <a:spcAft>
+                          <a:spcPts val="0"/>
+                        </a:spcAft>
+                        <a:buNone/>
+                      </a:pPr>
+                      <a:r>
+                        <a:rPr lang="en-US" sz="1200" u="none" cap="none" strike="noStrike">
+                          <a:solidFill>
+                            <a:srgbClr val="333333"/>
+                          </a:solidFill>
+                          <a:latin typeface="Arial"/>
+                          <a:ea typeface="Arial"/>
+                          <a:cs typeface="Arial"/>
+                          <a:sym typeface="Arial"/>
+                        </a:rPr>
+                        <a:t>38.3%</a:t>
+                      </a:r>
+                      <a:endParaRPr/>
+                    </a:p>
+                  </a:txBody>
+                  <a:tcPr marT="45725" marB="45725" marR="91450" marL="91450"/>
+                </a:tc>
+              </a:tr>
+              <a:tr h="365750">
+                <a:tc>
+                  <a:txBody>
+                    <a:bodyPr/>
+                    <a:lstStyle/>
+                    <a:p>
+                      <a:pPr indent="0" lvl="0" marL="0" marR="0" rtl="0" algn="l">
+                        <a:spcBef>
+                          <a:spcPts val="0"/>
+                        </a:spcBef>
+                        <a:spcAft>
+                          <a:spcPts val="0"/>
+                        </a:spcAft>
+                        <a:buNone/>
+                      </a:pPr>
+                      <a:r>
+                        <a:rPr lang="en-US" sz="1200" u="none" cap="none" strike="noStrike">
+                          <a:solidFill>
+                            <a:srgbClr val="333333"/>
+                          </a:solidFill>
+                          <a:latin typeface="Arial"/>
+                          <a:ea typeface="Arial"/>
+                          <a:cs typeface="Arial"/>
+                          <a:sym typeface="Arial"/>
+                        </a:rPr>
+                        <a:t>Isolation Forest</a:t>
+                      </a:r>
+                      <a:endParaRPr/>
+                    </a:p>
+                  </a:txBody>
+                  <a:tcPr marT="45725" marB="45725" marR="91450" marL="91450"/>
+                </a:tc>
+                <a:tc>
+                  <a:txBody>
+                    <a:bodyPr/>
+                    <a:lstStyle/>
+                    <a:p>
+                      <a:pPr indent="0" lvl="0" marL="0" marR="0" rtl="0" algn="l">
+                        <a:spcBef>
+                          <a:spcPts val="0"/>
+                        </a:spcBef>
+                        <a:spcAft>
+                          <a:spcPts val="0"/>
+                        </a:spcAft>
+                        <a:buNone/>
+                      </a:pPr>
+                      <a:r>
+                        <a:rPr lang="en-US" sz="1200" u="none" cap="none" strike="noStrike">
+                          <a:solidFill>
+                            <a:srgbClr val="333333"/>
+                          </a:solidFill>
+                          <a:latin typeface="Arial"/>
+                          <a:ea typeface="Arial"/>
+                          <a:cs typeface="Arial"/>
+                          <a:sym typeface="Arial"/>
+                        </a:rPr>
+                        <a:t>45</a:t>
+                      </a:r>
+                      <a:endParaRPr/>
+                    </a:p>
+                  </a:txBody>
+                  <a:tcPr marT="45725" marB="45725" marR="91450" marL="91450"/>
+                </a:tc>
+                <a:tc>
+                  <a:txBody>
+                    <a:bodyPr/>
+                    <a:lstStyle/>
+                    <a:p>
+                      <a:pPr indent="0" lvl="0" marL="0" marR="0" rtl="0" algn="l">
+                        <a:spcBef>
+                          <a:spcPts val="0"/>
+                        </a:spcBef>
+                        <a:spcAft>
+                          <a:spcPts val="0"/>
+                        </a:spcAft>
+                        <a:buNone/>
+                      </a:pPr>
+                      <a:r>
+                        <a:rPr lang="en-US" sz="1200" u="none" cap="none" strike="noStrike">
+                          <a:solidFill>
+                            <a:srgbClr val="333333"/>
+                          </a:solidFill>
+                          <a:latin typeface="Arial"/>
+                          <a:ea typeface="Arial"/>
+                          <a:cs typeface="Arial"/>
+                          <a:sym typeface="Arial"/>
+                        </a:rPr>
+                        <a:t>15.0%</a:t>
+                      </a:r>
+                      <a:endParaRPr/>
+                    </a:p>
+                  </a:txBody>
+                  <a:tcPr marT="45725" marB="45725" marR="91450" marL="91450"/>
+                </a:tc>
+              </a:tr>
+              <a:tr h="365750">
+                <a:tc>
+                  <a:txBody>
+                    <a:bodyPr/>
+                    <a:lstStyle/>
+                    <a:p>
+                      <a:pPr indent="0" lvl="0" marL="0" marR="0" rtl="0" algn="l">
+                        <a:spcBef>
+                          <a:spcPts val="0"/>
+                        </a:spcBef>
+                        <a:spcAft>
+                          <a:spcPts val="0"/>
+                        </a:spcAft>
+                        <a:buNone/>
+                      </a:pPr>
+                      <a:r>
+                        <a:rPr lang="en-US" sz="1200" u="none" cap="none" strike="noStrike">
+                          <a:solidFill>
+                            <a:srgbClr val="333333"/>
+                          </a:solidFill>
+                          <a:latin typeface="Arial"/>
+                          <a:ea typeface="Arial"/>
+                          <a:cs typeface="Arial"/>
+                          <a:sym typeface="Arial"/>
+                        </a:rPr>
+                        <a:t>position_error_spike</a:t>
+                      </a:r>
+                      <a:endParaRPr/>
+                    </a:p>
+                  </a:txBody>
+                  <a:tcPr marT="45725" marB="45725" marR="91450" marL="91450"/>
+                </a:tc>
+                <a:tc>
+                  <a:txBody>
+                    <a:bodyPr/>
+                    <a:lstStyle/>
+                    <a:p>
+                      <a:pPr indent="0" lvl="0" marL="0" marR="0" rtl="0" algn="l">
+                        <a:spcBef>
+                          <a:spcPts val="0"/>
+                        </a:spcBef>
+                        <a:spcAft>
+                          <a:spcPts val="0"/>
+                        </a:spcAft>
+                        <a:buNone/>
+                      </a:pPr>
+                      <a:r>
+                        <a:rPr lang="en-US" sz="1200" u="none" cap="none" strike="noStrike">
+                          <a:solidFill>
+                            <a:srgbClr val="333333"/>
+                          </a:solidFill>
+                          <a:latin typeface="Arial"/>
+                          <a:ea typeface="Arial"/>
+                          <a:cs typeface="Arial"/>
+                          <a:sym typeface="Arial"/>
+                        </a:rPr>
+                        <a:t>15</a:t>
+                      </a:r>
+                      <a:endParaRPr/>
+                    </a:p>
+                  </a:txBody>
+                  <a:tcPr marT="45725" marB="45725" marR="91450" marL="91450"/>
+                </a:tc>
+                <a:tc>
+                  <a:txBody>
+                    <a:bodyPr/>
+                    <a:lstStyle/>
+                    <a:p>
+                      <a:pPr indent="0" lvl="0" marL="0" marR="0" rtl="0" algn="l">
+                        <a:spcBef>
+                          <a:spcPts val="0"/>
+                        </a:spcBef>
+                        <a:spcAft>
+                          <a:spcPts val="0"/>
+                        </a:spcAft>
+                        <a:buNone/>
+                      </a:pPr>
+                      <a:r>
+                        <a:rPr lang="en-US" sz="1200" u="none" cap="none" strike="noStrike">
+                          <a:solidFill>
+                            <a:srgbClr val="333333"/>
+                          </a:solidFill>
+                          <a:latin typeface="Arial"/>
+                          <a:ea typeface="Arial"/>
+                          <a:cs typeface="Arial"/>
+                          <a:sym typeface="Arial"/>
+                        </a:rPr>
+                        <a:t>5.0%</a:t>
+                      </a:r>
+                      <a:endParaRPr/>
+                    </a:p>
+                  </a:txBody>
+                  <a:tcPr marT="45725" marB="45725" marR="91450" marL="91450"/>
+                </a:tc>
+              </a:tr>
+              <a:tr h="365750">
+                <a:tc>
+                  <a:txBody>
+                    <a:bodyPr/>
+                    <a:lstStyle/>
+                    <a:p>
+                      <a:pPr indent="0" lvl="0" marL="0" marR="0" rtl="0" algn="l">
+                        <a:spcBef>
+                          <a:spcPts val="0"/>
+                        </a:spcBef>
+                        <a:spcAft>
+                          <a:spcPts val="0"/>
+                        </a:spcAft>
+                        <a:buNone/>
+                      </a:pPr>
+                      <a:r>
+                        <a:rPr lang="en-US" sz="1200" u="none" cap="none" strike="noStrike">
+                          <a:solidFill>
+                            <a:srgbClr val="333333"/>
+                          </a:solidFill>
+                          <a:latin typeface="Arial"/>
+                          <a:ea typeface="Arial"/>
+                          <a:cs typeface="Arial"/>
+                          <a:sym typeface="Arial"/>
+                        </a:rPr>
+                        <a:t>high_yaw_error</a:t>
+                      </a:r>
+                      <a:endParaRPr/>
+                    </a:p>
+                  </a:txBody>
+                  <a:tcPr marT="45725" marB="45725" marR="91450" marL="91450"/>
+                </a:tc>
+                <a:tc>
+                  <a:txBody>
+                    <a:bodyPr/>
+                    <a:lstStyle/>
+                    <a:p>
+                      <a:pPr indent="0" lvl="0" marL="0" marR="0" rtl="0" algn="l">
+                        <a:spcBef>
+                          <a:spcPts val="0"/>
+                        </a:spcBef>
+                        <a:spcAft>
+                          <a:spcPts val="0"/>
+                        </a:spcAft>
+                        <a:buNone/>
+                      </a:pPr>
+                      <a:r>
+                        <a:rPr lang="en-US" sz="1200" u="none" cap="none" strike="noStrike">
+                          <a:solidFill>
+                            <a:srgbClr val="333333"/>
+                          </a:solidFill>
+                          <a:latin typeface="Arial"/>
+                          <a:ea typeface="Arial"/>
+                          <a:cs typeface="Arial"/>
+                          <a:sym typeface="Arial"/>
+                        </a:rPr>
+                        <a:t>9</a:t>
+                      </a:r>
+                      <a:endParaRPr/>
+                    </a:p>
+                  </a:txBody>
+                  <a:tcPr marT="45725" marB="45725" marR="91450" marL="91450"/>
+                </a:tc>
+                <a:tc>
+                  <a:txBody>
+                    <a:bodyPr/>
+                    <a:lstStyle/>
+                    <a:p>
+                      <a:pPr indent="0" lvl="0" marL="0" marR="0" rtl="0" algn="l">
+                        <a:spcBef>
+                          <a:spcPts val="0"/>
+                        </a:spcBef>
+                        <a:spcAft>
+                          <a:spcPts val="0"/>
+                        </a:spcAft>
+                        <a:buNone/>
+                      </a:pPr>
+                      <a:r>
+                        <a:rPr lang="en-US" sz="1200" u="none" cap="none" strike="noStrike">
+                          <a:solidFill>
+                            <a:srgbClr val="333333"/>
+                          </a:solidFill>
+                          <a:latin typeface="Arial"/>
+                          <a:ea typeface="Arial"/>
+                          <a:cs typeface="Arial"/>
+                          <a:sym typeface="Arial"/>
+                        </a:rPr>
+                        <a:t>3.0%</a:t>
+                      </a:r>
+                      <a:endParaRPr/>
+                    </a:p>
+                  </a:txBody>
+                  <a:tcPr marT="45725" marB="45725" marR="91450" marL="91450"/>
+                </a:tc>
+              </a:tr>
+              <a:tr h="365750">
+                <a:tc>
+                  <a:txBody>
+                    <a:bodyPr/>
+                    <a:lstStyle/>
+                    <a:p>
+                      <a:pPr indent="0" lvl="0" marL="0" marR="0" rtl="0" algn="l">
+                        <a:spcBef>
+                          <a:spcPts val="0"/>
+                        </a:spcBef>
+                        <a:spcAft>
+                          <a:spcPts val="0"/>
+                        </a:spcAft>
+                        <a:buNone/>
+                      </a:pPr>
+                      <a:r>
+                        <a:rPr lang="en-US" sz="1200" u="none" cap="none" strike="noStrike">
+                          <a:solidFill>
+                            <a:srgbClr val="333333"/>
+                          </a:solidFill>
+                          <a:latin typeface="Arial"/>
+                          <a:ea typeface="Arial"/>
+                          <a:cs typeface="Arial"/>
+                          <a:sym typeface="Arial"/>
+                        </a:rPr>
+                        <a:t>path_inefficiency</a:t>
+                      </a:r>
+                      <a:endParaRPr/>
+                    </a:p>
+                  </a:txBody>
+                  <a:tcPr marT="45725" marB="45725" marR="91450" marL="91450"/>
+                </a:tc>
+                <a:tc>
+                  <a:txBody>
+                    <a:bodyPr/>
+                    <a:lstStyle/>
+                    <a:p>
+                      <a:pPr indent="0" lvl="0" marL="0" marR="0" rtl="0" algn="l">
+                        <a:spcBef>
+                          <a:spcPts val="0"/>
+                        </a:spcBef>
+                        <a:spcAft>
+                          <a:spcPts val="0"/>
+                        </a:spcAft>
+                        <a:buNone/>
+                      </a:pPr>
+                      <a:r>
+                        <a:rPr lang="en-US" sz="1200" u="none" cap="none" strike="noStrike">
+                          <a:solidFill>
+                            <a:srgbClr val="333333"/>
+                          </a:solidFill>
+                          <a:latin typeface="Arial"/>
+                          <a:ea typeface="Arial"/>
+                          <a:cs typeface="Arial"/>
+                          <a:sym typeface="Arial"/>
+                        </a:rPr>
+                        <a:t>7</a:t>
+                      </a:r>
+                      <a:endParaRPr/>
+                    </a:p>
+                  </a:txBody>
+                  <a:tcPr marT="45725" marB="45725" marR="91450" marL="91450"/>
+                </a:tc>
+                <a:tc>
+                  <a:txBody>
+                    <a:bodyPr/>
+                    <a:lstStyle/>
+                    <a:p>
+                      <a:pPr indent="0" lvl="0" marL="0" marR="0" rtl="0" algn="l">
+                        <a:spcBef>
+                          <a:spcPts val="0"/>
+                        </a:spcBef>
+                        <a:spcAft>
+                          <a:spcPts val="0"/>
+                        </a:spcAft>
+                        <a:buNone/>
+                      </a:pPr>
+                      <a:r>
+                        <a:rPr lang="en-US" sz="1200" u="none" cap="none" strike="noStrike">
+                          <a:solidFill>
+                            <a:srgbClr val="333333"/>
+                          </a:solidFill>
+                          <a:latin typeface="Arial"/>
+                          <a:ea typeface="Arial"/>
+                          <a:cs typeface="Arial"/>
+                          <a:sym typeface="Arial"/>
+                        </a:rPr>
+                        <a:t>2.3%</a:t>
+                      </a:r>
+                      <a:endParaRPr/>
+                    </a:p>
+                  </a:txBody>
+                  <a:tcPr marT="45725" marB="45725" marR="91450" marL="91450"/>
+                </a:tc>
+              </a:tr>
+            </a:tbl>
+          </a:graphicData>
+        </a:graphic>
+      </p:graphicFrame>
+      <p:sp>
+        <p:nvSpPr>
+          <p:cNvPr id="139" name="Google Shape;139;g3923dfd7fba_4_5"/>
+          <p:cNvSpPr txBox="1"/>
+          <p:nvPr/>
+        </p:nvSpPr>
+        <p:spPr>
+          <a:xfrm>
+            <a:off x="7315200" y="1463040"/>
+            <a:ext cx="4114800" cy="1908600"/>
+          </a:xfrm>
+          <a:prstGeom prst="rect">
+            <a:avLst/>
+          </a:prstGeom>
+          <a:noFill/>
+          <a:ln>
+            <a:noFill/>
+          </a:ln>
+        </p:spPr>
+        <p:txBody>
+          <a:bodyPr anchorCtr="0" anchor="t" bIns="45700" lIns="91425" spcFirstLastPara="1" rIns="91425" wrap="square" tIns="45700">
+            <a:spAutoFit/>
+          </a:bodyPr>
+          <a:lstStyle/>
+          <a:p>
+            <a:pPr indent="0" lvl="0" marL="0" marR="0" rtl="0" algn="l">
+              <a:spcBef>
+                <a:spcPts val="0"/>
+              </a:spcBef>
+              <a:spcAft>
+                <a:spcPts val="0"/>
+              </a:spcAft>
+              <a:buNone/>
+            </a:pPr>
+            <a:r>
+              <a:rPr b="1" i="0" lang="en-US" sz="1800" u="none" cap="none" strike="noStrike">
+                <a:solidFill>
+                  <a:srgbClr val="000000"/>
+                </a:solidFill>
+                <a:latin typeface="Arial"/>
+                <a:ea typeface="Arial"/>
+                <a:cs typeface="Arial"/>
+                <a:sym typeface="Arial"/>
+              </a:rPr>
+              <a:t>Key Findings</a:t>
+            </a:r>
+            <a:endParaRPr/>
+          </a:p>
+          <a:p>
+            <a:pPr indent="0" lvl="0" marL="0" marR="0" rtl="0" algn="l">
+              <a:spcBef>
+                <a:spcPts val="1200"/>
+              </a:spcBef>
+              <a:spcAft>
+                <a:spcPts val="0"/>
+              </a:spcAft>
+              <a:buNone/>
+            </a:pPr>
+            <a:r>
+              <a:rPr b="0" i="0" lang="en-US" sz="1400" u="none" cap="none" strike="noStrike">
+                <a:solidFill>
+                  <a:srgbClr val="333333"/>
+                </a:solidFill>
+                <a:latin typeface="Arial"/>
+                <a:ea typeface="Arial"/>
+                <a:cs typeface="Arial"/>
+                <a:sym typeface="Arial"/>
+              </a:rPr>
+              <a:t>• Total occurrences: 341</a:t>
+            </a:r>
+            <a:endParaRPr/>
+          </a:p>
+          <a:p>
+            <a:pPr indent="0" lvl="0" marL="0" marR="0" rtl="0" algn="l">
+              <a:spcBef>
+                <a:spcPts val="600"/>
+              </a:spcBef>
+              <a:spcAft>
+                <a:spcPts val="0"/>
+              </a:spcAft>
+              <a:buNone/>
+            </a:pPr>
+            <a:r>
+              <a:rPr b="0" i="0" lang="en-US" sz="1400" u="none" cap="none" strike="noStrike">
+                <a:solidFill>
+                  <a:srgbClr val="333333"/>
+                </a:solidFill>
+                <a:latin typeface="Arial"/>
+                <a:ea typeface="Arial"/>
+                <a:cs typeface="Arial"/>
+                <a:sym typeface="Arial"/>
+              </a:rPr>
+              <a:t>• goal_failure is most common (50%)</a:t>
+            </a:r>
+            <a:endParaRPr/>
+          </a:p>
+          <a:p>
+            <a:pPr indent="0" lvl="0" marL="0" marR="0" rtl="0" algn="l">
+              <a:spcBef>
+                <a:spcPts val="600"/>
+              </a:spcBef>
+              <a:spcAft>
+                <a:spcPts val="0"/>
+              </a:spcAft>
+              <a:buNone/>
+            </a:pPr>
+            <a:r>
+              <a:rPr b="0" i="0" lang="en-US" sz="1400" u="none" cap="none" strike="noStrike">
+                <a:solidFill>
+                  <a:srgbClr val="333333"/>
+                </a:solidFill>
+                <a:latin typeface="Arial"/>
+                <a:ea typeface="Arial"/>
+                <a:cs typeface="Arial"/>
+                <a:sym typeface="Arial"/>
+              </a:rPr>
+              <a:t>• stuck follows at 38.3%</a:t>
+            </a:r>
+            <a:endParaRPr/>
+          </a:p>
+          <a:p>
+            <a:pPr indent="0" lvl="0" marL="0" marR="0" rtl="0" algn="l">
+              <a:spcBef>
+                <a:spcPts val="600"/>
+              </a:spcBef>
+              <a:spcAft>
+                <a:spcPts val="0"/>
+              </a:spcAft>
+              <a:buNone/>
+            </a:pPr>
+            <a:r>
+              <a:rPr b="0" i="0" lang="en-US" sz="1400" u="none" cap="none" strike="noStrike">
+                <a:solidFill>
+                  <a:srgbClr val="333333"/>
+                </a:solidFill>
+                <a:latin typeface="Arial"/>
+                <a:ea typeface="Arial"/>
+                <a:cs typeface="Arial"/>
+                <a:sym typeface="Arial"/>
+              </a:rPr>
+              <a:t>• Isolation Forest catches 15%</a:t>
+            </a:r>
+            <a:endParaRPr/>
+          </a:p>
+          <a:p>
+            <a:pPr indent="0" lvl="0" marL="0" marR="0" rtl="0" algn="l">
+              <a:spcBef>
+                <a:spcPts val="600"/>
+              </a:spcBef>
+              <a:spcAft>
+                <a:spcPts val="0"/>
+              </a:spcAft>
+              <a:buNone/>
+            </a:pPr>
+            <a:r>
+              <a:rPr b="0" i="0" lang="en-US" sz="1400" u="none" cap="none" strike="noStrike">
+                <a:solidFill>
+                  <a:srgbClr val="333333"/>
+                </a:solidFill>
+                <a:latin typeface="Arial"/>
+                <a:ea typeface="Arial"/>
+                <a:cs typeface="Arial"/>
+                <a:sym typeface="Arial"/>
+              </a:rPr>
+              <a:t>• Single run can have multiple anomalies</a:t>
+            </a:r>
+            <a:endParaRPr/>
+          </a:p>
+        </p:txBody>
+      </p:sp>
+    </p:spTree>
+  </p:cSld>
+  <p:clrMapOvr>
+    <a:masterClrMapping/>
+  </p:clrMapOvr>
+</p:sld>
+</file>
+
+<file path=ppt/slides/slide8.xml><?xml version="1.0" encoding="utf-8"?>
+<p:sld xmlns:a="http://schemas.openxmlformats.org/drawingml/2006/main" xmlns:r="http://schemas.openxmlformats.org/officeDocument/2006/relationships" xmlns:mc="http://schemas.openxmlformats.org/markup-compatibility/2006" xmlns:mv="urn:schemas-microsoft-com:mac:vml" xmlns:p="http://schemas.openxmlformats.org/presentationml/2006/main" xmlns:c="http://schemas.openxmlformats.org/drawingml/2006/chart" xmlns:dgm="http://schemas.openxmlformats.org/drawingml/2006/diagram" xmlns:o="urn:schemas-microsoft-com:office:office" xmlns:v="urn:schemas-microsoft-com:vml" xmlns:pvml="urn:schemas-microsoft-com:office:powerpoint" xmlns:com="http://schemas.openxmlformats.org/drawingml/2006/compatibility" xmlns:p14="http://schemas.microsoft.com/office/powerpoint/2010/main" xmlns:p15="http://schemas.microsoft.com/office/powerpoint/2012/main" xmlns:ahyp="http://schemas.microsoft.com/office/drawing/2018/hyperlinkcolor">
+  <p:cSld>
+    <p:spTree>
+      <p:nvGrpSpPr>
+        <p:cNvPr id="143" name="Shape 143"/>
+        <p:cNvGrpSpPr/>
+        <p:nvPr/>
+      </p:nvGrpSpPr>
+      <p:grpSpPr>
+        <a:xfrm>
+          <a:off x="0" y="0"/>
+          <a:ext cx="0" cy="0"/>
+          <a:chOff x="0" y="0"/>
+          <a:chExt cx="0" cy="0"/>
+        </a:xfrm>
+      </p:grpSpPr>
+      <p:sp>
+        <p:nvSpPr>
+          <p:cNvPr id="144" name="Google Shape;144;p7"/>
+          <p:cNvSpPr txBox="1"/>
+          <p:nvPr/>
+        </p:nvSpPr>
+        <p:spPr>
+          <a:xfrm>
+            <a:off x="457200" y="365760"/>
+            <a:ext cx="9144000" cy="523200"/>
+          </a:xfrm>
+          <a:prstGeom prst="rect">
+            <a:avLst/>
+          </a:prstGeom>
+          <a:noFill/>
+          <a:ln>
+            <a:noFill/>
+          </a:ln>
+        </p:spPr>
+        <p:txBody>
+          <a:bodyPr anchorCtr="0" anchor="t" bIns="45700" lIns="91425" spcFirstLastPara="1" rIns="91425" wrap="square" tIns="45700">
+            <a:spAutoFit/>
+          </a:bodyPr>
+          <a:lstStyle/>
+          <a:p>
+            <a:pPr indent="0" lvl="0" marL="0" rtl="0" algn="l">
+              <a:spcBef>
+                <a:spcPts val="800"/>
+              </a:spcBef>
+              <a:spcAft>
+                <a:spcPts val="0"/>
+              </a:spcAft>
+              <a:buClr>
+                <a:schemeClr val="dk1"/>
+              </a:buClr>
+              <a:buFont typeface="Arial"/>
+              <a:buNone/>
+            </a:pPr>
+            <a:r>
+              <a:t/>
+            </a:r>
+            <a:endParaRPr b="1" sz="2800"/>
+          </a:p>
+        </p:txBody>
+      </p:sp>
+      <p:sp>
+        <p:nvSpPr>
+          <p:cNvPr id="145" name="Google Shape;145;p7"/>
+          <p:cNvSpPr txBox="1"/>
+          <p:nvPr/>
+        </p:nvSpPr>
+        <p:spPr>
+          <a:xfrm>
+            <a:off x="10058400" y="365760"/>
+            <a:ext cx="1645800" cy="307800"/>
+          </a:xfrm>
+          <a:prstGeom prst="rect">
+            <a:avLst/>
+          </a:prstGeom>
+          <a:noFill/>
+          <a:ln>
+            <a:noFill/>
+          </a:ln>
+        </p:spPr>
+        <p:txBody>
+          <a:bodyPr anchorCtr="0" anchor="t" bIns="45700" lIns="91425" spcFirstLastPara="1" rIns="91425" wrap="square" tIns="45700">
+            <a:spAutoFit/>
+          </a:bodyPr>
+          <a:lstStyle/>
+          <a:p>
+            <a:pPr indent="0" lvl="0" marL="0" marR="0" rtl="0" algn="r">
+              <a:spcBef>
+                <a:spcPts val="0"/>
+              </a:spcBef>
+              <a:spcAft>
+                <a:spcPts val="0"/>
+              </a:spcAft>
+              <a:buNone/>
+            </a:pPr>
+            <a:r>
               <a:t/>
             </a:r>
             <a:endParaRPr/>
@@ -19994,7 +21026,7 @@
       </p:sp>
       <p:sp>
         <p:nvSpPr>
-          <p:cNvPr id="137" name="Google Shape;137;p7"/>
+          <p:cNvPr id="146" name="Google Shape;146;p7"/>
           <p:cNvSpPr/>
           <p:nvPr/>
         </p:nvSpPr>
@@ -20052,7 +21084,7 @@
       </p:sp>
       <p:sp>
         <p:nvSpPr>
-          <p:cNvPr id="138" name="Google Shape;138;p7"/>
+          <p:cNvPr id="147" name="Google Shape;147;p7"/>
           <p:cNvSpPr txBox="1"/>
           <p:nvPr/>
         </p:nvSpPr>
@@ -20200,65 +21232,12 @@
 </p:sld>
 </file>
 
-<file path=ppt/slides/slide8.xml><?xml version="1.0" encoding="utf-8"?>
-<p:sld xmlns:a="http://schemas.openxmlformats.org/drawingml/2006/main" xmlns:r="http://schemas.openxmlformats.org/officeDocument/2006/relationships" xmlns:mc="http://schemas.openxmlformats.org/markup-compatibility/2006" xmlns:mv="urn:schemas-microsoft-com:mac:vml" xmlns:p="http://schemas.openxmlformats.org/presentationml/2006/main" xmlns:c="http://schemas.openxmlformats.org/drawingml/2006/chart" xmlns:dgm="http://schemas.openxmlformats.org/drawingml/2006/diagram" xmlns:o="urn:schemas-microsoft-com:office:office" xmlns:v="urn:schemas-microsoft-com:vml" xmlns:pvml="urn:schemas-microsoft-com:office:powerpoint" xmlns:com="http://schemas.openxmlformats.org/drawingml/2006/compatibility" xmlns:p14="http://schemas.microsoft.com/office/powerpoint/2010/main" xmlns:p15="http://schemas.microsoft.com/office/powerpoint/2012/main" xmlns:ahyp="http://schemas.microsoft.com/office/drawing/2018/hyperlinkcolor">
-  <p:cSld>
-    <p:spTree>
-      <p:nvGrpSpPr>
-        <p:cNvPr id="142" name="Shape 142"/>
-        <p:cNvGrpSpPr/>
-        <p:nvPr/>
-      </p:nvGrpSpPr>
-      <p:grpSpPr>
-        <a:xfrm>
-          <a:off x="0" y="0"/>
-          <a:ext cx="0" cy="0"/>
-          <a:chOff x="0" y="0"/>
-          <a:chExt cx="0" cy="0"/>
-        </a:xfrm>
-      </p:grpSpPr>
-      <p:pic>
-        <p:nvPicPr>
-          <p:cNvPr descr="### 1. Anomaly Frequency by Type&#10;| Anomaly Type | Count | % of Runs |&#10;|--------------|-------|-----------|&#10;| goal_failure | 150 | 50.0% |&#10;| stuck | 115 | 38.3% |&#10;| Isolation Forest | 45 | 15.0% |&#10;| position_error_spike | 15 | 5.0% |&#10;| high_yaw_error | 9 | 3.0% |&#10;| path_inefficiency | 7 | 2.3% |&#10;&#10;Total anomaly occurrences - 341 &#10;&#10;**Key Finding:** `goal_failure` is the most common anomaly (50%), followed by `stuck` (38.3%). The ML-based Isolation Forest detector catches 15% of runs as anomalous." id="143" name="Google Shape;143;g3923dfd7fba_0_9"/>
-          <p:cNvPicPr preferRelativeResize="0"/>
-          <p:nvPr/>
-        </p:nvPicPr>
-        <p:blipFill>
-          <a:blip r:embed="rId3">
-            <a:alphaModFix/>
-          </a:blip>
-          <a:stretch>
-            <a:fillRect/>
-          </a:stretch>
-        </p:blipFill>
-        <p:spPr>
-          <a:xfrm>
-            <a:off x="0" y="26672"/>
-            <a:ext cx="12191409" cy="6804508"/>
-          </a:xfrm>
-          <a:prstGeom prst="rect">
-            <a:avLst/>
-          </a:prstGeom>
-          <a:noFill/>
-          <a:ln>
-            <a:noFill/>
-          </a:ln>
-        </p:spPr>
-      </p:pic>
-    </p:spTree>
-  </p:cSld>
-  <p:clrMapOvr>
-    <a:masterClrMapping/>
-  </p:clrMapOvr>
-</p:sld>
-</file>
-
 <file path=ppt/slides/slide9.xml><?xml version="1.0" encoding="utf-8"?>
 <p:sld xmlns:a="http://schemas.openxmlformats.org/drawingml/2006/main" xmlns:r="http://schemas.openxmlformats.org/officeDocument/2006/relationships" xmlns:mc="http://schemas.openxmlformats.org/markup-compatibility/2006" xmlns:mv="urn:schemas-microsoft-com:mac:vml" xmlns:p="http://schemas.openxmlformats.org/presentationml/2006/main" xmlns:c="http://schemas.openxmlformats.org/drawingml/2006/chart" xmlns:dgm="http://schemas.openxmlformats.org/drawingml/2006/diagram" xmlns:o="urn:schemas-microsoft-com:office:office" xmlns:v="urn:schemas-microsoft-com:vml" xmlns:pvml="urn:schemas-microsoft-com:office:powerpoint" xmlns:com="http://schemas.openxmlformats.org/drawingml/2006/compatibility" xmlns:p14="http://schemas.microsoft.com/office/powerpoint/2010/main" xmlns:p15="http://schemas.microsoft.com/office/powerpoint/2012/main" xmlns:ahyp="http://schemas.microsoft.com/office/drawing/2018/hyperlinkcolor">
   <p:cSld>
     <p:spTree>
       <p:nvGrpSpPr>
-        <p:cNvPr id="147" name="Shape 147"/>
+        <p:cNvPr id="151" name="Shape 151"/>
         <p:cNvGrpSpPr/>
         <p:nvPr/>
       </p:nvGrpSpPr>
@@ -20272,14 +21251,14 @@
       </p:grpSpPr>
       <p:sp>
         <p:nvSpPr>
-          <p:cNvPr id="148" name="Google Shape;148;p8"/>
+          <p:cNvPr id="152" name="Google Shape;152;p8"/>
           <p:cNvSpPr txBox="1"/>
           <p:nvPr/>
         </p:nvSpPr>
         <p:spPr>
           <a:xfrm>
             <a:off x="457200" y="365760"/>
-            <a:ext cx="9144000" cy="731520"/>
+            <a:ext cx="9144000" cy="523200"/>
           </a:xfrm>
           <a:prstGeom prst="rect">
             <a:avLst/>
@@ -20305,16 +21284,12 @@
               <a:buNone/>
             </a:pPr>
             <a:r>
-              <a:rPr b="1" i="0" lang="en-US" sz="2800" u="none" cap="none" strike="noStrike">
+              <a:rPr i="0" lang="en-US" sz="2800" u="none" cap="none" strike="noStrike">
                 <a:solidFill>
                   <a:srgbClr val="000000"/>
                 </a:solidFill>
-                <a:latin typeface="Arial"/>
-                <a:ea typeface="Arial"/>
-                <a:cs typeface="Arial"/>
-                <a:sym typeface="Arial"/>
               </a:rPr>
-              <a:t>3. Insights - Scenario Categories</a:t>
+              <a:t>Insights - Scenario Categories</a:t>
             </a:r>
             <a:endParaRPr/>
           </a:p>
@@ -20322,7 +21297,7 @@
       </p:sp>
       <p:sp>
         <p:nvSpPr>
-          <p:cNvPr id="149" name="Google Shape;149;p8"/>
+          <p:cNvPr id="153" name="Google Shape;153;p8"/>
           <p:cNvSpPr txBox="1"/>
           <p:nvPr/>
         </p:nvSpPr>
@@ -20372,7 +21347,7 @@
       </p:sp>
       <p:sp>
         <p:nvSpPr>
-          <p:cNvPr id="150" name="Google Shape;150;p8"/>
+          <p:cNvPr id="154" name="Google Shape;154;p8"/>
           <p:cNvSpPr/>
           <p:nvPr/>
         </p:nvSpPr>
@@ -20430,7 +21405,7 @@
       </p:sp>
       <p:sp>
         <p:nvSpPr>
-          <p:cNvPr id="151" name="Google Shape;151;p8"/>
+          <p:cNvPr id="155" name="Google Shape;155;p8"/>
           <p:cNvSpPr txBox="1"/>
           <p:nvPr/>
         </p:nvSpPr>
@@ -20681,6 +21656,285 @@
 </file>
 
 <file path=ppt/theme/theme1.xml><?xml version="1.0" encoding="utf-8"?>
+<a:theme xmlns:a="http://schemas.openxmlformats.org/drawingml/2006/main" xmlns:r="http://schemas.openxmlformats.org/officeDocument/2006/relationships">
+  <a:themeElements>
+    <a:clrScheme name="Default">
+      <a:dk1>
+        <a:srgbClr val="000000"/>
+      </a:dk1>
+      <a:lt1>
+        <a:srgbClr val="FFFFFF"/>
+      </a:lt1>
+      <a:dk2>
+        <a:srgbClr val="158158"/>
+      </a:dk2>
+      <a:lt2>
+        <a:srgbClr val="F3F3F3"/>
+      </a:lt2>
+      <a:accent1>
+        <a:srgbClr val="058DC7"/>
+      </a:accent1>
+      <a:accent2>
+        <a:srgbClr val="50B432"/>
+      </a:accent2>
+      <a:accent3>
+        <a:srgbClr val="ED561B"/>
+      </a:accent3>
+      <a:accent4>
+        <a:srgbClr val="EDEF00"/>
+      </a:accent4>
+      <a:accent5>
+        <a:srgbClr val="24CBE5"/>
+      </a:accent5>
+      <a:accent6>
+        <a:srgbClr val="64E572"/>
+      </a:accent6>
+      <a:hlink>
+        <a:srgbClr val="2200CC"/>
+      </a:hlink>
+      <a:folHlink>
+        <a:srgbClr val="551A8B"/>
+      </a:folHlink>
+    </a:clrScheme>
+    <a:fontScheme name="Office">
+      <a:majorFont>
+        <a:latin typeface="Arial"/>
+        <a:ea typeface=""/>
+        <a:cs typeface=""/>
+        <a:font script="Jpan" typeface="ＭＳ Ｐゴシック"/>
+        <a:font script="Hang" typeface="맑은 고딕"/>
+        <a:font script="Hans" typeface="宋体"/>
+        <a:font script="Hant" typeface="新細明體"/>
+        <a:font script="Arab" typeface="Times New Roman"/>
+        <a:font script="Hebr" typeface="Times New Roman"/>
+        <a:font script="Thai" typeface="Angsana New"/>
+        <a:font script="Ethi" typeface="Nyala"/>
+        <a:font script="Beng" typeface="Vrinda"/>
+        <a:font script="Gujr" typeface="Shruti"/>
+        <a:font script="Khmr" typeface="MoolBoran"/>
+        <a:font script="Knda" typeface="Tunga"/>
+        <a:font script="Guru" typeface="Raavi"/>
+        <a:font script="Cans" typeface="Euphemia"/>
+        <a:font script="Cher" typeface="Plantagenet Cherokee"/>
+        <a:font script="Yiii" typeface="Microsoft Yi Baiti"/>
+        <a:font script="Tibt" typeface="Microsoft Himalaya"/>
+        <a:font script="Thaa" typeface="MV Boli"/>
+        <a:font script="Deva" typeface="Mangal"/>
+        <a:font script="Telu" typeface="Gautami"/>
+        <a:font script="Taml" typeface="Latha"/>
+        <a:font script="Syrc" typeface="Estrangelo Edessa"/>
+        <a:font script="Orya" typeface="Kalinga"/>
+        <a:font script="Mlym" typeface="Kartika"/>
+        <a:font script="Laoo" typeface="DokChampa"/>
+        <a:font script="Sinh" typeface="Iskoola Pota"/>
+        <a:font script="Mong" typeface="Mongolian Baiti"/>
+        <a:font script="Viet" typeface="Times New Roman"/>
+        <a:font script="Uigh" typeface="Microsoft Uighur"/>
+        <a:font script="Geor" typeface="Sylfaen"/>
+      </a:majorFont>
+      <a:minorFont>
+        <a:latin typeface="Arial"/>
+        <a:ea typeface=""/>
+        <a:cs typeface=""/>
+        <a:font script="Jpan" typeface="ＭＳ Ｐゴシック"/>
+        <a:font script="Hang" typeface="맑은 고딕"/>
+        <a:font script="Hans" typeface="宋体"/>
+        <a:font script="Hant" typeface="新細明體"/>
+        <a:font script="Arab" typeface="Arial"/>
+        <a:font script="Hebr" typeface="Arial"/>
+        <a:font script="Thai" typeface="Cordia New"/>
+        <a:font script="Ethi" typeface="Nyala"/>
+        <a:font script="Beng" typeface="Vrinda"/>
+        <a:font script="Gujr" typeface="Shruti"/>
+        <a:font script="Khmr" typeface="DaunPenh"/>
+        <a:font script="Knda" typeface="Tunga"/>
+        <a:font script="Guru" typeface="Raavi"/>
+        <a:font script="Cans" typeface="Euphemia"/>
+        <a:font script="Cher" typeface="Plantagenet Cherokee"/>
+        <a:font script="Yiii" typeface="Microsoft Yi Baiti"/>
+        <a:font script="Tibt" typeface="Microsoft Himalaya"/>
+        <a:font script="Thaa" typeface="MV Boli"/>
+        <a:font script="Deva" typeface="Mangal"/>
+        <a:font script="Telu" typeface="Gautami"/>
+        <a:font script="Taml" typeface="Latha"/>
+        <a:font script="Syrc" typeface="Estrangelo Edessa"/>
+        <a:font script="Orya" typeface="Kalinga"/>
+        <a:font script="Mlym" typeface="Kartika"/>
+        <a:font script="Laoo" typeface="DokChampa"/>
+        <a:font script="Sinh" typeface="Iskoola Pota"/>
+        <a:font script="Mong" typeface="Mongolian Baiti"/>
+        <a:font script="Viet" typeface="Arial"/>
+        <a:font script="Uigh" typeface="Microsoft Uighur"/>
+        <a:font script="Geor" typeface="Sylfaen"/>
+      </a:minorFont>
+    </a:fontScheme>
+    <a:fmtScheme name="Office">
+      <a:fillStyleLst>
+        <a:solidFill>
+          <a:schemeClr val="phClr"/>
+        </a:solidFill>
+        <a:gradFill rotWithShape="1">
+          <a:gsLst>
+            <a:gs pos="0">
+              <a:schemeClr val="phClr">
+                <a:tint val="50000"/>
+                <a:satMod val="300000"/>
+              </a:schemeClr>
+            </a:gs>
+            <a:gs pos="35000">
+              <a:schemeClr val="phClr">
+                <a:tint val="37000"/>
+                <a:satMod val="300000"/>
+              </a:schemeClr>
+            </a:gs>
+            <a:gs pos="100000">
+              <a:schemeClr val="phClr">
+                <a:tint val="15000"/>
+                <a:satMod val="350000"/>
+              </a:schemeClr>
+            </a:gs>
+          </a:gsLst>
+          <a:lin ang="16200000" scaled="1"/>
+        </a:gradFill>
+        <a:gradFill rotWithShape="1">
+          <a:gsLst>
+            <a:gs pos="0">
+              <a:schemeClr val="phClr">
+                <a:tint val="100000"/>
+                <a:shade val="100000"/>
+                <a:satMod val="130000"/>
+              </a:schemeClr>
+            </a:gs>
+            <a:gs pos="100000">
+              <a:schemeClr val="phClr">
+                <a:tint val="50000"/>
+                <a:shade val="100000"/>
+                <a:satMod val="350000"/>
+              </a:schemeClr>
+            </a:gs>
+          </a:gsLst>
+          <a:lin ang="16200000" scaled="0"/>
+        </a:gradFill>
+      </a:fillStyleLst>
+      <a:lnStyleLst>
+        <a:ln w="9525" cap="flat" cmpd="sng" algn="ctr">
+          <a:solidFill>
+            <a:schemeClr val="phClr">
+              <a:shade val="95000"/>
+              <a:satMod val="105000"/>
+            </a:schemeClr>
+          </a:solidFill>
+          <a:prstDash val="solid"/>
+        </a:ln>
+        <a:ln w="25400" cap="flat" cmpd="sng" algn="ctr">
+          <a:solidFill>
+            <a:schemeClr val="phClr"/>
+          </a:solidFill>
+          <a:prstDash val="solid"/>
+        </a:ln>
+        <a:ln w="38100" cap="flat" cmpd="sng" algn="ctr">
+          <a:solidFill>
+            <a:schemeClr val="phClr"/>
+          </a:solidFill>
+          <a:prstDash val="solid"/>
+        </a:ln>
+      </a:lnStyleLst>
+      <a:effectStyleLst>
+        <a:effectStyle>
+          <a:effectLst>
+            <a:outerShdw blurRad="40000" dist="20000" dir="5400000" rotWithShape="0">
+              <a:srgbClr val="000000">
+                <a:alpha val="38000"/>
+              </a:srgbClr>
+            </a:outerShdw>
+          </a:effectLst>
+        </a:effectStyle>
+        <a:effectStyle>
+          <a:effectLst>
+            <a:outerShdw blurRad="40000" dist="23000" dir="5400000" rotWithShape="0">
+              <a:srgbClr val="000000">
+                <a:alpha val="35000"/>
+              </a:srgbClr>
+            </a:outerShdw>
+          </a:effectLst>
+        </a:effectStyle>
+        <a:effectStyle>
+          <a:effectLst>
+            <a:outerShdw blurRad="40000" dist="23000" dir="5400000" rotWithShape="0">
+              <a:srgbClr val="000000">
+                <a:alpha val="35000"/>
+              </a:srgbClr>
+            </a:outerShdw>
+          </a:effectLst>
+          <a:scene3d>
+            <a:camera prst="orthographicFront">
+              <a:rot lat="0" lon="0" rev="0"/>
+            </a:camera>
+            <a:lightRig rig="threePt" dir="t">
+              <a:rot lat="0" lon="0" rev="1200000"/>
+            </a:lightRig>
+          </a:scene3d>
+          <a:sp3d>
+            <a:bevelT w="63500" h="25400"/>
+          </a:sp3d>
+        </a:effectStyle>
+      </a:effectStyleLst>
+      <a:bgFillStyleLst>
+        <a:solidFill>
+          <a:schemeClr val="phClr"/>
+        </a:solidFill>
+        <a:gradFill rotWithShape="1">
+          <a:gsLst>
+            <a:gs pos="0">
+              <a:schemeClr val="phClr">
+                <a:tint val="40000"/>
+                <a:satMod val="350000"/>
+              </a:schemeClr>
+            </a:gs>
+            <a:gs pos="40000">
+              <a:schemeClr val="phClr">
+                <a:tint val="45000"/>
+                <a:shade val="99000"/>
+                <a:satMod val="350000"/>
+              </a:schemeClr>
+            </a:gs>
+            <a:gs pos="100000">
+              <a:schemeClr val="phClr">
+                <a:shade val="20000"/>
+                <a:satMod val="255000"/>
+              </a:schemeClr>
+            </a:gs>
+          </a:gsLst>
+          <a:path path="circle">
+            <a:fillToRect l="50000" t="-80000" r="50000" b="180000"/>
+          </a:path>
+        </a:gradFill>
+        <a:gradFill rotWithShape="1">
+          <a:gsLst>
+            <a:gs pos="0">
+              <a:schemeClr val="phClr">
+                <a:tint val="80000"/>
+                <a:satMod val="300000"/>
+              </a:schemeClr>
+            </a:gs>
+            <a:gs pos="100000">
+              <a:schemeClr val="phClr">
+                <a:shade val="30000"/>
+                <a:satMod val="200000"/>
+              </a:schemeClr>
+            </a:gs>
+          </a:gsLst>
+          <a:path path="circle">
+            <a:fillToRect l="50000" t="50000" r="50000" b="50000"/>
+          </a:path>
+        </a:gradFill>
+      </a:bgFillStyleLst>
+    </a:fmtScheme>
+  </a:themeElements>
+</a:theme>
+</file>
+
+<file path=ppt/theme/theme2.xml><?xml version="1.0" encoding="utf-8"?>
 <a:theme xmlns:a="http://schemas.openxmlformats.org/drawingml/2006/main" xmlns:r="http://schemas.openxmlformats.org/officeDocument/2006/relationships" name="Office Theme">
   <a:themeElements>
     <a:clrScheme name="Office">
@@ -20957,283 +22211,4 @@
     </a:fmtScheme>
   </a:themeElements>
 </a:theme>
-</file>
-
-<file path=ppt/theme/theme2.xml><?xml version="1.0" encoding="utf-8"?>
-<a:theme xmlns:a="http://schemas.openxmlformats.org/drawingml/2006/main" xmlns:r="http://schemas.openxmlformats.org/officeDocument/2006/relationships">
-  <a:themeElements>
-    <a:clrScheme name="Default">
-      <a:dk1>
-        <a:srgbClr val="000000"/>
-      </a:dk1>
-      <a:lt1>
-        <a:srgbClr val="FFFFFF"/>
-      </a:lt1>
-      <a:dk2>
-        <a:srgbClr val="158158"/>
-      </a:dk2>
-      <a:lt2>
-        <a:srgbClr val="F3F3F3"/>
-      </a:lt2>
-      <a:accent1>
-        <a:srgbClr val="058DC7"/>
-      </a:accent1>
-      <a:accent2>
-        <a:srgbClr val="50B432"/>
-      </a:accent2>
-      <a:accent3>
-        <a:srgbClr val="ED561B"/>
-      </a:accent3>
-      <a:accent4>
-        <a:srgbClr val="EDEF00"/>
-      </a:accent4>
-      <a:accent5>
-        <a:srgbClr val="24CBE5"/>
-      </a:accent5>
-      <a:accent6>
-        <a:srgbClr val="64E572"/>
-      </a:accent6>
-      <a:hlink>
-        <a:srgbClr val="2200CC"/>
-      </a:hlink>
-      <a:folHlink>
-        <a:srgbClr val="551A8B"/>
-      </a:folHlink>
-    </a:clrScheme>
-    <a:fontScheme name="Office">
-      <a:majorFont>
-        <a:latin typeface="Arial"/>
-        <a:ea typeface=""/>
-        <a:cs typeface=""/>
-        <a:font script="Jpan" typeface="ＭＳ Ｐゴシック"/>
-        <a:font script="Hang" typeface="맑은 고딕"/>
-        <a:font script="Hans" typeface="宋体"/>
-        <a:font script="Hant" typeface="新細明體"/>
-        <a:font script="Arab" typeface="Times New Roman"/>
-        <a:font script="Hebr" typeface="Times New Roman"/>
-        <a:font script="Thai" typeface="Angsana New"/>
-        <a:font script="Ethi" typeface="Nyala"/>
-        <a:font script="Beng" typeface="Vrinda"/>
-        <a:font script="Gujr" typeface="Shruti"/>
-        <a:font script="Khmr" typeface="MoolBoran"/>
-        <a:font script="Knda" typeface="Tunga"/>
-        <a:font script="Guru" typeface="Raavi"/>
-        <a:font script="Cans" typeface="Euphemia"/>
-        <a:font script="Cher" typeface="Plantagenet Cherokee"/>
-        <a:font script="Yiii" typeface="Microsoft Yi Baiti"/>
-        <a:font script="Tibt" typeface="Microsoft Himalaya"/>
-        <a:font script="Thaa" typeface="MV Boli"/>
-        <a:font script="Deva" typeface="Mangal"/>
-        <a:font script="Telu" typeface="Gautami"/>
-        <a:font script="Taml" typeface="Latha"/>
-        <a:font script="Syrc" typeface="Estrangelo Edessa"/>
-        <a:font script="Orya" typeface="Kalinga"/>
-        <a:font script="Mlym" typeface="Kartika"/>
-        <a:font script="Laoo" typeface="DokChampa"/>
-        <a:font script="Sinh" typeface="Iskoola Pota"/>
-        <a:font script="Mong" typeface="Mongolian Baiti"/>
-        <a:font script="Viet" typeface="Times New Roman"/>
-        <a:font script="Uigh" typeface="Microsoft Uighur"/>
-        <a:font script="Geor" typeface="Sylfaen"/>
-      </a:majorFont>
-      <a:minorFont>
-        <a:latin typeface="Arial"/>
-        <a:ea typeface=""/>
-        <a:cs typeface=""/>
-        <a:font script="Jpan" typeface="ＭＳ Ｐゴシック"/>
-        <a:font script="Hang" typeface="맑은 고딕"/>
-        <a:font script="Hans" typeface="宋体"/>
-        <a:font script="Hant" typeface="新細明體"/>
-        <a:font script="Arab" typeface="Arial"/>
-        <a:font script="Hebr" typeface="Arial"/>
-        <a:font script="Thai" typeface="Cordia New"/>
-        <a:font script="Ethi" typeface="Nyala"/>
-        <a:font script="Beng" typeface="Vrinda"/>
-        <a:font script="Gujr" typeface="Shruti"/>
-        <a:font script="Khmr" typeface="DaunPenh"/>
-        <a:font script="Knda" typeface="Tunga"/>
-        <a:font script="Guru" typeface="Raavi"/>
-        <a:font script="Cans" typeface="Euphemia"/>
-        <a:font script="Cher" typeface="Plantagenet Cherokee"/>
-        <a:font script="Yiii" typeface="Microsoft Yi Baiti"/>
-        <a:font script="Tibt" typeface="Microsoft Himalaya"/>
-        <a:font script="Thaa" typeface="MV Boli"/>
-        <a:font script="Deva" typeface="Mangal"/>
-        <a:font script="Telu" typeface="Gautami"/>
-        <a:font script="Taml" typeface="Latha"/>
-        <a:font script="Syrc" typeface="Estrangelo Edessa"/>
-        <a:font script="Orya" typeface="Kalinga"/>
-        <a:font script="Mlym" typeface="Kartika"/>
-        <a:font script="Laoo" typeface="DokChampa"/>
-        <a:font script="Sinh" typeface="Iskoola Pota"/>
-        <a:font script="Mong" typeface="Mongolian Baiti"/>
-        <a:font script="Viet" typeface="Arial"/>
-        <a:font script="Uigh" typeface="Microsoft Uighur"/>
-        <a:font script="Geor" typeface="Sylfaen"/>
-      </a:minorFont>
-    </a:fontScheme>
-    <a:fmtScheme name="Office">
-      <a:fillStyleLst>
-        <a:solidFill>
-          <a:schemeClr val="phClr"/>
-        </a:solidFill>
-        <a:gradFill rotWithShape="1">
-          <a:gsLst>
-            <a:gs pos="0">
-              <a:schemeClr val="phClr">
-                <a:tint val="50000"/>
-                <a:satMod val="300000"/>
-              </a:schemeClr>
-            </a:gs>
-            <a:gs pos="35000">
-              <a:schemeClr val="phClr">
-                <a:tint val="37000"/>
-                <a:satMod val="300000"/>
-              </a:schemeClr>
-            </a:gs>
-            <a:gs pos="100000">
-              <a:schemeClr val="phClr">
-                <a:tint val="15000"/>
-                <a:satMod val="350000"/>
-              </a:schemeClr>
-            </a:gs>
-          </a:gsLst>
-          <a:lin ang="16200000" scaled="1"/>
-        </a:gradFill>
-        <a:gradFill rotWithShape="1">
-          <a:gsLst>
-            <a:gs pos="0">
-              <a:schemeClr val="phClr">
-                <a:tint val="100000"/>
-                <a:shade val="100000"/>
-                <a:satMod val="130000"/>
-              </a:schemeClr>
-            </a:gs>
-            <a:gs pos="100000">
-              <a:schemeClr val="phClr">
-                <a:tint val="50000"/>
-                <a:shade val="100000"/>
-                <a:satMod val="350000"/>
-              </a:schemeClr>
-            </a:gs>
-          </a:gsLst>
-          <a:lin ang="16200000" scaled="0"/>
-        </a:gradFill>
-      </a:fillStyleLst>
-      <a:lnStyleLst>
-        <a:ln w="9525" cap="flat" cmpd="sng" algn="ctr">
-          <a:solidFill>
-            <a:schemeClr val="phClr">
-              <a:shade val="95000"/>
-              <a:satMod val="105000"/>
-            </a:schemeClr>
-          </a:solidFill>
-          <a:prstDash val="solid"/>
-        </a:ln>
-        <a:ln w="25400" cap="flat" cmpd="sng" algn="ctr">
-          <a:solidFill>
-            <a:schemeClr val="phClr"/>
-          </a:solidFill>
-          <a:prstDash val="solid"/>
-        </a:ln>
-        <a:ln w="38100" cap="flat" cmpd="sng" algn="ctr">
-          <a:solidFill>
-            <a:schemeClr val="phClr"/>
-          </a:solidFill>
-          <a:prstDash val="solid"/>
-        </a:ln>
-      </a:lnStyleLst>
-      <a:effectStyleLst>
-        <a:effectStyle>
-          <a:effectLst>
-            <a:outerShdw blurRad="40000" dist="20000" dir="5400000" rotWithShape="0">
-              <a:srgbClr val="000000">
-                <a:alpha val="38000"/>
-              </a:srgbClr>
-            </a:outerShdw>
-          </a:effectLst>
-        </a:effectStyle>
-        <a:effectStyle>
-          <a:effectLst>
-            <a:outerShdw blurRad="40000" dist="23000" dir="5400000" rotWithShape="0">
-              <a:srgbClr val="000000">
-                <a:alpha val="35000"/>
-              </a:srgbClr>
-            </a:outerShdw>
-          </a:effectLst>
-        </a:effectStyle>
-        <a:effectStyle>
-          <a:effectLst>
-            <a:outerShdw blurRad="40000" dist="23000" dir="5400000" rotWithShape="0">
-              <a:srgbClr val="000000">
-                <a:alpha val="35000"/>
-              </a:srgbClr>
-            </a:outerShdw>
-          </a:effectLst>
-          <a:scene3d>
-            <a:camera prst="orthographicFront">
-              <a:rot lat="0" lon="0" rev="0"/>
-            </a:camera>
-            <a:lightRig rig="threePt" dir="t">
-              <a:rot lat="0" lon="0" rev="1200000"/>
-            </a:lightRig>
-          </a:scene3d>
-          <a:sp3d>
-            <a:bevelT w="63500" h="25400"/>
-          </a:sp3d>
-        </a:effectStyle>
-      </a:effectStyleLst>
-      <a:bgFillStyleLst>
-        <a:solidFill>
-          <a:schemeClr val="phClr"/>
-        </a:solidFill>
-        <a:gradFill rotWithShape="1">
-          <a:gsLst>
-            <a:gs pos="0">
-              <a:schemeClr val="phClr">
-                <a:tint val="40000"/>
-                <a:satMod val="350000"/>
-              </a:schemeClr>
-            </a:gs>
-            <a:gs pos="40000">
-              <a:schemeClr val="phClr">
-                <a:tint val="45000"/>
-                <a:shade val="99000"/>
-                <a:satMod val="350000"/>
-              </a:schemeClr>
-            </a:gs>
-            <a:gs pos="100000">
-              <a:schemeClr val="phClr">
-                <a:shade val="20000"/>
-                <a:satMod val="255000"/>
-              </a:schemeClr>
-            </a:gs>
-          </a:gsLst>
-          <a:path path="circle">
-            <a:fillToRect l="50000" t="-80000" r="50000" b="180000"/>
-          </a:path>
-        </a:gradFill>
-        <a:gradFill rotWithShape="1">
-          <a:gsLst>
-            <a:gs pos="0">
-              <a:schemeClr val="phClr">
-                <a:tint val="80000"/>
-                <a:satMod val="300000"/>
-              </a:schemeClr>
-            </a:gs>
-            <a:gs pos="100000">
-              <a:schemeClr val="phClr">
-                <a:shade val="30000"/>
-                <a:satMod val="200000"/>
-              </a:schemeClr>
-            </a:gs>
-          </a:gsLst>
-          <a:path path="circle">
-            <a:fillToRect l="50000" t="50000" r="50000" b="50000"/>
-          </a:path>
-        </a:gradFill>
-      </a:bgFillStyleLst>
-    </a:fmtScheme>
-  </a:themeElements>
-</a:theme>
 </file>
--- a/assignment3/Team2_Presentation.pptx
+++ b/assignment3/Team2_Presentation.pptx
@@ -27,7 +27,6 @@
     <p:sldId id="272" r:id="rId23"/>
     <p:sldId id="273" r:id="rId24"/>
     <p:sldId id="274" r:id="rId25"/>
-    <p:sldId id="275" r:id="rId26"/>
   </p:sldIdLst>
   <p:sldSz cy="6858000" cx="12191675"/>
   <p:notesSz cx="6858000" cy="9144000"/>
@@ -276,7 +275,7 @@
       </p15:sldGuideLst>
     </p:ext>
     <p:ext uri="GoogleSlidesCustomDataVersion2">
-      <go:slidesCustomData xmlns:go="http://customooxmlschemas.google.com/" r:id="rId27" roundtripDataSignature="AMtx7mjam8hPzfhdRcOmO9srOgbsouq+Nw=="/>
+      <go:slidesCustomData xmlns:go="http://customooxmlschemas.google.com/" r:id="rId26" roundtripDataSignature="AMtx7miD7d3XlHPavAwvvWtOqct76C5FIA=="/>
     </p:ext>
   </p:extLst>
 </p:presentation>
@@ -826,7 +825,7 @@
       </p:grpSpPr>
       <p:sp>
         <p:nvSpPr>
-          <p:cNvPr id="157" name="Google Shape;157;p10:notes"/>
+          <p:cNvPr id="157" name="Google Shape;157;p9:notes"/>
           <p:cNvSpPr txBox="1"/>
           <p:nvPr>
             <p:ph idx="1" type="body"/>
@@ -865,7 +864,7 @@
       </p:sp>
       <p:sp>
         <p:nvSpPr>
-          <p:cNvPr id="158" name="Google Shape;158;p10:notes"/>
+          <p:cNvPr id="158" name="Google Shape;158;p9:notes"/>
           <p:cNvSpPr/>
           <p:nvPr>
             <p:ph idx="2" type="sldImg"/>
@@ -925,7 +924,7 @@
       </p:grpSpPr>
       <p:sp>
         <p:nvSpPr>
-          <p:cNvPr id="165" name="Google Shape;165;p9:notes"/>
+          <p:cNvPr id="165" name="Google Shape;165;p11:notes"/>
           <p:cNvSpPr txBox="1"/>
           <p:nvPr>
             <p:ph idx="1" type="body"/>
@@ -964,7 +963,7 @@
       </p:sp>
       <p:sp>
         <p:nvSpPr>
-          <p:cNvPr id="166" name="Google Shape;166;p9:notes"/>
+          <p:cNvPr id="166" name="Google Shape;166;p11:notes"/>
           <p:cNvSpPr/>
           <p:nvPr>
             <p:ph idx="2" type="sldImg"/>
@@ -1010,7 +1009,7 @@
   <p:cSld>
     <p:spTree>
       <p:nvGrpSpPr>
-        <p:cNvPr id="172" name="Shape 172"/>
+        <p:cNvPr id="175" name="Shape 175"/>
         <p:cNvGrpSpPr/>
         <p:nvPr/>
       </p:nvGrpSpPr>
@@ -1024,7 +1023,42 @@
       </p:grpSpPr>
       <p:sp>
         <p:nvSpPr>
-          <p:cNvPr id="173" name="Google Shape;173;p11:notes"/>
+          <p:cNvPr id="176" name="Google Shape;176;g3923dfd7fba_0_4:notes"/>
+          <p:cNvSpPr/>
+          <p:nvPr>
+            <p:ph idx="2" type="sldImg"/>
+          </p:nvPr>
+        </p:nvSpPr>
+        <p:spPr>
+          <a:xfrm>
+            <a:off x="1143225" y="685800"/>
+            <a:ext cx="4572300" cy="3429000"/>
+          </a:xfrm>
+          <a:custGeom>
+            <a:rect b="b" l="l" r="r" t="t"/>
+            <a:pathLst>
+              <a:path extrusionOk="0" h="120000" w="120000">
+                <a:moveTo>
+                  <a:pt x="0" y="0"/>
+                </a:moveTo>
+                <a:lnTo>
+                  <a:pt x="120000" y="0"/>
+                </a:lnTo>
+                <a:lnTo>
+                  <a:pt x="120000" y="120000"/>
+                </a:lnTo>
+                <a:lnTo>
+                  <a:pt x="0" y="120000"/>
+                </a:lnTo>
+                <a:close/>
+              </a:path>
+            </a:pathLst>
+          </a:custGeom>
+        </p:spPr>
+      </p:sp>
+      <p:sp>
+        <p:nvSpPr>
+          <p:cNvPr id="177" name="Google Shape;177;g3923dfd7fba_0_4:notes"/>
           <p:cNvSpPr txBox="1"/>
           <p:nvPr>
             <p:ph idx="1" type="body"/>
@@ -1061,9 +1095,73 @@
           </a:p>
         </p:txBody>
       </p:sp>
+    </p:spTree>
+  </p:cSld>
+  <p:clrMapOvr>
+    <a:masterClrMapping/>
+  </p:clrMapOvr>
+</p:notes>
+</file>
+
+<file path=ppt/notesSlides/notesSlide13.xml><?xml version="1.0" encoding="utf-8"?>
+<p:notes xmlns:a="http://schemas.openxmlformats.org/drawingml/2006/main" xmlns:r="http://schemas.openxmlformats.org/officeDocument/2006/relationships" xmlns:mc="http://schemas.openxmlformats.org/markup-compatibility/2006" xmlns:mv="urn:schemas-microsoft-com:mac:vml" xmlns:p="http://schemas.openxmlformats.org/presentationml/2006/main" xmlns:c="http://schemas.openxmlformats.org/drawingml/2006/chart" xmlns:dgm="http://schemas.openxmlformats.org/drawingml/2006/diagram" xmlns:o="urn:schemas-microsoft-com:office:office" xmlns:v="urn:schemas-microsoft-com:vml" xmlns:pvml="urn:schemas-microsoft-com:office:powerpoint" xmlns:com="http://schemas.openxmlformats.org/drawingml/2006/compatibility" xmlns:p14="http://schemas.microsoft.com/office/powerpoint/2010/main" xmlns:p15="http://schemas.microsoft.com/office/powerpoint/2012/main" xmlns:ahyp="http://schemas.microsoft.com/office/drawing/2018/hyperlinkcolor" showMasterPhAnim="0" showMasterSp="0">
+  <p:cSld>
+    <p:spTree>
+      <p:nvGrpSpPr>
+        <p:cNvPr id="181" name="Shape 181"/>
+        <p:cNvGrpSpPr/>
+        <p:nvPr/>
+      </p:nvGrpSpPr>
+      <p:grpSpPr>
+        <a:xfrm>
+          <a:off x="0" y="0"/>
+          <a:ext cx="0" cy="0"/>
+          <a:chOff x="0" y="0"/>
+          <a:chExt cx="0" cy="0"/>
+        </a:xfrm>
+      </p:grpSpPr>
       <p:sp>
         <p:nvSpPr>
-          <p:cNvPr id="174" name="Google Shape;174;p11:notes"/>
+          <p:cNvPr id="182" name="Google Shape;182;p12:notes"/>
+          <p:cNvSpPr txBox="1"/>
+          <p:nvPr>
+            <p:ph idx="1" type="body"/>
+          </p:nvPr>
+        </p:nvSpPr>
+        <p:spPr>
+          <a:xfrm>
+            <a:off x="685800" y="4343400"/>
+            <a:ext cx="5486400" cy="4114800"/>
+          </a:xfrm>
+          <a:prstGeom prst="rect">
+            <a:avLst/>
+          </a:prstGeom>
+        </p:spPr>
+        <p:txBody>
+          <a:bodyPr anchorCtr="0" anchor="t" bIns="91425" lIns="91425" spcFirstLastPara="1" rIns="91425" wrap="square" tIns="91425">
+            <a:noAutofit/>
+          </a:bodyPr>
+          <a:lstStyle/>
+          <a:p>
+            <a:pPr indent="0" lvl="0" marL="0" rtl="0" algn="l">
+              <a:spcBef>
+                <a:spcPts val="0"/>
+              </a:spcBef>
+              <a:spcAft>
+                <a:spcPts val="0"/>
+              </a:spcAft>
+              <a:buNone/>
+            </a:pPr>
+            <a:r>
+              <a:t/>
+            </a:r>
+            <a:endParaRPr/>
+          </a:p>
+        </p:txBody>
+      </p:sp>
+      <p:sp>
+        <p:nvSpPr>
+          <p:cNvPr id="183" name="Google Shape;183;p12:notes"/>
           <p:cNvSpPr/>
           <p:nvPr>
             <p:ph idx="2" type="sldImg"/>
@@ -1104,12 +1202,12 @@
 </p:notes>
 </file>
 
-<file path=ppt/notesSlides/notesSlide13.xml><?xml version="1.0" encoding="utf-8"?>
+<file path=ppt/notesSlides/notesSlide14.xml><?xml version="1.0" encoding="utf-8"?>
 <p:notes xmlns:a="http://schemas.openxmlformats.org/drawingml/2006/main" xmlns:r="http://schemas.openxmlformats.org/officeDocument/2006/relationships" xmlns:mc="http://schemas.openxmlformats.org/markup-compatibility/2006" xmlns:mv="urn:schemas-microsoft-com:mac:vml" xmlns:p="http://schemas.openxmlformats.org/presentationml/2006/main" xmlns:c="http://schemas.openxmlformats.org/drawingml/2006/chart" xmlns:dgm="http://schemas.openxmlformats.org/drawingml/2006/diagram" xmlns:o="urn:schemas-microsoft-com:office:office" xmlns:v="urn:schemas-microsoft-com:vml" xmlns:pvml="urn:schemas-microsoft-com:office:powerpoint" xmlns:com="http://schemas.openxmlformats.org/drawingml/2006/compatibility" xmlns:p14="http://schemas.microsoft.com/office/powerpoint/2010/main" xmlns:p15="http://schemas.microsoft.com/office/powerpoint/2012/main" xmlns:ahyp="http://schemas.microsoft.com/office/drawing/2018/hyperlinkcolor" showMasterPhAnim="0" showMasterSp="0">
   <p:cSld>
     <p:spTree>
       <p:nvGrpSpPr>
-        <p:cNvPr id="183" name="Shape 183"/>
+        <p:cNvPr id="188" name="Shape 188"/>
         <p:cNvGrpSpPr/>
         <p:nvPr/>
       </p:nvGrpSpPr>
@@ -1123,42 +1221,7 @@
       </p:grpSpPr>
       <p:sp>
         <p:nvSpPr>
-          <p:cNvPr id="184" name="Google Shape;184;g3923dfd7fba_0_4:notes"/>
-          <p:cNvSpPr/>
-          <p:nvPr>
-            <p:ph idx="2" type="sldImg"/>
-          </p:nvPr>
-        </p:nvSpPr>
-        <p:spPr>
-          <a:xfrm>
-            <a:off x="1143225" y="685800"/>
-            <a:ext cx="4572300" cy="3429000"/>
-          </a:xfrm>
-          <a:custGeom>
-            <a:rect b="b" l="l" r="r" t="t"/>
-            <a:pathLst>
-              <a:path extrusionOk="0" h="120000" w="120000">
-                <a:moveTo>
-                  <a:pt x="0" y="0"/>
-                </a:moveTo>
-                <a:lnTo>
-                  <a:pt x="120000" y="0"/>
-                </a:lnTo>
-                <a:lnTo>
-                  <a:pt x="120000" y="120000"/>
-                </a:lnTo>
-                <a:lnTo>
-                  <a:pt x="0" y="120000"/>
-                </a:lnTo>
-                <a:close/>
-              </a:path>
-            </a:pathLst>
-          </a:custGeom>
-        </p:spPr>
-      </p:sp>
-      <p:sp>
-        <p:nvSpPr>
-          <p:cNvPr id="185" name="Google Shape;185;g3923dfd7fba_0_4:notes"/>
+          <p:cNvPr id="189" name="Google Shape;189;p13:notes"/>
           <p:cNvSpPr txBox="1"/>
           <p:nvPr>
             <p:ph idx="1" type="body"/>
@@ -1195,73 +1258,9 @@
           </a:p>
         </p:txBody>
       </p:sp>
-    </p:spTree>
-  </p:cSld>
-  <p:clrMapOvr>
-    <a:masterClrMapping/>
-  </p:clrMapOvr>
-</p:notes>
-</file>
-
-<file path=ppt/notesSlides/notesSlide14.xml><?xml version="1.0" encoding="utf-8"?>
-<p:notes xmlns:a="http://schemas.openxmlformats.org/drawingml/2006/main" xmlns:r="http://schemas.openxmlformats.org/officeDocument/2006/relationships" xmlns:mc="http://schemas.openxmlformats.org/markup-compatibility/2006" xmlns:mv="urn:schemas-microsoft-com:mac:vml" xmlns:p="http://schemas.openxmlformats.org/presentationml/2006/main" xmlns:c="http://schemas.openxmlformats.org/drawingml/2006/chart" xmlns:dgm="http://schemas.openxmlformats.org/drawingml/2006/diagram" xmlns:o="urn:schemas-microsoft-com:office:office" xmlns:v="urn:schemas-microsoft-com:vml" xmlns:pvml="urn:schemas-microsoft-com:office:powerpoint" xmlns:com="http://schemas.openxmlformats.org/drawingml/2006/compatibility" xmlns:p14="http://schemas.microsoft.com/office/powerpoint/2010/main" xmlns:p15="http://schemas.microsoft.com/office/powerpoint/2012/main" xmlns:ahyp="http://schemas.microsoft.com/office/drawing/2018/hyperlinkcolor" showMasterPhAnim="0" showMasterSp="0">
-  <p:cSld>
-    <p:spTree>
-      <p:nvGrpSpPr>
-        <p:cNvPr id="189" name="Shape 189"/>
-        <p:cNvGrpSpPr/>
-        <p:nvPr/>
-      </p:nvGrpSpPr>
-      <p:grpSpPr>
-        <a:xfrm>
-          <a:off x="0" y="0"/>
-          <a:ext cx="0" cy="0"/>
-          <a:chOff x="0" y="0"/>
-          <a:chExt cx="0" cy="0"/>
-        </a:xfrm>
-      </p:grpSpPr>
       <p:sp>
         <p:nvSpPr>
-          <p:cNvPr id="190" name="Google Shape;190;p12:notes"/>
-          <p:cNvSpPr txBox="1"/>
-          <p:nvPr>
-            <p:ph idx="1" type="body"/>
-          </p:nvPr>
-        </p:nvSpPr>
-        <p:spPr>
-          <a:xfrm>
-            <a:off x="685800" y="4343400"/>
-            <a:ext cx="5486400" cy="4114800"/>
-          </a:xfrm>
-          <a:prstGeom prst="rect">
-            <a:avLst/>
-          </a:prstGeom>
-        </p:spPr>
-        <p:txBody>
-          <a:bodyPr anchorCtr="0" anchor="t" bIns="91425" lIns="91425" spcFirstLastPara="1" rIns="91425" wrap="square" tIns="91425">
-            <a:noAutofit/>
-          </a:bodyPr>
-          <a:lstStyle/>
-          <a:p>
-            <a:pPr indent="0" lvl="0" marL="0" rtl="0" algn="l">
-              <a:spcBef>
-                <a:spcPts val="0"/>
-              </a:spcBef>
-              <a:spcAft>
-                <a:spcPts val="0"/>
-              </a:spcAft>
-              <a:buNone/>
-            </a:pPr>
-            <a:r>
-              <a:t/>
-            </a:r>
-            <a:endParaRPr/>
-          </a:p>
-        </p:txBody>
-      </p:sp>
-      <p:sp>
-        <p:nvSpPr>
-          <p:cNvPr id="191" name="Google Shape;191;p12:notes"/>
+          <p:cNvPr id="190" name="Google Shape;190;p13:notes"/>
           <p:cNvSpPr/>
           <p:nvPr>
             <p:ph idx="2" type="sldImg"/>
@@ -1307,7 +1306,7 @@
   <p:cSld>
     <p:spTree>
       <p:nvGrpSpPr>
-        <p:cNvPr id="197" name="Shape 197"/>
+        <p:cNvPr id="196" name="Shape 196"/>
         <p:cNvGrpSpPr/>
         <p:nvPr/>
       </p:nvGrpSpPr>
@@ -1321,7 +1320,7 @@
       </p:grpSpPr>
       <p:sp>
         <p:nvSpPr>
-          <p:cNvPr id="198" name="Google Shape;198;g3923dfd7fba_0_0:notes"/>
+          <p:cNvPr id="197" name="Google Shape;197;g3923dfd7fba_4_92:notes"/>
           <p:cNvSpPr/>
           <p:nvPr>
             <p:ph idx="2" type="sldImg"/>
@@ -1356,7 +1355,7 @@
       </p:sp>
       <p:sp>
         <p:nvSpPr>
-          <p:cNvPr id="199" name="Google Shape;199;g3923dfd7fba_0_0:notes"/>
+          <p:cNvPr id="198" name="Google Shape;198;g3923dfd7fba_4_92:notes"/>
           <p:cNvSpPr txBox="1"/>
           <p:nvPr>
             <p:ph idx="1" type="body"/>
@@ -1406,7 +1405,7 @@
   <p:cSld>
     <p:spTree>
       <p:nvGrpSpPr>
-        <p:cNvPr id="202" name="Shape 202"/>
+        <p:cNvPr id="203" name="Shape 203"/>
         <p:cNvGrpSpPr/>
         <p:nvPr/>
       </p:nvGrpSpPr>
@@ -1420,46 +1419,7 @@
       </p:grpSpPr>
       <p:sp>
         <p:nvSpPr>
-          <p:cNvPr id="203" name="Google Shape;203;p13:notes"/>
-          <p:cNvSpPr txBox="1"/>
-          <p:nvPr>
-            <p:ph idx="1" type="body"/>
-          </p:nvPr>
-        </p:nvSpPr>
-        <p:spPr>
-          <a:xfrm>
-            <a:off x="685800" y="4343400"/>
-            <a:ext cx="5486400" cy="4114800"/>
-          </a:xfrm>
-          <a:prstGeom prst="rect">
-            <a:avLst/>
-          </a:prstGeom>
-        </p:spPr>
-        <p:txBody>
-          <a:bodyPr anchorCtr="0" anchor="t" bIns="91425" lIns="91425" spcFirstLastPara="1" rIns="91425" wrap="square" tIns="91425">
-            <a:noAutofit/>
-          </a:bodyPr>
-          <a:lstStyle/>
-          <a:p>
-            <a:pPr indent="0" lvl="0" marL="0" rtl="0" algn="l">
-              <a:spcBef>
-                <a:spcPts val="0"/>
-              </a:spcBef>
-              <a:spcAft>
-                <a:spcPts val="0"/>
-              </a:spcAft>
-              <a:buNone/>
-            </a:pPr>
-            <a:r>
-              <a:t/>
-            </a:r>
-            <a:endParaRPr/>
-          </a:p>
-        </p:txBody>
-      </p:sp>
-      <p:sp>
-        <p:nvSpPr>
-          <p:cNvPr id="204" name="Google Shape;204;p13:notes"/>
+          <p:cNvPr id="204" name="Google Shape;204;g3923dfd7fba_4_98:notes"/>
           <p:cNvSpPr/>
           <p:nvPr>
             <p:ph idx="2" type="sldImg"/>
@@ -1468,7 +1428,7 @@
         <p:spPr>
           <a:xfrm>
             <a:off x="1143225" y="685800"/>
-            <a:ext cx="4572225" cy="3429000"/>
+            <a:ext cx="4572300" cy="3429000"/>
           </a:xfrm>
           <a:custGeom>
             <a:rect b="b" l="l" r="r" t="t"/>
@@ -1491,6 +1451,45 @@
             </a:pathLst>
           </a:custGeom>
         </p:spPr>
+      </p:sp>
+      <p:sp>
+        <p:nvSpPr>
+          <p:cNvPr id="205" name="Google Shape;205;g3923dfd7fba_4_98:notes"/>
+          <p:cNvSpPr txBox="1"/>
+          <p:nvPr>
+            <p:ph idx="1" type="body"/>
+          </p:nvPr>
+        </p:nvSpPr>
+        <p:spPr>
+          <a:xfrm>
+            <a:off x="685800" y="4343400"/>
+            <a:ext cx="5486400" cy="4114800"/>
+          </a:xfrm>
+          <a:prstGeom prst="rect">
+            <a:avLst/>
+          </a:prstGeom>
+        </p:spPr>
+        <p:txBody>
+          <a:bodyPr anchorCtr="0" anchor="t" bIns="91425" lIns="91425" spcFirstLastPara="1" rIns="91425" wrap="square" tIns="91425">
+            <a:noAutofit/>
+          </a:bodyPr>
+          <a:lstStyle/>
+          <a:p>
+            <a:pPr indent="0" lvl="0" marL="0" rtl="0" algn="l">
+              <a:spcBef>
+                <a:spcPts val="0"/>
+              </a:spcBef>
+              <a:spcAft>
+                <a:spcPts val="0"/>
+              </a:spcAft>
+              <a:buNone/>
+            </a:pPr>
+            <a:r>
+              <a:t/>
+            </a:r>
+            <a:endParaRPr/>
+          </a:p>
+        </p:txBody>
       </p:sp>
     </p:spTree>
   </p:cSld>
@@ -1717,7 +1716,7 @@
       </p:grpSpPr>
       <p:sp>
         <p:nvSpPr>
-          <p:cNvPr id="227" name="Google Shape;227;p15:notes"/>
+          <p:cNvPr id="227" name="Google Shape;227;p16:notes"/>
           <p:cNvSpPr txBox="1"/>
           <p:nvPr>
             <p:ph idx="1" type="body"/>
@@ -1756,7 +1755,7 @@
       </p:sp>
       <p:sp>
         <p:nvSpPr>
-          <p:cNvPr id="228" name="Google Shape;228;p15:notes"/>
+          <p:cNvPr id="228" name="Google Shape;228;p16:notes"/>
           <p:cNvSpPr/>
           <p:nvPr>
             <p:ph idx="2" type="sldImg"/>
@@ -1856,105 +1855,6 @@
       <p:sp>
         <p:nvSpPr>
           <p:cNvPr id="88" name="Google Shape;88;p2:notes"/>
-          <p:cNvSpPr/>
-          <p:nvPr>
-            <p:ph idx="2" type="sldImg"/>
-          </p:nvPr>
-        </p:nvSpPr>
-        <p:spPr>
-          <a:xfrm>
-            <a:off x="1143225" y="685800"/>
-            <a:ext cx="4572225" cy="3429000"/>
-          </a:xfrm>
-          <a:custGeom>
-            <a:rect b="b" l="l" r="r" t="t"/>
-            <a:pathLst>
-              <a:path extrusionOk="0" h="120000" w="120000">
-                <a:moveTo>
-                  <a:pt x="0" y="0"/>
-                </a:moveTo>
-                <a:lnTo>
-                  <a:pt x="120000" y="0"/>
-                </a:lnTo>
-                <a:lnTo>
-                  <a:pt x="120000" y="120000"/>
-                </a:lnTo>
-                <a:lnTo>
-                  <a:pt x="0" y="120000"/>
-                </a:lnTo>
-                <a:close/>
-              </a:path>
-            </a:pathLst>
-          </a:custGeom>
-        </p:spPr>
-      </p:sp>
-    </p:spTree>
-  </p:cSld>
-  <p:clrMapOvr>
-    <a:masterClrMapping/>
-  </p:clrMapOvr>
-</p:notes>
-</file>
-
-<file path=ppt/notesSlides/notesSlide20.xml><?xml version="1.0" encoding="utf-8"?>
-<p:notes xmlns:a="http://schemas.openxmlformats.org/drawingml/2006/main" xmlns:r="http://schemas.openxmlformats.org/officeDocument/2006/relationships" xmlns:mc="http://schemas.openxmlformats.org/markup-compatibility/2006" xmlns:mv="urn:schemas-microsoft-com:mac:vml" xmlns:p="http://schemas.openxmlformats.org/presentationml/2006/main" xmlns:c="http://schemas.openxmlformats.org/drawingml/2006/chart" xmlns:dgm="http://schemas.openxmlformats.org/drawingml/2006/diagram" xmlns:o="urn:schemas-microsoft-com:office:office" xmlns:v="urn:schemas-microsoft-com:vml" xmlns:pvml="urn:schemas-microsoft-com:office:powerpoint" xmlns:com="http://schemas.openxmlformats.org/drawingml/2006/compatibility" xmlns:p14="http://schemas.microsoft.com/office/powerpoint/2010/main" xmlns:p15="http://schemas.microsoft.com/office/powerpoint/2012/main" xmlns:ahyp="http://schemas.microsoft.com/office/drawing/2018/hyperlinkcolor" showMasterPhAnim="0" showMasterSp="0">
-  <p:cSld>
-    <p:spTree>
-      <p:nvGrpSpPr>
-        <p:cNvPr id="233" name="Shape 233"/>
-        <p:cNvGrpSpPr/>
-        <p:nvPr/>
-      </p:nvGrpSpPr>
-      <p:grpSpPr>
-        <a:xfrm>
-          <a:off x="0" y="0"/>
-          <a:ext cx="0" cy="0"/>
-          <a:chOff x="0" y="0"/>
-          <a:chExt cx="0" cy="0"/>
-        </a:xfrm>
-      </p:grpSpPr>
-      <p:sp>
-        <p:nvSpPr>
-          <p:cNvPr id="234" name="Google Shape;234;p16:notes"/>
-          <p:cNvSpPr txBox="1"/>
-          <p:nvPr>
-            <p:ph idx="1" type="body"/>
-          </p:nvPr>
-        </p:nvSpPr>
-        <p:spPr>
-          <a:xfrm>
-            <a:off x="685800" y="4343400"/>
-            <a:ext cx="5486400" cy="4114800"/>
-          </a:xfrm>
-          <a:prstGeom prst="rect">
-            <a:avLst/>
-          </a:prstGeom>
-        </p:spPr>
-        <p:txBody>
-          <a:bodyPr anchorCtr="0" anchor="t" bIns="91425" lIns="91425" spcFirstLastPara="1" rIns="91425" wrap="square" tIns="91425">
-            <a:noAutofit/>
-          </a:bodyPr>
-          <a:lstStyle/>
-          <a:p>
-            <a:pPr indent="0" lvl="0" marL="0" rtl="0" algn="l">
-              <a:spcBef>
-                <a:spcPts val="0"/>
-              </a:spcBef>
-              <a:spcAft>
-                <a:spcPts val="0"/>
-              </a:spcAft>
-              <a:buNone/>
-            </a:pPr>
-            <a:r>
-              <a:t/>
-            </a:r>
-            <a:endParaRPr/>
-          </a:p>
-        </p:txBody>
-      </p:sp>
-      <p:sp>
-        <p:nvSpPr>
-          <p:cNvPr id="235" name="Google Shape;235;p16:notes"/>
           <p:cNvSpPr/>
           <p:nvPr>
             <p:ph idx="2" type="sldImg"/>
@@ -2608,7 +2508,7 @@
       </p:grpSpPr>
       <p:sp>
         <p:nvSpPr>
-          <p:cNvPr id="149" name="Google Shape;149;p8:notes"/>
+          <p:cNvPr id="149" name="Google Shape;149;p10:notes"/>
           <p:cNvSpPr txBox="1"/>
           <p:nvPr>
             <p:ph idx="1" type="body"/>
@@ -2647,7 +2547,7 @@
       </p:sp>
       <p:sp>
         <p:nvSpPr>
-          <p:cNvPr id="150" name="Google Shape;150;p8:notes"/>
+          <p:cNvPr id="150" name="Google Shape;150;p10:notes"/>
           <p:cNvSpPr/>
           <p:nvPr>
             <p:ph idx="2" type="sldImg"/>
@@ -12428,7 +12328,7 @@
       </p:grpSpPr>
       <p:sp>
         <p:nvSpPr>
-          <p:cNvPr id="160" name="Google Shape;160;p10"/>
+          <p:cNvPr id="160" name="Google Shape;160;p9"/>
           <p:cNvSpPr txBox="1"/>
           <p:nvPr/>
         </p:nvSpPr>
@@ -12466,7 +12366,7 @@
                   <a:srgbClr val="000000"/>
                 </a:solidFill>
               </a:rPr>
-              <a:t>Insights - Anomaly Co-occurrence</a:t>
+              <a:t>Insights - Early Detection (First 30% of Run)</a:t>
             </a:r>
             <a:endParaRPr/>
           </a:p>
@@ -12474,7 +12374,7 @@
       </p:sp>
       <p:sp>
         <p:nvSpPr>
-          <p:cNvPr id="161" name="Google Shape;161;p10"/>
+          <p:cNvPr id="161" name="Google Shape;161;p9"/>
           <p:cNvSpPr txBox="1"/>
           <p:nvPr/>
         </p:nvSpPr>
@@ -12524,7 +12424,7 @@
       </p:sp>
       <p:sp>
         <p:nvSpPr>
-          <p:cNvPr id="162" name="Google Shape;162;p10"/>
+          <p:cNvPr id="162" name="Google Shape;162;p9"/>
           <p:cNvSpPr/>
           <p:nvPr/>
         </p:nvSpPr>
@@ -12580,349 +12480,9 @@
           </a:p>
         </p:txBody>
       </p:sp>
-      <p:sp>
-        <p:nvSpPr>
-          <p:cNvPr id="163" name="Google Shape;163;p10"/>
-          <p:cNvSpPr txBox="1"/>
-          <p:nvPr/>
-        </p:nvSpPr>
-        <p:spPr>
-          <a:xfrm>
-            <a:off x="609450" y="1682381"/>
-            <a:ext cx="10972800" cy="1826400"/>
-          </a:xfrm>
-          <a:prstGeom prst="rect">
-            <a:avLst/>
-          </a:prstGeom>
-          <a:noFill/>
-          <a:ln>
-            <a:noFill/>
-          </a:ln>
-        </p:spPr>
-        <p:txBody>
-          <a:bodyPr anchorCtr="0" anchor="t" bIns="45700" lIns="91425" spcFirstLastPara="1" rIns="91425" wrap="square" tIns="45700">
-            <a:spAutoFit/>
-          </a:bodyPr>
-          <a:lstStyle/>
-          <a:p>
-            <a:pPr indent="0" lvl="0" marL="0" marR="0" rtl="0" algn="l">
-              <a:spcBef>
-                <a:spcPts val="0"/>
-              </a:spcBef>
-              <a:spcAft>
-                <a:spcPts val="0"/>
-              </a:spcAft>
-              <a:buNone/>
-            </a:pPr>
-            <a:r>
-              <a:rPr b="0" i="0" lang="en-US" sz="1800" u="none" cap="none" strike="noStrike">
-                <a:solidFill>
-                  <a:srgbClr val="333333"/>
-                </a:solidFill>
-                <a:latin typeface="Arial"/>
-                <a:ea typeface="Arial"/>
-                <a:cs typeface="Arial"/>
-                <a:sym typeface="Arial"/>
-              </a:rPr>
-              <a:t>• position_error_spike + high_yaw_error (Jaccard = 0</a:t>
-            </a:r>
-            <a:r>
-              <a:rPr b="0" i="0" lang="en-US" sz="1800" u="none" cap="none" strike="noStrike">
-                <a:solidFill>
-                  <a:srgbClr val="333333"/>
-                </a:solidFill>
-                <a:latin typeface="Arial"/>
-                <a:ea typeface="Arial"/>
-                <a:cs typeface="Arial"/>
-                <a:sym typeface="Arial"/>
-              </a:rPr>
-              <a:t>.60)</a:t>
-            </a:r>
-            <a:endParaRPr/>
-          </a:p>
-          <a:p>
-            <a:pPr indent="0" lvl="0" marL="0" marR="0" rtl="0" algn="l">
-              <a:spcBef>
-                <a:spcPts val="800"/>
-              </a:spcBef>
-              <a:spcAft>
-                <a:spcPts val="0"/>
-              </a:spcAft>
-              <a:buNone/>
-            </a:pPr>
-            <a:r>
-              <a:rPr b="0" i="0" lang="en-US" sz="1800" u="none" cap="none" strike="noStrike">
-                <a:solidFill>
-                  <a:srgbClr val="333333"/>
-                </a:solidFill>
-                <a:latin typeface="Arial"/>
-                <a:ea typeface="Arial"/>
-                <a:cs typeface="Arial"/>
-                <a:sym typeface="Arial"/>
-              </a:rPr>
-              <a:t>•   -&gt; Poor orientation tracking leads to position drift</a:t>
-            </a:r>
-            <a:endParaRPr/>
-          </a:p>
-          <a:p>
-            <a:pPr indent="0" lvl="0" marL="0" marR="0" rtl="0" algn="l">
-              <a:spcBef>
-                <a:spcPts val="800"/>
-              </a:spcBef>
-              <a:spcAft>
-                <a:spcPts val="0"/>
-              </a:spcAft>
-              <a:buNone/>
-            </a:pPr>
-            <a:r>
-              <a:rPr b="0" i="0" lang="en-US" sz="1800" u="none" cap="none" strike="noStrike">
-                <a:solidFill>
-                  <a:srgbClr val="333333"/>
-                </a:solidFill>
-                <a:latin typeface="Arial"/>
-                <a:ea typeface="Arial"/>
-                <a:cs typeface="Arial"/>
-                <a:sym typeface="Arial"/>
-              </a:rPr>
-              <a:t>• high_yaw_error + path_inefficiency (Jaccar</a:t>
-            </a:r>
-            <a:r>
-              <a:rPr b="0" i="0" lang="en-US" sz="1800" u="none" cap="none" strike="noStrike">
-                <a:solidFill>
-                  <a:srgbClr val="333333"/>
-                </a:solidFill>
-                <a:latin typeface="Arial"/>
-                <a:ea typeface="Arial"/>
-                <a:cs typeface="Arial"/>
-                <a:sym typeface="Arial"/>
-              </a:rPr>
-              <a:t>d = 0.78)</a:t>
-            </a:r>
-            <a:endParaRPr/>
-          </a:p>
-          <a:p>
-            <a:pPr indent="0" lvl="0" marL="0" marR="0" rtl="0" algn="l">
-              <a:spcBef>
-                <a:spcPts val="800"/>
-              </a:spcBef>
-              <a:spcAft>
-                <a:spcPts val="0"/>
-              </a:spcAft>
-              <a:buNone/>
-            </a:pPr>
-            <a:r>
-              <a:rPr b="0" i="0" lang="en-US" sz="1800" u="none" cap="none" strike="noStrike">
-                <a:solidFill>
-                  <a:srgbClr val="333333"/>
-                </a:solidFill>
-                <a:latin typeface="Arial"/>
-                <a:ea typeface="Arial"/>
-                <a:cs typeface="Arial"/>
-                <a:sym typeface="Arial"/>
-              </a:rPr>
-              <a:t>•   -&gt; Orientation errors cause inefficient path execution</a:t>
-            </a:r>
-            <a:endParaRPr/>
-          </a:p>
-          <a:p>
-            <a:pPr indent="0" lvl="0" marL="0" marR="0" rtl="0" algn="l">
-              <a:spcBef>
-                <a:spcPts val="800"/>
-              </a:spcBef>
-              <a:spcAft>
-                <a:spcPts val="0"/>
-              </a:spcAft>
-              <a:buNone/>
-            </a:pPr>
-            <a:r>
-              <a:t/>
-            </a:r>
-            <a:endParaRPr/>
-          </a:p>
-        </p:txBody>
-      </p:sp>
-    </p:spTree>
-  </p:cSld>
-  <p:clrMapOvr>
-    <a:masterClrMapping/>
-  </p:clrMapOvr>
-</p:sld>
-</file>
-
-<file path=ppt/slides/slide11.xml><?xml version="1.0" encoding="utf-8"?>
-<p:sld xmlns:a="http://schemas.openxmlformats.org/drawingml/2006/main" xmlns:r="http://schemas.openxmlformats.org/officeDocument/2006/relationships" xmlns:mc="http://schemas.openxmlformats.org/markup-compatibility/2006" xmlns:mv="urn:schemas-microsoft-com:mac:vml" xmlns:p="http://schemas.openxmlformats.org/presentationml/2006/main" xmlns:c="http://schemas.openxmlformats.org/drawingml/2006/chart" xmlns:dgm="http://schemas.openxmlformats.org/drawingml/2006/diagram" xmlns:o="urn:schemas-microsoft-com:office:office" xmlns:v="urn:schemas-microsoft-com:vml" xmlns:pvml="urn:schemas-microsoft-com:office:powerpoint" xmlns:com="http://schemas.openxmlformats.org/drawingml/2006/compatibility" xmlns:p14="http://schemas.microsoft.com/office/powerpoint/2010/main" xmlns:p15="http://schemas.microsoft.com/office/powerpoint/2012/main" xmlns:ahyp="http://schemas.microsoft.com/office/drawing/2018/hyperlinkcolor">
-  <p:cSld>
-    <p:spTree>
-      <p:nvGrpSpPr>
-        <p:cNvPr id="167" name="Shape 167"/>
-        <p:cNvGrpSpPr/>
-        <p:nvPr/>
-      </p:nvGrpSpPr>
-      <p:grpSpPr>
-        <a:xfrm>
-          <a:off x="0" y="0"/>
-          <a:ext cx="0" cy="0"/>
-          <a:chOff x="0" y="0"/>
-          <a:chExt cx="0" cy="0"/>
-        </a:xfrm>
-      </p:grpSpPr>
-      <p:sp>
-        <p:nvSpPr>
-          <p:cNvPr id="168" name="Google Shape;168;p9"/>
-          <p:cNvSpPr txBox="1"/>
-          <p:nvPr/>
-        </p:nvSpPr>
-        <p:spPr>
-          <a:xfrm>
-            <a:off x="457200" y="365760"/>
-            <a:ext cx="9144000" cy="523200"/>
-          </a:xfrm>
-          <a:prstGeom prst="rect">
-            <a:avLst/>
-          </a:prstGeom>
-          <a:noFill/>
-          <a:ln>
-            <a:noFill/>
-          </a:ln>
-        </p:spPr>
-        <p:txBody>
-          <a:bodyPr anchorCtr="0" anchor="t" bIns="45700" lIns="91425" spcFirstLastPara="1" rIns="91425" wrap="square" tIns="45700">
-            <a:spAutoFit/>
-          </a:bodyPr>
-          <a:lstStyle/>
-          <a:p>
-            <a:pPr indent="0" lvl="0" marL="0" marR="0" rtl="0" algn="l">
-              <a:spcBef>
-                <a:spcPts val="0"/>
-              </a:spcBef>
-              <a:spcAft>
-                <a:spcPts val="0"/>
-              </a:spcAft>
-              <a:buNone/>
-            </a:pPr>
-            <a:r>
-              <a:rPr i="0" lang="en-US" sz="2800" u="none" cap="none" strike="noStrike">
-                <a:solidFill>
-                  <a:srgbClr val="000000"/>
-                </a:solidFill>
-              </a:rPr>
-              <a:t>Insights - Early Detection (First 30% of Run)</a:t>
-            </a:r>
-            <a:endParaRPr/>
-          </a:p>
-        </p:txBody>
-      </p:sp>
-      <p:sp>
-        <p:nvSpPr>
-          <p:cNvPr id="169" name="Google Shape;169;p9"/>
-          <p:cNvSpPr txBox="1"/>
-          <p:nvPr/>
-        </p:nvSpPr>
-        <p:spPr>
-          <a:xfrm>
-            <a:off x="10058400" y="365760"/>
-            <a:ext cx="1645920" cy="457200"/>
-          </a:xfrm>
-          <a:prstGeom prst="rect">
-            <a:avLst/>
-          </a:prstGeom>
-          <a:noFill/>
-          <a:ln>
-            <a:noFill/>
-          </a:ln>
-        </p:spPr>
-        <p:txBody>
-          <a:bodyPr anchorCtr="0" anchor="t" bIns="45700" lIns="91425" spcFirstLastPara="1" rIns="91425" wrap="square" tIns="45700">
-            <a:spAutoFit/>
-          </a:bodyPr>
-          <a:lstStyle/>
-          <a:p>
-            <a:pPr indent="0" lvl="0" marL="0" marR="0" rtl="0" algn="r">
-              <a:spcBef>
-                <a:spcPts val="0"/>
-              </a:spcBef>
-              <a:spcAft>
-                <a:spcPts val="0"/>
-              </a:spcAft>
-              <a:buNone/>
-            </a:pPr>
-            <a:r>
-              <a:rPr b="0" i="0" lang="en-US" sz="1400" u="none" cap="none" strike="noStrike">
-                <a:solidFill>
-                  <a:srgbClr val="666666"/>
-                </a:solidFill>
-                <a:latin typeface="Arial"/>
-                <a:ea typeface="Arial"/>
-                <a:cs typeface="Arial"/>
-                <a:sym typeface="Arial"/>
-              </a:rPr>
-              <a:t>~3 min</a:t>
-            </a:r>
-            <a:endParaRPr/>
-          </a:p>
-        </p:txBody>
-      </p:sp>
-      <p:sp>
-        <p:nvSpPr>
-          <p:cNvPr id="170" name="Google Shape;170;p9"/>
-          <p:cNvSpPr/>
-          <p:nvPr/>
-        </p:nvSpPr>
-        <p:spPr>
-          <a:xfrm>
-            <a:off x="457200" y="1188720"/>
-            <a:ext cx="11277295" cy="18288"/>
-          </a:xfrm>
-          <a:prstGeom prst="rect">
-            <a:avLst/>
-          </a:prstGeom>
-          <a:solidFill>
-            <a:srgbClr val="C8C8C8"/>
-          </a:solidFill>
-          <a:ln>
-            <a:noFill/>
-          </a:ln>
-          <a:effectLst>
-            <a:outerShdw blurRad="40000" rotWithShape="0" dir="5400000" dist="23000">
-              <a:srgbClr val="000000">
-                <a:alpha val="34901"/>
-              </a:srgbClr>
-            </a:outerShdw>
-          </a:effectLst>
-        </p:spPr>
-        <p:txBody>
-          <a:bodyPr anchorCtr="0" anchor="ctr" bIns="45700" lIns="91425" spcFirstLastPara="1" rIns="91425" wrap="square" tIns="45700">
-            <a:noAutofit/>
-          </a:bodyPr>
-          <a:lstStyle/>
-          <a:p>
-            <a:pPr indent="0" lvl="0" marL="0" marR="0" rtl="0" algn="ctr">
-              <a:spcBef>
-                <a:spcPts val="0"/>
-              </a:spcBef>
-              <a:spcAft>
-                <a:spcPts val="0"/>
-              </a:spcAft>
-              <a:buNone/>
-            </a:pPr>
-            <a:r>
-              <a:t/>
-            </a:r>
-            <a:endParaRPr b="0" i="0" sz="1800" u="none" cap="none" strike="noStrike">
-              <a:solidFill>
-                <a:schemeClr val="dk1"/>
-              </a:solidFill>
-              <a:latin typeface="Calibri"/>
-              <a:ea typeface="Calibri"/>
-              <a:cs typeface="Calibri"/>
-              <a:sym typeface="Calibri"/>
-            </a:endParaRPr>
-          </a:p>
-        </p:txBody>
-      </p:sp>
       <p:graphicFrame>
         <p:nvGraphicFramePr>
-          <p:cNvPr id="171" name="Google Shape;171;p9"/>
+          <p:cNvPr id="163" name="Google Shape;163;p9"/>
           <p:cNvGraphicFramePr/>
           <p:nvPr/>
         </p:nvGraphicFramePr>
@@ -12935,7 +12495,7 @@
             <a:tbl>
               <a:tblPr bandRow="1" firstRow="1">
                 <a:noFill/>
-                <a:tableStyleId>{6BF11DA5-D60C-43FA-A1B7-15BA222CE41B}</a:tableStyleId>
+                <a:tableStyleId>{53756993-92F7-49EF-9B74-DAA4B2E32409}</a:tableStyleId>
               </a:tblPr>
               <a:tblGrid>
                 <a:gridCol w="2194550"/>
@@ -13604,12 +13164,12 @@
 </p:sld>
 </file>
 
-<file path=ppt/slides/slide12.xml><?xml version="1.0" encoding="utf-8"?>
+<file path=ppt/slides/slide11.xml><?xml version="1.0" encoding="utf-8"?>
 <p:sld xmlns:a="http://schemas.openxmlformats.org/drawingml/2006/main" xmlns:r="http://schemas.openxmlformats.org/officeDocument/2006/relationships" xmlns:mc="http://schemas.openxmlformats.org/markup-compatibility/2006" xmlns:mv="urn:schemas-microsoft-com:mac:vml" xmlns:p="http://schemas.openxmlformats.org/presentationml/2006/main" xmlns:c="http://schemas.openxmlformats.org/drawingml/2006/chart" xmlns:dgm="http://schemas.openxmlformats.org/drawingml/2006/diagram" xmlns:o="urn:schemas-microsoft-com:office:office" xmlns:v="urn:schemas-microsoft-com:vml" xmlns:pvml="urn:schemas-microsoft-com:office:powerpoint" xmlns:com="http://schemas.openxmlformats.org/drawingml/2006/compatibility" xmlns:p14="http://schemas.microsoft.com/office/powerpoint/2010/main" xmlns:p15="http://schemas.microsoft.com/office/powerpoint/2012/main" xmlns:ahyp="http://schemas.microsoft.com/office/drawing/2018/hyperlinkcolor">
   <p:cSld>
     <p:spTree>
       <p:nvGrpSpPr>
-        <p:cNvPr id="175" name="Shape 175"/>
+        <p:cNvPr id="167" name="Shape 167"/>
         <p:cNvGrpSpPr/>
         <p:nvPr/>
       </p:nvGrpSpPr>
@@ -13623,7 +13183,7 @@
       </p:grpSpPr>
       <p:sp>
         <p:nvSpPr>
-          <p:cNvPr id="176" name="Google Shape;176;p11"/>
+          <p:cNvPr id="168" name="Google Shape;168;p11"/>
           <p:cNvSpPr txBox="1"/>
           <p:nvPr/>
         </p:nvSpPr>
@@ -13669,7 +13229,7 @@
       </p:sp>
       <p:sp>
         <p:nvSpPr>
-          <p:cNvPr id="177" name="Google Shape;177;p11"/>
+          <p:cNvPr id="169" name="Google Shape;169;p11"/>
           <p:cNvSpPr txBox="1"/>
           <p:nvPr/>
         </p:nvSpPr>
@@ -13719,7 +13279,7 @@
       </p:sp>
       <p:sp>
         <p:nvSpPr>
-          <p:cNvPr id="178" name="Google Shape;178;p11"/>
+          <p:cNvPr id="170" name="Google Shape;170;p11"/>
           <p:cNvSpPr/>
           <p:nvPr/>
         </p:nvSpPr>
@@ -13777,7 +13337,7 @@
       </p:sp>
       <p:sp>
         <p:nvSpPr>
-          <p:cNvPr id="179" name="Google Shape;179;p11"/>
+          <p:cNvPr id="171" name="Google Shape;171;p11"/>
           <p:cNvSpPr txBox="1"/>
           <p:nvPr/>
         </p:nvSpPr>
@@ -13827,7 +13387,7 @@
       </p:sp>
       <p:sp>
         <p:nvSpPr>
-          <p:cNvPr id="180" name="Google Shape;180;p11"/>
+          <p:cNvPr id="172" name="Google Shape;172;p11"/>
           <p:cNvSpPr txBox="1"/>
           <p:nvPr/>
         </p:nvSpPr>
@@ -13949,7 +13509,7 @@
       </p:sp>
       <p:sp>
         <p:nvSpPr>
-          <p:cNvPr id="181" name="Google Shape;181;p11"/>
+          <p:cNvPr id="173" name="Google Shape;173;p11"/>
           <p:cNvSpPr txBox="1"/>
           <p:nvPr/>
         </p:nvSpPr>
@@ -13999,7 +13559,7 @@
       </p:sp>
       <p:sp>
         <p:nvSpPr>
-          <p:cNvPr id="182" name="Google Shape;182;p11"/>
+          <p:cNvPr id="174" name="Google Shape;174;p11"/>
           <p:cNvSpPr txBox="1"/>
           <p:nvPr/>
         </p:nvSpPr>
@@ -14127,12 +13687,12 @@
 </p:sld>
 </file>
 
-<file path=ppt/slides/slide13.xml><?xml version="1.0" encoding="utf-8"?>
+<file path=ppt/slides/slide12.xml><?xml version="1.0" encoding="utf-8"?>
 <p:sld xmlns:a="http://schemas.openxmlformats.org/drawingml/2006/main" xmlns:r="http://schemas.openxmlformats.org/officeDocument/2006/relationships" xmlns:mc="http://schemas.openxmlformats.org/markup-compatibility/2006" xmlns:mv="urn:schemas-microsoft-com:mac:vml" xmlns:p="http://schemas.openxmlformats.org/presentationml/2006/main" xmlns:c="http://schemas.openxmlformats.org/drawingml/2006/chart" xmlns:dgm="http://schemas.openxmlformats.org/drawingml/2006/diagram" xmlns:o="urn:schemas-microsoft-com:office:office" xmlns:v="urn:schemas-microsoft-com:vml" xmlns:pvml="urn:schemas-microsoft-com:office:powerpoint" xmlns:com="http://schemas.openxmlformats.org/drawingml/2006/compatibility" xmlns:p14="http://schemas.microsoft.com/office/powerpoint/2010/main" xmlns:p15="http://schemas.microsoft.com/office/powerpoint/2012/main" xmlns:ahyp="http://schemas.microsoft.com/office/drawing/2018/hyperlinkcolor">
   <p:cSld>
     <p:spTree>
       <p:nvGrpSpPr>
-        <p:cNvPr id="186" name="Shape 186"/>
+        <p:cNvPr id="178" name="Shape 178"/>
         <p:cNvGrpSpPr/>
         <p:nvPr/>
       </p:nvGrpSpPr>
@@ -14146,14 +13706,14 @@
       </p:grpSpPr>
       <p:sp>
         <p:nvSpPr>
-          <p:cNvPr id="187" name="Google Shape;187;g3923dfd7fba_0_4"/>
+          <p:cNvPr id="179" name="Google Shape;179;g3923dfd7fba_0_4"/>
           <p:cNvSpPr txBox="1"/>
           <p:nvPr/>
         </p:nvSpPr>
         <p:spPr>
           <a:xfrm>
             <a:off x="1169825" y="1670375"/>
-            <a:ext cx="5044800" cy="3509400"/>
+            <a:ext cx="5088900" cy="3509400"/>
           </a:xfrm>
           <a:prstGeom prst="rect">
             <a:avLst/>
@@ -14355,7 +13915,7 @@
       </p:sp>
       <p:sp>
         <p:nvSpPr>
-          <p:cNvPr id="188" name="Google Shape;188;g3923dfd7fba_0_4"/>
+          <p:cNvPr id="180" name="Google Shape;180;g3923dfd7fba_0_4"/>
           <p:cNvSpPr txBox="1"/>
           <p:nvPr/>
         </p:nvSpPr>
@@ -14570,12 +14130,12 @@
 </p:sld>
 </file>
 
-<file path=ppt/slides/slide14.xml><?xml version="1.0" encoding="utf-8"?>
+<file path=ppt/slides/slide13.xml><?xml version="1.0" encoding="utf-8"?>
 <p:sld xmlns:a="http://schemas.openxmlformats.org/drawingml/2006/main" xmlns:r="http://schemas.openxmlformats.org/officeDocument/2006/relationships" xmlns:mc="http://schemas.openxmlformats.org/markup-compatibility/2006" xmlns:mv="urn:schemas-microsoft-com:mac:vml" xmlns:p="http://schemas.openxmlformats.org/presentationml/2006/main" xmlns:c="http://schemas.openxmlformats.org/drawingml/2006/chart" xmlns:dgm="http://schemas.openxmlformats.org/drawingml/2006/diagram" xmlns:o="urn:schemas-microsoft-com:office:office" xmlns:v="urn:schemas-microsoft-com:vml" xmlns:pvml="urn:schemas-microsoft-com:office:powerpoint" xmlns:com="http://schemas.openxmlformats.org/drawingml/2006/compatibility" xmlns:p14="http://schemas.microsoft.com/office/powerpoint/2010/main" xmlns:p15="http://schemas.microsoft.com/office/powerpoint/2012/main" xmlns:ahyp="http://schemas.microsoft.com/office/drawing/2018/hyperlinkcolor">
   <p:cSld>
     <p:spTree>
       <p:nvGrpSpPr>
-        <p:cNvPr id="192" name="Shape 192"/>
+        <p:cNvPr id="184" name="Shape 184"/>
         <p:cNvGrpSpPr/>
         <p:nvPr/>
       </p:nvGrpSpPr>
@@ -14589,14 +14149,14 @@
       </p:grpSpPr>
       <p:sp>
         <p:nvSpPr>
-          <p:cNvPr id="193" name="Google Shape;193;p12"/>
+          <p:cNvPr id="185" name="Google Shape;185;p12"/>
           <p:cNvSpPr txBox="1"/>
           <p:nvPr/>
         </p:nvSpPr>
         <p:spPr>
           <a:xfrm>
-            <a:off x="457200" y="365760"/>
-            <a:ext cx="9144000" cy="731520"/>
+            <a:off x="457200" y="365750"/>
+            <a:ext cx="10573200" cy="954300"/>
           </a:xfrm>
           <a:prstGeom prst="rect">
             <a:avLst/>
@@ -14631,7 +14191,11 @@
                 <a:cs typeface="Arial"/>
                 <a:sym typeface="Arial"/>
               </a:rPr>
-              <a:t>4. Causal Analysis - Methodology</a:t>
+              <a:t>4. Causal Analysis - </a:t>
+            </a:r>
+            <a:r>
+              <a:rPr b="1" lang="en-US" sz="2800"/>
+              <a:t>(Ensemble + Model Distillation / Surrogate Modeling)</a:t>
             </a:r>
             <a:endParaRPr/>
           </a:p>
@@ -14639,64 +14203,14 @@
       </p:sp>
       <p:sp>
         <p:nvSpPr>
-          <p:cNvPr id="194" name="Google Shape;194;p12"/>
-          <p:cNvSpPr txBox="1"/>
-          <p:nvPr/>
-        </p:nvSpPr>
-        <p:spPr>
-          <a:xfrm>
-            <a:off x="10058400" y="365760"/>
-            <a:ext cx="1645920" cy="457200"/>
-          </a:xfrm>
-          <a:prstGeom prst="rect">
-            <a:avLst/>
-          </a:prstGeom>
-          <a:noFill/>
-          <a:ln>
-            <a:noFill/>
-          </a:ln>
-        </p:spPr>
-        <p:txBody>
-          <a:bodyPr anchorCtr="0" anchor="t" bIns="45700" lIns="91425" spcFirstLastPara="1" rIns="91425" wrap="square" tIns="45700">
-            <a:spAutoFit/>
-          </a:bodyPr>
-          <a:lstStyle/>
-          <a:p>
-            <a:pPr indent="0" lvl="0" marL="0" marR="0" rtl="0" algn="r">
-              <a:spcBef>
-                <a:spcPts val="0"/>
-              </a:spcBef>
-              <a:spcAft>
-                <a:spcPts val="0"/>
-              </a:spcAft>
-              <a:buNone/>
-            </a:pPr>
-            <a:r>
-              <a:rPr b="0" i="0" lang="en-US" sz="1400" u="none" cap="none" strike="noStrike">
-                <a:solidFill>
-                  <a:srgbClr val="666666"/>
-                </a:solidFill>
-                <a:latin typeface="Arial"/>
-                <a:ea typeface="Arial"/>
-                <a:cs typeface="Arial"/>
-                <a:sym typeface="Arial"/>
-              </a:rPr>
-              <a:t>~3 min</a:t>
-            </a:r>
-            <a:endParaRPr/>
-          </a:p>
-        </p:txBody>
-      </p:sp>
-      <p:sp>
-        <p:nvSpPr>
-          <p:cNvPr id="195" name="Google Shape;195;p12"/>
+          <p:cNvPr id="186" name="Google Shape;186;p12"/>
           <p:cNvSpPr/>
           <p:nvPr/>
         </p:nvSpPr>
         <p:spPr>
-          <a:xfrm>
-            <a:off x="457200" y="1188720"/>
-            <a:ext cx="11277295" cy="18288"/>
+          <a:xfrm flipH="1" rot="10800000">
+            <a:off x="487813" y="1423766"/>
+            <a:ext cx="11277300" cy="13200"/>
           </a:xfrm>
           <a:prstGeom prst="rect">
             <a:avLst/>
@@ -14747,14 +14261,14 @@
       </p:sp>
       <p:sp>
         <p:nvSpPr>
-          <p:cNvPr id="196" name="Google Shape;196;p12"/>
+          <p:cNvPr id="187" name="Google Shape;187;p12"/>
           <p:cNvSpPr txBox="1"/>
           <p:nvPr/>
         </p:nvSpPr>
         <p:spPr>
           <a:xfrm>
-            <a:off x="640080" y="1463040"/>
-            <a:ext cx="10972800" cy="3663300"/>
+            <a:off x="640075" y="1540700"/>
+            <a:ext cx="10972800" cy="4863900"/>
           </a:xfrm>
           <a:prstGeom prst="rect">
             <a:avLst/>
@@ -14789,20 +14303,8 @@
                 <a:cs typeface="Arial"/>
                 <a:sym typeface="Arial"/>
               </a:rPr>
-              <a:t>• Approach: Model Distillation / Surrogate Modeling</a:t>
+              <a:t>• </a:t>
             </a:r>
-            <a:endParaRPr/>
-          </a:p>
-          <a:p>
-            <a:pPr indent="0" lvl="0" marL="0" marR="0" rtl="0" algn="l">
-              <a:spcBef>
-                <a:spcPts val="800"/>
-              </a:spcBef>
-              <a:spcAft>
-                <a:spcPts val="0"/>
-              </a:spcAft>
-              <a:buNone/>
-            </a:pPr>
             <a:r>
               <a:rPr b="0" i="0" lang="en-US" sz="1800" u="none" cap="none" strike="noStrike">
                 <a:solidFill>
@@ -14813,31 +14315,7 @@
                 <a:cs typeface="Arial"/>
                 <a:sym typeface="Arial"/>
               </a:rPr>
-              <a:t>• </a:t>
-            </a:r>
-            <a:endParaRPr/>
-          </a:p>
-          <a:p>
-            <a:pPr indent="0" lvl="0" marL="0" marR="0" rtl="0" algn="l">
-              <a:spcBef>
-                <a:spcPts val="800"/>
-              </a:spcBef>
-              <a:spcAft>
-                <a:spcPts val="0"/>
-              </a:spcAft>
-              <a:buNone/>
-            </a:pPr>
-            <a:r>
-              <a:rPr b="0" i="0" lang="en-US" sz="1800" u="none" cap="none" strike="noStrike">
-                <a:solidFill>
-                  <a:srgbClr val="333333"/>
-                </a:solidFill>
-                <a:latin typeface="Arial"/>
-                <a:ea typeface="Arial"/>
-                <a:cs typeface="Arial"/>
-                <a:sym typeface="Arial"/>
-              </a:rPr>
-              <a:t>• Step 1: High-Capacity Model Training (Ensemble)</a:t>
+              <a:t>Step 1: High-Capacity Model Training (Ensemble)</a:t>
             </a:r>
             <a:endParaRPr/>
           </a:p>
@@ -14994,7 +14472,15 @@
               </a:rPr>
               <a:t>•   -&gt; Target: Ensemble predictions (not ground truth)</a:t>
             </a:r>
-            <a:endParaRPr/>
+            <a:endParaRPr b="0" i="0" sz="1800" u="none" cap="none" strike="noStrike">
+              <a:solidFill>
+                <a:srgbClr val="333333"/>
+              </a:solidFill>
+              <a:latin typeface="Arial"/>
+              <a:ea typeface="Arial"/>
+              <a:cs typeface="Arial"/>
+              <a:sym typeface="Arial"/>
+            </a:endParaRPr>
           </a:p>
           <a:p>
             <a:pPr indent="0" lvl="0" marL="0" marR="0" rtl="0" algn="l">
@@ -15009,59 +14495,12 @@
             <a:r>
               <a:t/>
             </a:r>
-            <a:endParaRPr/>
+            <a:endParaRPr sz="1800">
+              <a:solidFill>
+                <a:srgbClr val="333333"/>
+              </a:solidFill>
+            </a:endParaRPr>
           </a:p>
-        </p:txBody>
-      </p:sp>
-    </p:spTree>
-  </p:cSld>
-  <p:clrMapOvr>
-    <a:masterClrMapping/>
-  </p:clrMapOvr>
-</p:sld>
-</file>
-
-<file path=ppt/slides/slide15.xml><?xml version="1.0" encoding="utf-8"?>
-<p:sld xmlns:a="http://schemas.openxmlformats.org/drawingml/2006/main" xmlns:r="http://schemas.openxmlformats.org/officeDocument/2006/relationships" xmlns:mc="http://schemas.openxmlformats.org/markup-compatibility/2006" xmlns:mv="urn:schemas-microsoft-com:mac:vml" xmlns:p="http://schemas.openxmlformats.org/presentationml/2006/main" xmlns:c="http://schemas.openxmlformats.org/drawingml/2006/chart" xmlns:dgm="http://schemas.openxmlformats.org/drawingml/2006/diagram" xmlns:o="urn:schemas-microsoft-com:office:office" xmlns:v="urn:schemas-microsoft-com:vml" xmlns:pvml="urn:schemas-microsoft-com:office:powerpoint" xmlns:com="http://schemas.openxmlformats.org/drawingml/2006/compatibility" xmlns:p14="http://schemas.microsoft.com/office/powerpoint/2010/main" xmlns:p15="http://schemas.microsoft.com/office/powerpoint/2012/main" xmlns:ahyp="http://schemas.microsoft.com/office/drawing/2018/hyperlinkcolor">
-  <p:cSld>
-    <p:spTree>
-      <p:nvGrpSpPr>
-        <p:cNvPr id="200" name="Shape 200"/>
-        <p:cNvGrpSpPr/>
-        <p:nvPr/>
-      </p:nvGrpSpPr>
-      <p:grpSpPr>
-        <a:xfrm>
-          <a:off x="0" y="0"/>
-          <a:ext cx="0" cy="0"/>
-          <a:chOff x="0" y="0"/>
-          <a:chExt cx="0" cy="0"/>
-        </a:xfrm>
-      </p:grpSpPr>
-      <p:sp>
-        <p:nvSpPr>
-          <p:cNvPr id="201" name="Google Shape;201;g3923dfd7fba_0_0"/>
-          <p:cNvSpPr txBox="1"/>
-          <p:nvPr/>
-        </p:nvSpPr>
-        <p:spPr>
-          <a:xfrm>
-            <a:off x="1754725" y="2102025"/>
-            <a:ext cx="9358500" cy="2472900"/>
-          </a:xfrm>
-          <a:prstGeom prst="rect">
-            <a:avLst/>
-          </a:prstGeom>
-          <a:noFill/>
-          <a:ln>
-            <a:noFill/>
-          </a:ln>
-        </p:spPr>
-        <p:txBody>
-          <a:bodyPr anchorCtr="0" anchor="t" bIns="91425" lIns="91425" spcFirstLastPara="1" rIns="91425" wrap="square" tIns="91425">
-            <a:spAutoFit/>
-          </a:bodyPr>
-          <a:lstStyle/>
           <a:p>
             <a:pPr indent="0" lvl="0" marL="0" rtl="0" algn="l">
               <a:spcBef>
@@ -15182,10 +14621,6 @@
               <a:spcAft>
                 <a:spcPts val="0"/>
               </a:spcAft>
-              <a:buClr>
-                <a:schemeClr val="dk1"/>
-              </a:buClr>
-              <a:buFont typeface="Arial"/>
               <a:buNone/>
             </a:pPr>
             <a:r>
@@ -15196,34 +14631,7 @@
               </a:rPr>
               <a:t>•   -&gt; Map thresholds to semantic predicates</a:t>
             </a:r>
-            <a:endParaRPr>
-              <a:solidFill>
-                <a:schemeClr val="dk1"/>
-              </a:solidFill>
-            </a:endParaRPr>
-          </a:p>
-          <a:p>
-            <a:pPr indent="0" lvl="0" marL="0" rtl="0" algn="l">
-              <a:spcBef>
-                <a:spcPts val="0"/>
-              </a:spcBef>
-              <a:spcAft>
-                <a:spcPts val="0"/>
-              </a:spcAft>
-              <a:buNone/>
-            </a:pPr>
-            <a:r>
-              <a:t/>
-            </a:r>
-            <a:endParaRPr sz="3200">
-              <a:solidFill>
-                <a:schemeClr val="dk1"/>
-              </a:solidFill>
-              <a:latin typeface="Calibri"/>
-              <a:ea typeface="Calibri"/>
-              <a:cs typeface="Calibri"/>
-              <a:sym typeface="Calibri"/>
-            </a:endParaRPr>
+            <a:endParaRPr/>
           </a:p>
         </p:txBody>
       </p:sp>
@@ -15235,12 +14643,12 @@
 </p:sld>
 </file>
 
-<file path=ppt/slides/slide16.xml><?xml version="1.0" encoding="utf-8"?>
+<file path=ppt/slides/slide14.xml><?xml version="1.0" encoding="utf-8"?>
 <p:sld xmlns:a="http://schemas.openxmlformats.org/drawingml/2006/main" xmlns:r="http://schemas.openxmlformats.org/officeDocument/2006/relationships" xmlns:mc="http://schemas.openxmlformats.org/markup-compatibility/2006" xmlns:mv="urn:schemas-microsoft-com:mac:vml" xmlns:p="http://schemas.openxmlformats.org/presentationml/2006/main" xmlns:c="http://schemas.openxmlformats.org/drawingml/2006/chart" xmlns:dgm="http://schemas.openxmlformats.org/drawingml/2006/diagram" xmlns:o="urn:schemas-microsoft-com:office:office" xmlns:v="urn:schemas-microsoft-com:vml" xmlns:pvml="urn:schemas-microsoft-com:office:powerpoint" xmlns:com="http://schemas.openxmlformats.org/drawingml/2006/compatibility" xmlns:p14="http://schemas.microsoft.com/office/powerpoint/2010/main" xmlns:p15="http://schemas.microsoft.com/office/powerpoint/2012/main" xmlns:ahyp="http://schemas.microsoft.com/office/drawing/2018/hyperlinkcolor">
   <p:cSld>
     <p:spTree>
       <p:nvGrpSpPr>
-        <p:cNvPr id="205" name="Shape 205"/>
+        <p:cNvPr id="191" name="Shape 191"/>
         <p:cNvGrpSpPr/>
         <p:nvPr/>
       </p:nvGrpSpPr>
@@ -15254,7 +14662,7 @@
       </p:grpSpPr>
       <p:sp>
         <p:nvSpPr>
-          <p:cNvPr id="206" name="Google Shape;206;p13"/>
+          <p:cNvPr id="192" name="Google Shape;192;p13"/>
           <p:cNvSpPr txBox="1"/>
           <p:nvPr/>
         </p:nvSpPr>
@@ -15300,7 +14708,7 @@
       </p:sp>
       <p:sp>
         <p:nvSpPr>
-          <p:cNvPr id="207" name="Google Shape;207;p13"/>
+          <p:cNvPr id="193" name="Google Shape;193;p13"/>
           <p:cNvSpPr txBox="1"/>
           <p:nvPr/>
         </p:nvSpPr>
@@ -15350,7 +14758,7 @@
       </p:sp>
       <p:sp>
         <p:nvSpPr>
-          <p:cNvPr id="208" name="Google Shape;208;p13"/>
+          <p:cNvPr id="194" name="Google Shape;194;p13"/>
           <p:cNvSpPr/>
           <p:nvPr/>
         </p:nvSpPr>
@@ -15408,14 +14816,14 @@
       </p:sp>
       <p:sp>
         <p:nvSpPr>
-          <p:cNvPr id="209" name="Google Shape;209;p13"/>
+          <p:cNvPr id="195" name="Google Shape;195;p13"/>
           <p:cNvSpPr txBox="1"/>
           <p:nvPr/>
         </p:nvSpPr>
         <p:spPr>
           <a:xfrm>
-            <a:off x="640080" y="1463040"/>
-            <a:ext cx="10972800" cy="5029200"/>
+            <a:off x="640075" y="1463047"/>
+            <a:ext cx="10972800" cy="5126700"/>
           </a:xfrm>
           <a:prstGeom prst="rect">
             <a:avLst/>
@@ -15450,14 +14858,160 @@
                 <a:cs typeface="Arial"/>
                 <a:sym typeface="Arial"/>
               </a:rPr>
-              <a:t>• Goal Failure:</a:t>
+              <a:t>Goal Failure:</a:t>
             </a:r>
-            <a:endParaRPr/>
+            <a:endParaRPr sz="1800">
+              <a:solidFill>
+                <a:srgbClr val="333333"/>
+              </a:solidFill>
+            </a:endParaRPr>
           </a:p>
           <a:p>
             <a:pPr indent="0" lvl="0" marL="0" marR="0" rtl="0" algn="l">
               <a:spcBef>
-                <a:spcPts val="800"/>
+                <a:spcPts val="0"/>
+              </a:spcBef>
+              <a:spcAft>
+                <a:spcPts val="0"/>
+              </a:spcAft>
+              <a:buNone/>
+            </a:pPr>
+            <a:r>
+              <a:t/>
+            </a:r>
+            <a:endParaRPr sz="1800">
+              <a:solidFill>
+                <a:srgbClr val="333333"/>
+              </a:solidFill>
+            </a:endParaRPr>
+          </a:p>
+          <a:p>
+            <a:pPr indent="457200" lvl="0" marL="0" rtl="0" algn="l">
+              <a:lnSpc>
+                <a:spcPct val="115000"/>
+              </a:lnSpc>
+              <a:spcBef>
+                <a:spcPts val="0"/>
+              </a:spcBef>
+              <a:spcAft>
+                <a:spcPts val="0"/>
+              </a:spcAft>
+              <a:buSzPts val="1100"/>
+              <a:buNone/>
+            </a:pPr>
+            <a:r>
+              <a:rPr lang="en-US" sz="1800">
+                <a:solidFill>
+                  <a:srgbClr val="333333"/>
+                </a:solidFill>
+              </a:rPr>
+              <a:t>(Cov=17.0%, Prec=1.00, Rec=0.34, n=51), </a:t>
+            </a:r>
+            <a:r>
+              <a:rPr lang="en-US" sz="1800">
+                <a:solidFill>
+                  <a:srgbClr val="333333"/>
+                </a:solidFill>
+              </a:rPr>
+              <a:t>Confusion: TP=51, FP=0, FN=99, TN=150</a:t>
+            </a:r>
+            <a:endParaRPr sz="1800">
+              <a:solidFill>
+                <a:srgbClr val="333333"/>
+              </a:solidFill>
+            </a:endParaRPr>
+          </a:p>
+          <a:p>
+            <a:pPr indent="0" lvl="0" marL="0" rtl="0" algn="l">
+              <a:lnSpc>
+                <a:spcPct val="115000"/>
+              </a:lnSpc>
+              <a:spcBef>
+                <a:spcPts val="0"/>
+              </a:spcBef>
+              <a:spcAft>
+                <a:spcPts val="0"/>
+              </a:spcAft>
+              <a:buSzPts val="1100"/>
+              <a:buNone/>
+            </a:pPr>
+            <a:r>
+              <a:rPr lang="en-US" sz="1800">
+                <a:solidFill>
+                  <a:srgbClr val="333333"/>
+                </a:solidFill>
+              </a:rPr>
+              <a:t>        FOL: ∀t : in_corridor(t) ∧ min_wall_distance(t) &gt; 0.737 ∧ obstacle_clearance_ratio(t) &lt;= 17.970 ⇒ goal_failure</a:t>
+            </a:r>
+            <a:endParaRPr sz="1800">
+              <a:solidFill>
+                <a:srgbClr val="333333"/>
+              </a:solidFill>
+            </a:endParaRPr>
+          </a:p>
+          <a:p>
+            <a:pPr indent="457200" lvl="0" marL="0" rtl="0" algn="l">
+              <a:lnSpc>
+                <a:spcPct val="115000"/>
+              </a:lnSpc>
+              <a:spcBef>
+                <a:spcPts val="0"/>
+              </a:spcBef>
+              <a:spcAft>
+                <a:spcPts val="0"/>
+              </a:spcAft>
+              <a:buClr>
+                <a:schemeClr val="dk1"/>
+              </a:buClr>
+              <a:buSzPts val="1100"/>
+              <a:buFont typeface="Arial"/>
+              <a:buNone/>
+            </a:pPr>
+            <a:r>
+              <a:rPr lang="en-US" sz="1800">
+                <a:solidFill>
+                  <a:srgbClr val="333333"/>
+                </a:solidFill>
+              </a:rPr>
+              <a:t>NL:  IF robot is in corridor AND min wall distance &gt; 0.737 AND obstacle clearance ratio ≤ 17.970 THEN goal_failure</a:t>
+            </a:r>
+            <a:endParaRPr sz="1800">
+              <a:solidFill>
+                <a:srgbClr val="333333"/>
+              </a:solidFill>
+            </a:endParaRPr>
+          </a:p>
+          <a:p>
+            <a:pPr indent="0" lvl="0" marL="0" rtl="0" algn="l">
+              <a:lnSpc>
+                <a:spcPct val="115000"/>
+              </a:lnSpc>
+              <a:spcBef>
+                <a:spcPts val="0"/>
+              </a:spcBef>
+              <a:spcAft>
+                <a:spcPts val="0"/>
+              </a:spcAft>
+              <a:buClr>
+                <a:schemeClr val="dk1"/>
+              </a:buClr>
+              <a:buSzPts val="1100"/>
+              <a:buFont typeface="Arial"/>
+              <a:buNone/>
+            </a:pPr>
+            <a:r>
+              <a:t/>
+            </a:r>
+            <a:endParaRPr sz="1800">
+              <a:solidFill>
+                <a:srgbClr val="333333"/>
+              </a:solidFill>
+            </a:endParaRPr>
+          </a:p>
+          <a:p>
+            <a:pPr indent="0" lvl="0" marL="0" marR="0" rtl="0" algn="l">
+              <a:spcBef>
+                <a:spcPts val="0"/>
               </a:spcBef>
               <a:spcAft>
                 <a:spcPts val="0"/>
@@ -15474,18 +15028,34 @@
                 <a:cs typeface="Arial"/>
                 <a:sym typeface="Arial"/>
               </a:rPr>
-              <a:t>•   For all t: in_corridor(t) AND min_wall_distance &gt; 0.737 AND obstacle_clearance &lt;= 17.97 =&gt; goal_failure</a:t>
+              <a:t>Stuck:</a:t>
             </a:r>
-            <a:endParaRPr/>
+            <a:endParaRPr b="0" i="0" sz="1800" u="none" cap="none" strike="noStrike">
+              <a:solidFill>
+                <a:srgbClr val="333333"/>
+              </a:solidFill>
+              <a:latin typeface="Arial"/>
+              <a:ea typeface="Arial"/>
+              <a:cs typeface="Arial"/>
+              <a:sym typeface="Arial"/>
+            </a:endParaRPr>
           </a:p>
           <a:p>
-            <a:pPr indent="0" lvl="0" marL="0" marR="0" rtl="0" algn="l">
-              <a:spcBef>
-                <a:spcPts val="800"/>
-              </a:spcBef>
-              <a:spcAft>
-                <a:spcPts val="0"/>
-              </a:spcAft>
+            <a:pPr indent="0" lvl="0" marL="0" rtl="0" algn="l">
+              <a:lnSpc>
+                <a:spcPct val="115000"/>
+              </a:lnSpc>
+              <a:spcBef>
+                <a:spcPts val="0"/>
+              </a:spcBef>
+              <a:spcAft>
+                <a:spcPts val="0"/>
+              </a:spcAft>
+              <a:buClr>
+                <a:schemeClr val="dk1"/>
+              </a:buClr>
+              <a:buSzPts val="1100"/>
+              <a:buFont typeface="Arial"/>
               <a:buNone/>
             </a:pPr>
             <a:r>
@@ -15498,18 +15068,54 @@
                 <a:cs typeface="Arial"/>
                 <a:sym typeface="Arial"/>
               </a:rPr>
-              <a:t>• </a:t>
+              <a:t>    </a:t>
             </a:r>
-            <a:endParaRPr/>
+            <a:r>
+              <a:rPr lang="en-US" sz="1800">
+                <a:solidFill>
+                  <a:srgbClr val="333333"/>
+                </a:solidFill>
+              </a:rPr>
+              <a:t>(Cov=6.7%, Prec=1.00, Rec=0.17, n=20), </a:t>
+            </a:r>
+            <a:r>
+              <a:rPr b="0" i="0" lang="en-US" sz="1800" u="none" cap="none" strike="noStrike">
+                <a:solidFill>
+                  <a:srgbClr val="333333"/>
+                </a:solidFill>
+                <a:latin typeface="Arial"/>
+                <a:ea typeface="Arial"/>
+                <a:cs typeface="Arial"/>
+                <a:sym typeface="Arial"/>
+              </a:rPr>
+              <a:t>Confusion: TP=20, FP=0, FN=95, TN=185</a:t>
+            </a:r>
+            <a:endParaRPr b="0" i="0" sz="1800" u="none" cap="none" strike="noStrike">
+              <a:solidFill>
+                <a:srgbClr val="333333"/>
+              </a:solidFill>
+              <a:latin typeface="Arial"/>
+              <a:ea typeface="Arial"/>
+              <a:cs typeface="Arial"/>
+              <a:sym typeface="Arial"/>
+            </a:endParaRPr>
           </a:p>
           <a:p>
-            <a:pPr indent="0" lvl="0" marL="0" marR="0" rtl="0" algn="l">
-              <a:spcBef>
-                <a:spcPts val="800"/>
-              </a:spcBef>
-              <a:spcAft>
-                <a:spcPts val="0"/>
-              </a:spcAft>
+            <a:pPr indent="0" lvl="0" marL="0" rtl="0" algn="l">
+              <a:lnSpc>
+                <a:spcPct val="115000"/>
+              </a:lnSpc>
+              <a:spcBef>
+                <a:spcPts val="0"/>
+              </a:spcBef>
+              <a:spcAft>
+                <a:spcPts val="0"/>
+              </a:spcAft>
+              <a:buClr>
+                <a:schemeClr val="dk1"/>
+              </a:buClr>
+              <a:buSzPts val="1100"/>
+              <a:buFont typeface="Arial"/>
               <a:buNone/>
             </a:pPr>
             <a:r>
@@ -15522,18 +15128,30 @@
                 <a:cs typeface="Arial"/>
                 <a:sym typeface="Arial"/>
               </a:rPr>
-              <a:t>• Stuck:</a:t>
+              <a:t>    FOL: ∀t : min_door_distance(t) &gt; 1.792 ∧ noise_level(t) &lt;= 0.015 ∧ min_door_distance(t) &gt; 2.104 ∧ room_area(t) &lt;= 25.130 ⇒ stuck</a:t>
             </a:r>
-            <a:endParaRPr/>
+            <a:endParaRPr b="0" i="0" sz="1800" u="none" cap="none" strike="noStrike">
+              <a:solidFill>
+                <a:srgbClr val="333333"/>
+              </a:solidFill>
+              <a:latin typeface="Arial"/>
+              <a:ea typeface="Arial"/>
+              <a:cs typeface="Arial"/>
+              <a:sym typeface="Arial"/>
+            </a:endParaRPr>
           </a:p>
           <a:p>
-            <a:pPr indent="0" lvl="0" marL="0" marR="0" rtl="0" algn="l">
-              <a:spcBef>
-                <a:spcPts val="800"/>
-              </a:spcBef>
-              <a:spcAft>
-                <a:spcPts val="0"/>
-              </a:spcAft>
+            <a:pPr indent="0" lvl="0" marL="0" rtl="0" algn="l">
+              <a:lnSpc>
+                <a:spcPct val="115000"/>
+              </a:lnSpc>
+              <a:spcBef>
+                <a:spcPts val="0"/>
+              </a:spcBef>
+              <a:spcAft>
+                <a:spcPts val="0"/>
+              </a:spcAft>
+              <a:buSzPts val="1100"/>
               <a:buNone/>
             </a:pPr>
             <a:r>
@@ -15546,9 +15164,44 @@
                 <a:cs typeface="Arial"/>
                 <a:sym typeface="Arial"/>
               </a:rPr>
-              <a:t>•   For all t: min_door_distance &gt; 1.792 AND noise_level &lt;= 0.015 AND room_area &lt;= 25.13 =&gt; stuck</a:t>
+              <a:t>    NL:  IF min door distance &gt; 1.792 AND noise level ≤ 0.015 AND min door distance &gt; 2.104 AND room area ≤ 25.130 THEN stuck</a:t>
             </a:r>
-            <a:endParaRPr/>
+            <a:endParaRPr b="0" i="0" sz="1800" u="none" cap="none" strike="noStrike">
+              <a:solidFill>
+                <a:srgbClr val="333333"/>
+              </a:solidFill>
+              <a:latin typeface="Arial"/>
+              <a:ea typeface="Arial"/>
+              <a:cs typeface="Arial"/>
+              <a:sym typeface="Arial"/>
+            </a:endParaRPr>
+          </a:p>
+          <a:p>
+            <a:pPr indent="0" lvl="0" marL="0" rtl="0" algn="l">
+              <a:lnSpc>
+                <a:spcPct val="115000"/>
+              </a:lnSpc>
+              <a:spcBef>
+                <a:spcPts val="0"/>
+              </a:spcBef>
+              <a:spcAft>
+                <a:spcPts val="0"/>
+              </a:spcAft>
+              <a:buClr>
+                <a:schemeClr val="dk1"/>
+              </a:buClr>
+              <a:buSzPts val="1100"/>
+              <a:buFont typeface="Arial"/>
+              <a:buNone/>
+            </a:pPr>
+            <a:r>
+              <a:t/>
+            </a:r>
+            <a:endParaRPr sz="1800">
+              <a:solidFill>
+                <a:srgbClr val="333333"/>
+              </a:solidFill>
+            </a:endParaRPr>
           </a:p>
           <a:p>
             <a:pPr indent="0" lvl="0" marL="0" marR="0" rtl="0" algn="l">
@@ -15570,38 +15223,772 @@
                 <a:cs typeface="Arial"/>
                 <a:sym typeface="Arial"/>
               </a:rPr>
-              <a:t>• </a:t>
+              <a:t>  </a:t>
             </a:r>
             <a:endParaRPr/>
           </a:p>
+        </p:txBody>
+      </p:sp>
+    </p:spTree>
+  </p:cSld>
+  <p:clrMapOvr>
+    <a:masterClrMapping/>
+  </p:clrMapOvr>
+</p:sld>
+</file>
+
+<file path=ppt/slides/slide15.xml><?xml version="1.0" encoding="utf-8"?>
+<p:sld xmlns:a="http://schemas.openxmlformats.org/drawingml/2006/main" xmlns:r="http://schemas.openxmlformats.org/officeDocument/2006/relationships" xmlns:mc="http://schemas.openxmlformats.org/markup-compatibility/2006" xmlns:mv="urn:schemas-microsoft-com:mac:vml" xmlns:p="http://schemas.openxmlformats.org/presentationml/2006/main" xmlns:c="http://schemas.openxmlformats.org/drawingml/2006/chart" xmlns:dgm="http://schemas.openxmlformats.org/drawingml/2006/diagram" xmlns:o="urn:schemas-microsoft-com:office:office" xmlns:v="urn:schemas-microsoft-com:vml" xmlns:pvml="urn:schemas-microsoft-com:office:powerpoint" xmlns:com="http://schemas.openxmlformats.org/drawingml/2006/compatibility" xmlns:p14="http://schemas.microsoft.com/office/powerpoint/2010/main" xmlns:p15="http://schemas.microsoft.com/office/powerpoint/2012/main" xmlns:ahyp="http://schemas.microsoft.com/office/drawing/2018/hyperlinkcolor">
+  <p:cSld>
+    <p:spTree>
+      <p:nvGrpSpPr>
+        <p:cNvPr id="199" name="Shape 199"/>
+        <p:cNvGrpSpPr/>
+        <p:nvPr/>
+      </p:nvGrpSpPr>
+      <p:grpSpPr>
+        <a:xfrm>
+          <a:off x="0" y="0"/>
+          <a:ext cx="0" cy="0"/>
+          <a:chOff x="0" y="0"/>
+          <a:chExt cx="0" cy="0"/>
+        </a:xfrm>
+      </p:grpSpPr>
+      <p:sp>
+        <p:nvSpPr>
+          <p:cNvPr id="200" name="Google Shape;200;g3923dfd7fba_4_92"/>
+          <p:cNvSpPr txBox="1"/>
+          <p:nvPr/>
+        </p:nvSpPr>
+        <p:spPr>
+          <a:xfrm>
+            <a:off x="1106500" y="1302450"/>
+            <a:ext cx="10177500" cy="4603800"/>
+          </a:xfrm>
+          <a:prstGeom prst="rect">
+            <a:avLst/>
+          </a:prstGeom>
+          <a:noFill/>
+          <a:ln>
+            <a:noFill/>
+          </a:ln>
+        </p:spPr>
+        <p:txBody>
+          <a:bodyPr anchorCtr="0" anchor="t" bIns="91425" lIns="91425" spcFirstLastPara="1" rIns="91425" wrap="square" tIns="91425">
+            <a:spAutoFit/>
+          </a:bodyPr>
+          <a:lstStyle/>
           <a:p>
-            <a:pPr indent="0" lvl="0" marL="0" marR="0" rtl="0" algn="l">
-              <a:spcBef>
-                <a:spcPts val="800"/>
-              </a:spcBef>
-              <a:spcAft>
-                <a:spcPts val="0"/>
-              </a:spcAft>
+            <a:pPr indent="0" lvl="0" marL="0" rtl="0" algn="l">
+              <a:lnSpc>
+                <a:spcPct val="115000"/>
+              </a:lnSpc>
+              <a:spcBef>
+                <a:spcPts val="0"/>
+              </a:spcBef>
+              <a:spcAft>
+                <a:spcPts val="0"/>
+              </a:spcAft>
+              <a:buClr>
+                <a:schemeClr val="dk1"/>
+              </a:buClr>
+              <a:buSzPts val="1100"/>
+              <a:buFont typeface="Arial"/>
               <a:buNone/>
             </a:pPr>
             <a:r>
-              <a:rPr b="0" i="0" lang="en-US" sz="1800" u="none" cap="none" strike="noStrike">
+              <a:rPr lang="en-US" sz="1800">
                 <a:solidFill>
                   <a:srgbClr val="333333"/>
                 </a:solidFill>
-                <a:latin typeface="Arial"/>
-                <a:ea typeface="Arial"/>
-                <a:cs typeface="Arial"/>
-                <a:sym typeface="Arial"/>
               </a:rPr>
-              <a:t>• High AMCL Uncertainty:</a:t>
+              <a:t>H</a:t>
+            </a:r>
+            <a:r>
+              <a:rPr lang="en-US" sz="1800">
+                <a:solidFill>
+                  <a:srgbClr val="333333"/>
+                </a:solidFill>
+              </a:rPr>
+              <a:t>igh_amcl_uncertainty: </a:t>
+            </a:r>
+            <a:endParaRPr sz="1800">
+              <a:solidFill>
+                <a:srgbClr val="333333"/>
+              </a:solidFill>
+            </a:endParaRPr>
+          </a:p>
+          <a:p>
+            <a:pPr indent="0" lvl="0" marL="0" rtl="0" algn="l">
+              <a:lnSpc>
+                <a:spcPct val="115000"/>
+              </a:lnSpc>
+              <a:spcBef>
+                <a:spcPts val="0"/>
+              </a:spcBef>
+              <a:spcAft>
+                <a:spcPts val="0"/>
+              </a:spcAft>
+              <a:buClr>
+                <a:schemeClr val="dk1"/>
+              </a:buClr>
+              <a:buSzPts val="1100"/>
+              <a:buFont typeface="Arial"/>
+              <a:buNone/>
+            </a:pPr>
+            <a:r>
+              <a:rPr lang="en-US" sz="1800">
+                <a:solidFill>
+                  <a:srgbClr val="333333"/>
+                </a:solidFill>
+              </a:rPr>
+              <a:t>    (Cov=4.0%, Prec=1.00, Rec=0.52, n=12), Confusion: TP=12, FP=0, FN=11, TN=277</a:t>
+            </a:r>
+            <a:endParaRPr sz="1800">
+              <a:solidFill>
+                <a:srgbClr val="333333"/>
+              </a:solidFill>
+            </a:endParaRPr>
+          </a:p>
+          <a:p>
+            <a:pPr indent="0" lvl="0" marL="0" rtl="0" algn="l">
+              <a:lnSpc>
+                <a:spcPct val="115000"/>
+              </a:lnSpc>
+              <a:spcBef>
+                <a:spcPts val="0"/>
+              </a:spcBef>
+              <a:spcAft>
+                <a:spcPts val="0"/>
+              </a:spcAft>
+              <a:buClr>
+                <a:schemeClr val="dk1"/>
+              </a:buClr>
+              <a:buSzPts val="1100"/>
+              <a:buFont typeface="Arial"/>
+              <a:buNone/>
+            </a:pPr>
+            <a:r>
+              <a:rPr lang="en-US" sz="1800">
+                <a:solidFill>
+                  <a:srgbClr val="333333"/>
+                </a:solidFill>
+              </a:rPr>
+              <a:t>    FOL: ∀t : obstacle_clearance_ratio(t) &gt; 31.314 ∧ total_obstacle_area(t) &lt;= 0.875 ∧ door_width(t) &gt; 0.935 ⇒ high_amcl_uncertainty</a:t>
+            </a:r>
+            <a:endParaRPr sz="1800">
+              <a:solidFill>
+                <a:srgbClr val="333333"/>
+              </a:solidFill>
+            </a:endParaRPr>
+          </a:p>
+          <a:p>
+            <a:pPr indent="0" lvl="0" marL="0" rtl="0" algn="l">
+              <a:lnSpc>
+                <a:spcPct val="115000"/>
+              </a:lnSpc>
+              <a:spcBef>
+                <a:spcPts val="0"/>
+              </a:spcBef>
+              <a:spcAft>
+                <a:spcPts val="0"/>
+              </a:spcAft>
+              <a:buNone/>
+            </a:pPr>
+            <a:r>
+              <a:rPr lang="en-US" sz="1800">
+                <a:solidFill>
+                  <a:srgbClr val="333333"/>
+                </a:solidFill>
+              </a:rPr>
+              <a:t>    NL:  IF obstacle clearance ratio &gt; 31.314 AND total obstacle area ≤ 0.875 AND door width &gt; 0.935 THEN high_amcl_uncertainty</a:t>
+            </a:r>
+            <a:endParaRPr sz="1800">
+              <a:solidFill>
+                <a:srgbClr val="333333"/>
+              </a:solidFill>
+            </a:endParaRPr>
+          </a:p>
+          <a:p>
+            <a:pPr indent="0" lvl="0" marL="0" rtl="0" algn="l">
+              <a:lnSpc>
+                <a:spcPct val="115000"/>
+              </a:lnSpc>
+              <a:spcBef>
+                <a:spcPts val="0"/>
+              </a:spcBef>
+              <a:spcAft>
+                <a:spcPts val="0"/>
+              </a:spcAft>
+              <a:buNone/>
+            </a:pPr>
+            <a:r>
+              <a:t/>
+            </a:r>
+            <a:endParaRPr sz="1800">
+              <a:solidFill>
+                <a:srgbClr val="333333"/>
+              </a:solidFill>
+            </a:endParaRPr>
+          </a:p>
+          <a:p>
+            <a:pPr indent="0" lvl="0" marL="0" rtl="0" algn="l">
+              <a:lnSpc>
+                <a:spcPct val="115000"/>
+              </a:lnSpc>
+              <a:spcBef>
+                <a:spcPts val="0"/>
+              </a:spcBef>
+              <a:spcAft>
+                <a:spcPts val="0"/>
+              </a:spcAft>
+              <a:buNone/>
+            </a:pPr>
+            <a:r>
+              <a:rPr lang="en-US" sz="1800">
+                <a:solidFill>
+                  <a:srgbClr val="333333"/>
+                </a:solidFill>
+              </a:rPr>
+              <a:t>Path_inefficiency:</a:t>
+            </a:r>
+            <a:endParaRPr sz="1800">
+              <a:solidFill>
+                <a:srgbClr val="333333"/>
+              </a:solidFill>
+            </a:endParaRPr>
+          </a:p>
+          <a:p>
+            <a:pPr indent="0" lvl="0" marL="0" rtl="0" algn="l">
+              <a:lnSpc>
+                <a:spcPct val="115000"/>
+              </a:lnSpc>
+              <a:spcBef>
+                <a:spcPts val="0"/>
+              </a:spcBef>
+              <a:spcAft>
+                <a:spcPts val="0"/>
+              </a:spcAft>
+              <a:buNone/>
+            </a:pPr>
+            <a:r>
+              <a:rPr lang="en-US" sz="1800">
+                <a:solidFill>
+                  <a:srgbClr val="333333"/>
+                </a:solidFill>
+              </a:rPr>
+              <a:t>     (Cov=3.3%, Prec=0.70, Rec=1.00, n=10), Confusion: TP=7, FP=3, FN=0, TN=290</a:t>
+            </a:r>
+            <a:endParaRPr sz="1800">
+              <a:solidFill>
+                <a:srgbClr val="333333"/>
+              </a:solidFill>
+            </a:endParaRPr>
+          </a:p>
+          <a:p>
+            <a:pPr indent="0" lvl="0" marL="0" rtl="0" algn="l">
+              <a:lnSpc>
+                <a:spcPct val="115000"/>
+              </a:lnSpc>
+              <a:spcBef>
+                <a:spcPts val="0"/>
+              </a:spcBef>
+              <a:spcAft>
+                <a:spcPts val="0"/>
+              </a:spcAft>
+              <a:buNone/>
+            </a:pPr>
+            <a:r>
+              <a:rPr lang="en-US" sz="1800">
+                <a:solidFill>
+                  <a:srgbClr val="333333"/>
+                </a:solidFill>
+              </a:rPr>
+              <a:t>    FOL: ∀t : obstacle_clearance_ratio(t) &lt;= 8.833 ∧ clearance_ratio(t) &gt; 6.812 ∧ min_door_distance(t) &lt;= 1.349 ⇒ path_inefficiency</a:t>
+            </a:r>
+            <a:endParaRPr sz="1800">
+              <a:solidFill>
+                <a:srgbClr val="333333"/>
+              </a:solidFill>
+            </a:endParaRPr>
+          </a:p>
+          <a:p>
+            <a:pPr indent="0" lvl="0" marL="0" rtl="0" algn="l">
+              <a:lnSpc>
+                <a:spcPct val="115000"/>
+              </a:lnSpc>
+              <a:spcBef>
+                <a:spcPts val="0"/>
+              </a:spcBef>
+              <a:spcAft>
+                <a:spcPts val="0"/>
+              </a:spcAft>
+              <a:buNone/>
+            </a:pPr>
+            <a:r>
+              <a:rPr lang="en-US" sz="1800">
+                <a:solidFill>
+                  <a:srgbClr val="333333"/>
+                </a:solidFill>
+              </a:rPr>
+              <a:t>    NL:  IF obstacle clearance ratio ≤ 8.833 AND clearance ratio &gt; 6.812 AND min door distance ≤ 1.349 THEN path_inefficiency</a:t>
+            </a:r>
+            <a:endParaRPr sz="1800">
+              <a:solidFill>
+                <a:srgbClr val="333333"/>
+              </a:solidFill>
+            </a:endParaRPr>
+          </a:p>
+          <a:p>
+            <a:pPr indent="0" lvl="0" marL="0" rtl="0" algn="l">
+              <a:lnSpc>
+                <a:spcPct val="115000"/>
+              </a:lnSpc>
+              <a:spcBef>
+                <a:spcPts val="0"/>
+              </a:spcBef>
+              <a:spcAft>
+                <a:spcPts val="0"/>
+              </a:spcAft>
+              <a:buClr>
+                <a:schemeClr val="dk1"/>
+              </a:buClr>
+              <a:buSzPts val="1100"/>
+              <a:buFont typeface="Arial"/>
+              <a:buNone/>
+            </a:pPr>
+            <a:r>
+              <a:t/>
+            </a:r>
+            <a:endParaRPr sz="1800">
+              <a:solidFill>
+                <a:srgbClr val="333333"/>
+              </a:solidFill>
+            </a:endParaRPr>
+          </a:p>
+        </p:txBody>
+      </p:sp>
+      <p:sp>
+        <p:nvSpPr>
+          <p:cNvPr id="201" name="Google Shape;201;g3923dfd7fba_4_92"/>
+          <p:cNvSpPr txBox="1"/>
+          <p:nvPr/>
+        </p:nvSpPr>
+        <p:spPr>
+          <a:xfrm>
+            <a:off x="457200" y="365760"/>
+            <a:ext cx="9144000" cy="523200"/>
+          </a:xfrm>
+          <a:prstGeom prst="rect">
+            <a:avLst/>
+          </a:prstGeom>
+          <a:noFill/>
+          <a:ln>
+            <a:noFill/>
+          </a:ln>
+        </p:spPr>
+        <p:txBody>
+          <a:bodyPr anchorCtr="0" anchor="t" bIns="45700" lIns="91425" spcFirstLastPara="1" rIns="91425" wrap="square" tIns="45700">
+            <a:spAutoFit/>
+          </a:bodyPr>
+          <a:lstStyle/>
+          <a:p>
+            <a:pPr indent="0" lvl="0" marL="0" marR="0" rtl="0" algn="l">
+              <a:spcBef>
+                <a:spcPts val="0"/>
+              </a:spcBef>
+              <a:spcAft>
+                <a:spcPts val="0"/>
+              </a:spcAft>
+              <a:buNone/>
+            </a:pPr>
+            <a:r>
+              <a:rPr i="0" lang="en-US" sz="2800" u="none" cap="none" strike="noStrike">
+                <a:solidFill>
+                  <a:srgbClr val="000000"/>
+                </a:solidFill>
+              </a:rPr>
+              <a:t>Derived FOL Rules - Examples</a:t>
             </a:r>
             <a:endParaRPr/>
           </a:p>
+        </p:txBody>
+      </p:sp>
+      <p:sp>
+        <p:nvSpPr>
+          <p:cNvPr id="202" name="Google Shape;202;g3923dfd7fba_4_92"/>
+          <p:cNvSpPr/>
+          <p:nvPr/>
+        </p:nvSpPr>
+        <p:spPr>
+          <a:xfrm>
+            <a:off x="457200" y="1188720"/>
+            <a:ext cx="11277300" cy="18300"/>
+          </a:xfrm>
+          <a:prstGeom prst="rect">
+            <a:avLst/>
+          </a:prstGeom>
+          <a:solidFill>
+            <a:srgbClr val="C8C8C8"/>
+          </a:solidFill>
+          <a:ln>
+            <a:noFill/>
+          </a:ln>
+          <a:effectLst>
+            <a:outerShdw blurRad="40000" rotWithShape="0" dir="5400000" dist="23000">
+              <a:srgbClr val="000000">
+                <a:alpha val="34900"/>
+              </a:srgbClr>
+            </a:outerShdw>
+          </a:effectLst>
+        </p:spPr>
+        <p:txBody>
+          <a:bodyPr anchorCtr="0" anchor="ctr" bIns="45700" lIns="91425" spcFirstLastPara="1" rIns="91425" wrap="square" tIns="45700">
+            <a:noAutofit/>
+          </a:bodyPr>
+          <a:lstStyle/>
+          <a:p>
+            <a:pPr indent="0" lvl="0" marL="0" marR="0" rtl="0" algn="ctr">
+              <a:spcBef>
+                <a:spcPts val="0"/>
+              </a:spcBef>
+              <a:spcAft>
+                <a:spcPts val="0"/>
+              </a:spcAft>
+              <a:buNone/>
+            </a:pPr>
+            <a:r>
+              <a:t/>
+            </a:r>
+            <a:endParaRPr b="0" i="0" sz="1800" u="none" cap="none" strike="noStrike">
+              <a:solidFill>
+                <a:schemeClr val="dk1"/>
+              </a:solidFill>
+              <a:latin typeface="Calibri"/>
+              <a:ea typeface="Calibri"/>
+              <a:cs typeface="Calibri"/>
+              <a:sym typeface="Calibri"/>
+            </a:endParaRPr>
+          </a:p>
+        </p:txBody>
+      </p:sp>
+    </p:spTree>
+  </p:cSld>
+  <p:clrMapOvr>
+    <a:masterClrMapping/>
+  </p:clrMapOvr>
+</p:sld>
+</file>
+
+<file path=ppt/slides/slide16.xml><?xml version="1.0" encoding="utf-8"?>
+<p:sld xmlns:a="http://schemas.openxmlformats.org/drawingml/2006/main" xmlns:r="http://schemas.openxmlformats.org/officeDocument/2006/relationships" xmlns:mc="http://schemas.openxmlformats.org/markup-compatibility/2006" xmlns:mv="urn:schemas-microsoft-com:mac:vml" xmlns:p="http://schemas.openxmlformats.org/presentationml/2006/main" xmlns:c="http://schemas.openxmlformats.org/drawingml/2006/chart" xmlns:dgm="http://schemas.openxmlformats.org/drawingml/2006/diagram" xmlns:o="urn:schemas-microsoft-com:office:office" xmlns:v="urn:schemas-microsoft-com:vml" xmlns:pvml="urn:schemas-microsoft-com:office:powerpoint" xmlns:com="http://schemas.openxmlformats.org/drawingml/2006/compatibility" xmlns:p14="http://schemas.microsoft.com/office/powerpoint/2010/main" xmlns:p15="http://schemas.microsoft.com/office/powerpoint/2012/main" xmlns:ahyp="http://schemas.microsoft.com/office/drawing/2018/hyperlinkcolor">
+  <p:cSld>
+    <p:spTree>
+      <p:nvGrpSpPr>
+        <p:cNvPr id="206" name="Shape 206"/>
+        <p:cNvGrpSpPr/>
+        <p:nvPr/>
+      </p:nvGrpSpPr>
+      <p:grpSpPr>
+        <a:xfrm>
+          <a:off x="0" y="0"/>
+          <a:ext cx="0" cy="0"/>
+          <a:chOff x="0" y="0"/>
+          <a:chExt cx="0" cy="0"/>
+        </a:xfrm>
+      </p:grpSpPr>
+      <p:sp>
+        <p:nvSpPr>
+          <p:cNvPr id="207" name="Google Shape;207;g3923dfd7fba_4_98"/>
+          <p:cNvSpPr txBox="1"/>
+          <p:nvPr/>
+        </p:nvSpPr>
+        <p:spPr>
+          <a:xfrm>
+            <a:off x="945125" y="1775000"/>
+            <a:ext cx="10189200" cy="2692200"/>
+          </a:xfrm>
+          <a:prstGeom prst="rect">
+            <a:avLst/>
+          </a:prstGeom>
+          <a:noFill/>
+          <a:ln>
+            <a:noFill/>
+          </a:ln>
+        </p:spPr>
+        <p:txBody>
+          <a:bodyPr anchorCtr="0" anchor="t" bIns="91425" lIns="91425" spcFirstLastPara="1" rIns="91425" wrap="square" tIns="91425">
+            <a:spAutoFit/>
+          </a:bodyPr>
+          <a:lstStyle/>
+          <a:p>
+            <a:pPr indent="0" lvl="0" marL="0" rtl="0" algn="l">
+              <a:lnSpc>
+                <a:spcPct val="115000"/>
+              </a:lnSpc>
+              <a:spcBef>
+                <a:spcPts val="0"/>
+              </a:spcBef>
+              <a:spcAft>
+                <a:spcPts val="0"/>
+              </a:spcAft>
+              <a:buClr>
+                <a:schemeClr val="dk1"/>
+              </a:buClr>
+              <a:buSzPts val="1100"/>
+              <a:buFont typeface="Arial"/>
+              <a:buNone/>
+            </a:pPr>
+            <a:r>
+              <a:rPr lang="en-US" sz="1800">
+                <a:solidFill>
+                  <a:schemeClr val="dk1"/>
+                </a:solidFill>
+                <a:latin typeface="Calibri"/>
+                <a:ea typeface="Calibri"/>
+                <a:cs typeface="Calibri"/>
+                <a:sym typeface="Calibri"/>
+              </a:rPr>
+              <a:t>Isolation Forest:</a:t>
+            </a:r>
+            <a:endParaRPr sz="1800">
+              <a:solidFill>
+                <a:schemeClr val="dk1"/>
+              </a:solidFill>
+              <a:latin typeface="Calibri"/>
+              <a:ea typeface="Calibri"/>
+              <a:cs typeface="Calibri"/>
+              <a:sym typeface="Calibri"/>
+            </a:endParaRPr>
+          </a:p>
+          <a:p>
+            <a:pPr indent="0" lvl="0" marL="0" rtl="0" algn="l">
+              <a:lnSpc>
+                <a:spcPct val="115000"/>
+              </a:lnSpc>
+              <a:spcBef>
+                <a:spcPts val="0"/>
+              </a:spcBef>
+              <a:spcAft>
+                <a:spcPts val="0"/>
+              </a:spcAft>
+              <a:buClr>
+                <a:schemeClr val="dk1"/>
+              </a:buClr>
+              <a:buSzPts val="1100"/>
+              <a:buFont typeface="Arial"/>
+              <a:buNone/>
+            </a:pPr>
+            <a:r>
+              <a:rPr lang="en-US" sz="1800">
+                <a:solidFill>
+                  <a:schemeClr val="dk1"/>
+                </a:solidFill>
+                <a:latin typeface="Calibri"/>
+                <a:ea typeface="Calibri"/>
+                <a:cs typeface="Calibri"/>
+                <a:sym typeface="Calibri"/>
+              </a:rPr>
+              <a:t>    </a:t>
+            </a:r>
+            <a:r>
+              <a:rPr lang="en-US" sz="1800">
+                <a:solidFill>
+                  <a:schemeClr val="dk1"/>
+                </a:solidFill>
+                <a:latin typeface="Calibri"/>
+                <a:ea typeface="Calibri"/>
+                <a:cs typeface="Calibri"/>
+                <a:sym typeface="Calibri"/>
+              </a:rPr>
+              <a:t>(Cov=4.0%, Prec=1.00, Rec=0.27, n=12), </a:t>
+            </a:r>
+            <a:r>
+              <a:rPr lang="en-US" sz="1800">
+                <a:solidFill>
+                  <a:schemeClr val="dk1"/>
+                </a:solidFill>
+                <a:latin typeface="Calibri"/>
+                <a:ea typeface="Calibri"/>
+                <a:cs typeface="Calibri"/>
+                <a:sym typeface="Calibri"/>
+              </a:rPr>
+              <a:t>Confusion: TP=12, FP=0, FN=33, TN=255</a:t>
+            </a:r>
+            <a:endParaRPr sz="1800">
+              <a:solidFill>
+                <a:schemeClr val="dk1"/>
+              </a:solidFill>
+              <a:latin typeface="Calibri"/>
+              <a:ea typeface="Calibri"/>
+              <a:cs typeface="Calibri"/>
+              <a:sym typeface="Calibri"/>
+            </a:endParaRPr>
+          </a:p>
+          <a:p>
+            <a:pPr indent="0" lvl="0" marL="0" rtl="0" algn="l">
+              <a:lnSpc>
+                <a:spcPct val="115000"/>
+              </a:lnSpc>
+              <a:spcBef>
+                <a:spcPts val="0"/>
+              </a:spcBef>
+              <a:spcAft>
+                <a:spcPts val="0"/>
+              </a:spcAft>
+              <a:buClr>
+                <a:schemeClr val="dk1"/>
+              </a:buClr>
+              <a:buSzPts val="1100"/>
+              <a:buFont typeface="Arial"/>
+              <a:buNone/>
+            </a:pPr>
+            <a:r>
+              <a:rPr lang="en-US" sz="1800">
+                <a:solidFill>
+                  <a:schemeClr val="dk1"/>
+                </a:solidFill>
+                <a:latin typeface="Calibri"/>
+                <a:ea typeface="Calibri"/>
+                <a:cs typeface="Calibri"/>
+                <a:sym typeface="Calibri"/>
+              </a:rPr>
+              <a:t>    FOL: ∀t : obstacle_clearance_ratio(t) &gt; 31.314 ∧ total_obstacle_area(t) &lt;= 0.875 ∧ door_width(t) &gt; 0.935 ⇒ Isolation Forest</a:t>
+            </a:r>
+            <a:endParaRPr sz="1800">
+              <a:solidFill>
+                <a:schemeClr val="dk1"/>
+              </a:solidFill>
+              <a:latin typeface="Calibri"/>
+              <a:ea typeface="Calibri"/>
+              <a:cs typeface="Calibri"/>
+              <a:sym typeface="Calibri"/>
+            </a:endParaRPr>
+          </a:p>
+          <a:p>
+            <a:pPr indent="0" lvl="0" marL="0" rtl="0" algn="l">
+              <a:lnSpc>
+                <a:spcPct val="115000"/>
+              </a:lnSpc>
+              <a:spcBef>
+                <a:spcPts val="0"/>
+              </a:spcBef>
+              <a:spcAft>
+                <a:spcPts val="0"/>
+              </a:spcAft>
+              <a:buClr>
+                <a:schemeClr val="dk1"/>
+              </a:buClr>
+              <a:buSzPts val="1100"/>
+              <a:buFont typeface="Arial"/>
+              <a:buNone/>
+            </a:pPr>
+            <a:r>
+              <a:rPr lang="en-US" sz="1800">
+                <a:solidFill>
+                  <a:schemeClr val="dk1"/>
+                </a:solidFill>
+                <a:latin typeface="Calibri"/>
+                <a:ea typeface="Calibri"/>
+                <a:cs typeface="Calibri"/>
+                <a:sym typeface="Calibri"/>
+              </a:rPr>
+              <a:t>    NL:  IF obstacle clearance ratio &gt; 31.314 AND total obstacle area ≤ 0.875 AND door width &gt; 0.935 THEN Isolation Forest</a:t>
+            </a:r>
+            <a:endParaRPr sz="1800">
+              <a:solidFill>
+                <a:schemeClr val="dk1"/>
+              </a:solidFill>
+              <a:latin typeface="Calibri"/>
+              <a:ea typeface="Calibri"/>
+              <a:cs typeface="Calibri"/>
+              <a:sym typeface="Calibri"/>
+            </a:endParaRPr>
+          </a:p>
+          <a:p>
+            <a:pPr indent="0" lvl="0" marL="0" rtl="0" algn="l">
+              <a:lnSpc>
+                <a:spcPct val="115000"/>
+              </a:lnSpc>
+              <a:spcBef>
+                <a:spcPts val="0"/>
+              </a:spcBef>
+              <a:spcAft>
+                <a:spcPts val="0"/>
+              </a:spcAft>
+              <a:buClr>
+                <a:schemeClr val="dk1"/>
+              </a:buClr>
+              <a:buSzPts val="1100"/>
+              <a:buFont typeface="Arial"/>
+              <a:buNone/>
+            </a:pPr>
+            <a:r>
+              <a:t/>
+            </a:r>
+            <a:endParaRPr sz="1800">
+              <a:solidFill>
+                <a:schemeClr val="dk1"/>
+              </a:solidFill>
+              <a:latin typeface="Calibri"/>
+              <a:ea typeface="Calibri"/>
+              <a:cs typeface="Calibri"/>
+              <a:sym typeface="Calibri"/>
+            </a:endParaRPr>
+          </a:p>
+          <a:p>
+            <a:pPr indent="0" lvl="0" marL="0" rtl="0" algn="l">
+              <a:spcBef>
+                <a:spcPts val="0"/>
+              </a:spcBef>
+              <a:spcAft>
+                <a:spcPts val="0"/>
+              </a:spcAft>
+              <a:buNone/>
+            </a:pPr>
+            <a:r>
+              <a:t/>
+            </a:r>
+            <a:endParaRPr sz="1800">
+              <a:solidFill>
+                <a:schemeClr val="dk1"/>
+              </a:solidFill>
+              <a:latin typeface="Calibri"/>
+              <a:ea typeface="Calibri"/>
+              <a:cs typeface="Calibri"/>
+              <a:sym typeface="Calibri"/>
+            </a:endParaRPr>
+          </a:p>
+        </p:txBody>
+      </p:sp>
+      <p:sp>
+        <p:nvSpPr>
+          <p:cNvPr id="208" name="Google Shape;208;g3923dfd7fba_4_98"/>
+          <p:cNvSpPr txBox="1"/>
+          <p:nvPr/>
+        </p:nvSpPr>
+        <p:spPr>
+          <a:xfrm>
+            <a:off x="457200" y="365760"/>
+            <a:ext cx="9144000" cy="523200"/>
+          </a:xfrm>
+          <a:prstGeom prst="rect">
+            <a:avLst/>
+          </a:prstGeom>
+          <a:noFill/>
+          <a:ln>
+            <a:noFill/>
+          </a:ln>
+        </p:spPr>
+        <p:txBody>
+          <a:bodyPr anchorCtr="0" anchor="t" bIns="45700" lIns="91425" spcFirstLastPara="1" rIns="91425" wrap="square" tIns="45700">
+            <a:spAutoFit/>
+          </a:bodyPr>
+          <a:lstStyle/>
           <a:p>
             <a:pPr indent="0" lvl="0" marL="0" marR="0" rtl="0" algn="l">
               <a:spcBef>
-                <a:spcPts val="800"/>
+                <a:spcPts val="0"/>
               </a:spcBef>
               <a:spcAft>
                 <a:spcPts val="0"/>
@@ -15609,23 +15996,54 @@
               <a:buNone/>
             </a:pPr>
             <a:r>
-              <a:rPr b="0" i="0" lang="en-US" sz="1800" u="none" cap="none" strike="noStrike">
+              <a:rPr i="0" lang="en-US" sz="2800" u="none" cap="none" strike="noStrike">
                 <a:solidFill>
-                  <a:srgbClr val="333333"/>
+                  <a:srgbClr val="000000"/>
                 </a:solidFill>
-                <a:latin typeface="Arial"/>
-                <a:ea typeface="Arial"/>
-                <a:cs typeface="Arial"/>
-                <a:sym typeface="Arial"/>
               </a:rPr>
-              <a:t>•   For all t: obstacle_clearance_ratio &gt; 31.31 AND total_obstacle_area &lt;= 0.875 =&gt; high_amcl_uncertainty</a:t>
+              <a:t>Derived FOL Rules - Examples</a:t>
             </a:r>
             <a:endParaRPr/>
           </a:p>
+        </p:txBody>
+      </p:sp>
+      <p:sp>
+        <p:nvSpPr>
+          <p:cNvPr id="209" name="Google Shape;209;g3923dfd7fba_4_98"/>
+          <p:cNvSpPr/>
+          <p:nvPr/>
+        </p:nvSpPr>
+        <p:spPr>
+          <a:xfrm>
+            <a:off x="457200" y="1188720"/>
+            <a:ext cx="11277300" cy="18300"/>
+          </a:xfrm>
+          <a:prstGeom prst="rect">
+            <a:avLst/>
+          </a:prstGeom>
+          <a:solidFill>
+            <a:srgbClr val="C8C8C8"/>
+          </a:solidFill>
+          <a:ln>
+            <a:noFill/>
+          </a:ln>
+          <a:effectLst>
+            <a:outerShdw blurRad="40000" rotWithShape="0" dir="5400000" dist="23000">
+              <a:srgbClr val="000000">
+                <a:alpha val="34900"/>
+              </a:srgbClr>
+            </a:outerShdw>
+          </a:effectLst>
+        </p:spPr>
+        <p:txBody>
+          <a:bodyPr anchorCtr="0" anchor="ctr" bIns="45700" lIns="91425" spcFirstLastPara="1" rIns="91425" wrap="square" tIns="45700">
+            <a:noAutofit/>
+          </a:bodyPr>
+          <a:lstStyle/>
           <a:p>
-            <a:pPr indent="0" lvl="0" marL="0" marR="0" rtl="0" algn="l">
-              <a:spcBef>
-                <a:spcPts val="800"/>
+            <a:pPr indent="0" lvl="0" marL="0" marR="0" rtl="0" algn="ctr">
+              <a:spcBef>
+                <a:spcPts val="0"/>
               </a:spcBef>
               <a:spcAft>
                 <a:spcPts val="0"/>
@@ -15633,66 +16051,17 @@
               <a:buNone/>
             </a:pPr>
             <a:r>
-              <a:rPr b="0" i="0" lang="en-US" sz="1800" u="none" cap="none" strike="noStrike">
-                <a:solidFill>
-                  <a:srgbClr val="333333"/>
-                </a:solidFill>
-                <a:latin typeface="Arial"/>
-                <a:ea typeface="Arial"/>
-                <a:cs typeface="Arial"/>
-                <a:sym typeface="Arial"/>
-              </a:rPr>
-              <a:t>• </a:t>
+              <a:t/>
             </a:r>
-            <a:endParaRPr/>
-          </a:p>
-          <a:p>
-            <a:pPr indent="0" lvl="0" marL="0" marR="0" rtl="0" algn="l">
-              <a:spcBef>
-                <a:spcPts val="800"/>
-              </a:spcBef>
-              <a:spcAft>
-                <a:spcPts val="0"/>
-              </a:spcAft>
-              <a:buNone/>
-            </a:pPr>
-            <a:r>
-              <a:rPr b="0" i="0" lang="en-US" sz="1800" u="none" cap="none" strike="noStrike">
-                <a:solidFill>
-                  <a:srgbClr val="333333"/>
-                </a:solidFill>
-                <a:latin typeface="Arial"/>
-                <a:ea typeface="Arial"/>
-                <a:cs typeface="Arial"/>
-                <a:sym typeface="Arial"/>
-              </a:rPr>
-              <a:t>• Path Inefficiency:</a:t>
-            </a:r>
-            <a:endParaRPr/>
-          </a:p>
-          <a:p>
-            <a:pPr indent="0" lvl="0" marL="0" marR="0" rtl="0" algn="l">
-              <a:spcBef>
-                <a:spcPts val="800"/>
-              </a:spcBef>
-              <a:spcAft>
-                <a:spcPts val="0"/>
-              </a:spcAft>
-              <a:buNone/>
-            </a:pPr>
-            <a:r>
-              <a:rPr b="0" i="0" lang="en-US" sz="1800" u="none" cap="none" strike="noStrike">
-                <a:solidFill>
-                  <a:srgbClr val="333333"/>
-                </a:solidFill>
-                <a:latin typeface="Arial"/>
-                <a:ea typeface="Arial"/>
-                <a:cs typeface="Arial"/>
-                <a:sym typeface="Arial"/>
-              </a:rPr>
-              <a:t>•   For all t: clearance_ratio &gt; 6.812 AND min_door_distance &lt;= 1.349 =&gt; path_inefficiency</a:t>
-            </a:r>
-            <a:endParaRPr/>
+            <a:endParaRPr b="0" i="0" sz="1800" u="none" cap="none" strike="noStrike">
+              <a:solidFill>
+                <a:schemeClr val="dk1"/>
+              </a:solidFill>
+              <a:latin typeface="Calibri"/>
+              <a:ea typeface="Calibri"/>
+              <a:cs typeface="Calibri"/>
+              <a:sym typeface="Calibri"/>
+            </a:endParaRPr>
           </a:p>
         </p:txBody>
       </p:sp>
@@ -16318,14 +16687,14 @@
       </p:grpSpPr>
       <p:sp>
         <p:nvSpPr>
-          <p:cNvPr id="230" name="Google Shape;230;p15"/>
+          <p:cNvPr id="230" name="Google Shape;230;p16"/>
           <p:cNvSpPr txBox="1"/>
           <p:nvPr/>
         </p:nvSpPr>
         <p:spPr>
           <a:xfrm>
-            <a:off x="457200" y="365760"/>
-            <a:ext cx="9144000" cy="731520"/>
+            <a:off x="457200" y="2286000"/>
+            <a:ext cx="11277295" cy="1371600"/>
           </a:xfrm>
           <a:prstGeom prst="rect">
             <a:avLst/>
@@ -16341,7 +16710,7 @@
           </a:bodyPr>
           <a:lstStyle/>
           <a:p>
-            <a:pPr indent="0" lvl="0" marL="0" marR="0" rtl="0" algn="l">
+            <a:pPr indent="0" lvl="0" marL="0" marR="0" rtl="0" algn="ctr">
               <a:spcBef>
                 <a:spcPts val="0"/>
               </a:spcBef>
@@ -16351,7 +16720,7 @@
               <a:buNone/>
             </a:pPr>
             <a:r>
-              <a:rPr b="1" i="0" lang="en-US" sz="2800" u="none" cap="none" strike="noStrike">
+              <a:rPr b="1" i="0" lang="en-US" sz="4400" u="none" cap="none" strike="noStrike">
                 <a:solidFill>
                   <a:srgbClr val="000000"/>
                 </a:solidFill>
@@ -16360,7 +16729,7 @@
                 <a:cs typeface="Arial"/>
                 <a:sym typeface="Arial"/>
               </a:rPr>
-              <a:t>Summary</a:t>
+              <a:t>Thank You!</a:t>
             </a:r>
             <a:endParaRPr/>
           </a:p>
@@ -16368,72 +16737,14 @@
       </p:sp>
       <p:sp>
         <p:nvSpPr>
-          <p:cNvPr id="231" name="Google Shape;231;p15"/>
-          <p:cNvSpPr/>
-          <p:nvPr/>
-        </p:nvSpPr>
-        <p:spPr>
-          <a:xfrm>
-            <a:off x="457200" y="1188720"/>
-            <a:ext cx="11277295" cy="18288"/>
-          </a:xfrm>
-          <a:prstGeom prst="rect">
-            <a:avLst/>
-          </a:prstGeom>
-          <a:solidFill>
-            <a:srgbClr val="C8C8C8"/>
-          </a:solidFill>
-          <a:ln>
-            <a:noFill/>
-          </a:ln>
-          <a:effectLst>
-            <a:outerShdw blurRad="40000" rotWithShape="0" dir="5400000" dist="23000">
-              <a:srgbClr val="000000">
-                <a:alpha val="34901"/>
-              </a:srgbClr>
-            </a:outerShdw>
-          </a:effectLst>
-        </p:spPr>
-        <p:txBody>
-          <a:bodyPr anchorCtr="0" anchor="ctr" bIns="45700" lIns="91425" spcFirstLastPara="1" rIns="91425" wrap="square" tIns="45700">
-            <a:noAutofit/>
-          </a:bodyPr>
-          <a:lstStyle/>
-          <a:p>
-            <a:pPr indent="0" lvl="0" marL="0" marR="0" rtl="0" algn="ctr">
-              <a:spcBef>
-                <a:spcPts val="0"/>
-              </a:spcBef>
-              <a:spcAft>
-                <a:spcPts val="0"/>
-              </a:spcAft>
-              <a:buNone/>
-            </a:pPr>
-            <a:r>
-              <a:t/>
-            </a:r>
-            <a:endParaRPr b="0" i="0" sz="1800" u="none" cap="none" strike="noStrike">
-              <a:solidFill>
-                <a:schemeClr val="dk1"/>
-              </a:solidFill>
-              <a:latin typeface="Calibri"/>
-              <a:ea typeface="Calibri"/>
-              <a:cs typeface="Calibri"/>
-              <a:sym typeface="Calibri"/>
-            </a:endParaRPr>
-          </a:p>
-        </p:txBody>
-      </p:sp>
-      <p:sp>
-        <p:nvSpPr>
-          <p:cNvPr id="232" name="Google Shape;232;p15"/>
+          <p:cNvPr id="231" name="Google Shape;231;p16"/>
           <p:cNvSpPr txBox="1"/>
           <p:nvPr/>
         </p:nvSpPr>
         <p:spPr>
           <a:xfrm>
-            <a:off x="640080" y="1463040"/>
-            <a:ext cx="10972800" cy="1508400"/>
+            <a:off x="457200" y="3840480"/>
+            <a:ext cx="11277295" cy="914400"/>
           </a:xfrm>
           <a:prstGeom prst="rect">
             <a:avLst/>
@@ -16449,7 +16760,7 @@
           </a:bodyPr>
           <a:lstStyle/>
           <a:p>
-            <a:pPr indent="0" lvl="0" marL="0" marR="0" rtl="0" algn="l">
+            <a:pPr indent="0" lvl="0" marL="0" marR="0" rtl="0" algn="ctr">
               <a:spcBef>
                 <a:spcPts val="0"/>
               </a:spcBef>
@@ -16459,88 +16770,16 @@
               <a:buNone/>
             </a:pPr>
             <a:r>
-              <a:rPr b="0" i="0" lang="en-US" sz="1800" u="none" cap="none" strike="noStrike">
+              <a:rPr b="0" i="0" lang="en-US" sz="2400" u="none" cap="none" strike="noStrike">
                 <a:solidFill>
-                  <a:srgbClr val="333333"/>
+                  <a:srgbClr val="666666"/>
                 </a:solidFill>
                 <a:latin typeface="Arial"/>
                 <a:ea typeface="Arial"/>
                 <a:cs typeface="Arial"/>
                 <a:sym typeface="Arial"/>
               </a:rPr>
-              <a:t>• Requirements: Switched from log-based to CSV-based anomaly detection</a:t>
-            </a:r>
-            <a:endParaRPr/>
-          </a:p>
-          <a:p>
-            <a:pPr indent="0" lvl="0" marL="0" marR="0" rtl="0" algn="l">
-              <a:spcBef>
-                <a:spcPts val="800"/>
-              </a:spcBef>
-              <a:spcAft>
-                <a:spcPts val="0"/>
-              </a:spcAft>
-              <a:buNone/>
-            </a:pPr>
-            <a:r>
-              <a:rPr b="0" i="0" lang="en-US" sz="1800" u="none" cap="none" strike="noStrike">
-                <a:solidFill>
-                  <a:srgbClr val="333333"/>
-                </a:solidFill>
-                <a:latin typeface="Arial"/>
-                <a:ea typeface="Arial"/>
-                <a:cs typeface="Arial"/>
-                <a:sym typeface="Arial"/>
-              </a:rPr>
-              <a:t>• Metrics: 9 performance metrics + 9 anomaly detectors (8 rule + 1 ML)</a:t>
-            </a:r>
-            <a:endParaRPr/>
-          </a:p>
-          <a:p>
-            <a:pPr indent="0" lvl="0" marL="0" marR="0" rtl="0" algn="l">
-              <a:spcBef>
-                <a:spcPts val="800"/>
-              </a:spcBef>
-              <a:spcAft>
-                <a:spcPts val="0"/>
-              </a:spcAft>
-              <a:buNone/>
-            </a:pPr>
-            <a:r>
-              <a:rPr b="0" i="0" lang="en-US" sz="1800" u="none" cap="none" strike="noStrike">
-                <a:solidFill>
-                  <a:srgbClr val="333333"/>
-                </a:solidFill>
-                <a:latin typeface="Arial"/>
-                <a:ea typeface="Arial"/>
-                <a:cs typeface="Arial"/>
-                <a:sym typeface="Arial"/>
-              </a:rPr>
-              <a:t>• Causal Analysis: Surrogate tree distillation for interpretable FOL rules</a:t>
-            </a:r>
-            <a:endParaRPr/>
-          </a:p>
-          <a:p>
-            <a:pPr indent="0" lvl="0" marL="0" marR="0" rtl="0" algn="l">
-              <a:spcBef>
-                <a:spcPts val="800"/>
-              </a:spcBef>
-              <a:spcAft>
-                <a:spcPts val="0"/>
-              </a:spcAft>
-              <a:buNone/>
-            </a:pPr>
-            <a:r>
-              <a:rPr b="0" i="0" lang="en-US" sz="1800" u="none" cap="none" strike="noStrike">
-                <a:solidFill>
-                  <a:srgbClr val="333333"/>
-                </a:solidFill>
-                <a:latin typeface="Arial"/>
-                <a:ea typeface="Arial"/>
-                <a:cs typeface="Arial"/>
-                <a:sym typeface="Arial"/>
-              </a:rPr>
-              <a:t>• Future: Hyperparameter tuning + enhanced feature engineering</a:t>
+              <a:t>Questions?</a:t>
             </a:r>
             <a:endParaRPr/>
           </a:p>
@@ -16820,131 +17059,6 @@
                 <a:sym typeface="Arial"/>
               </a:rPr>
               <a:t>• 5. Ideas for Future Improvements (~1 min)</a:t>
-            </a:r>
-            <a:endParaRPr/>
-          </a:p>
-        </p:txBody>
-      </p:sp>
-    </p:spTree>
-  </p:cSld>
-  <p:clrMapOvr>
-    <a:masterClrMapping/>
-  </p:clrMapOvr>
-</p:sld>
-</file>
-
-<file path=ppt/slides/slide20.xml><?xml version="1.0" encoding="utf-8"?>
-<p:sld xmlns:a="http://schemas.openxmlformats.org/drawingml/2006/main" xmlns:r="http://schemas.openxmlformats.org/officeDocument/2006/relationships" xmlns:mc="http://schemas.openxmlformats.org/markup-compatibility/2006" xmlns:mv="urn:schemas-microsoft-com:mac:vml" xmlns:p="http://schemas.openxmlformats.org/presentationml/2006/main" xmlns:c="http://schemas.openxmlformats.org/drawingml/2006/chart" xmlns:dgm="http://schemas.openxmlformats.org/drawingml/2006/diagram" xmlns:o="urn:schemas-microsoft-com:office:office" xmlns:v="urn:schemas-microsoft-com:vml" xmlns:pvml="urn:schemas-microsoft-com:office:powerpoint" xmlns:com="http://schemas.openxmlformats.org/drawingml/2006/compatibility" xmlns:p14="http://schemas.microsoft.com/office/powerpoint/2010/main" xmlns:p15="http://schemas.microsoft.com/office/powerpoint/2012/main" xmlns:ahyp="http://schemas.microsoft.com/office/drawing/2018/hyperlinkcolor">
-  <p:cSld>
-    <p:spTree>
-      <p:nvGrpSpPr>
-        <p:cNvPr id="236" name="Shape 236"/>
-        <p:cNvGrpSpPr/>
-        <p:nvPr/>
-      </p:nvGrpSpPr>
-      <p:grpSpPr>
-        <a:xfrm>
-          <a:off x="0" y="0"/>
-          <a:ext cx="0" cy="0"/>
-          <a:chOff x="0" y="0"/>
-          <a:chExt cx="0" cy="0"/>
-        </a:xfrm>
-      </p:grpSpPr>
-      <p:sp>
-        <p:nvSpPr>
-          <p:cNvPr id="237" name="Google Shape;237;p16"/>
-          <p:cNvSpPr txBox="1"/>
-          <p:nvPr/>
-        </p:nvSpPr>
-        <p:spPr>
-          <a:xfrm>
-            <a:off x="457200" y="2286000"/>
-            <a:ext cx="11277295" cy="1371600"/>
-          </a:xfrm>
-          <a:prstGeom prst="rect">
-            <a:avLst/>
-          </a:prstGeom>
-          <a:noFill/>
-          <a:ln>
-            <a:noFill/>
-          </a:ln>
-        </p:spPr>
-        <p:txBody>
-          <a:bodyPr anchorCtr="0" anchor="t" bIns="45700" lIns="91425" spcFirstLastPara="1" rIns="91425" wrap="square" tIns="45700">
-            <a:spAutoFit/>
-          </a:bodyPr>
-          <a:lstStyle/>
-          <a:p>
-            <a:pPr indent="0" lvl="0" marL="0" marR="0" rtl="0" algn="ctr">
-              <a:spcBef>
-                <a:spcPts val="0"/>
-              </a:spcBef>
-              <a:spcAft>
-                <a:spcPts val="0"/>
-              </a:spcAft>
-              <a:buNone/>
-            </a:pPr>
-            <a:r>
-              <a:rPr b="1" i="0" lang="en-US" sz="4400" u="none" cap="none" strike="noStrike">
-                <a:solidFill>
-                  <a:srgbClr val="000000"/>
-                </a:solidFill>
-                <a:latin typeface="Arial"/>
-                <a:ea typeface="Arial"/>
-                <a:cs typeface="Arial"/>
-                <a:sym typeface="Arial"/>
-              </a:rPr>
-              <a:t>Thank You!</a:t>
-            </a:r>
-            <a:endParaRPr/>
-          </a:p>
-        </p:txBody>
-      </p:sp>
-      <p:sp>
-        <p:nvSpPr>
-          <p:cNvPr id="238" name="Google Shape;238;p16"/>
-          <p:cNvSpPr txBox="1"/>
-          <p:nvPr/>
-        </p:nvSpPr>
-        <p:spPr>
-          <a:xfrm>
-            <a:off x="457200" y="3840480"/>
-            <a:ext cx="11277295" cy="914400"/>
-          </a:xfrm>
-          <a:prstGeom prst="rect">
-            <a:avLst/>
-          </a:prstGeom>
-          <a:noFill/>
-          <a:ln>
-            <a:noFill/>
-          </a:ln>
-        </p:spPr>
-        <p:txBody>
-          <a:bodyPr anchorCtr="0" anchor="t" bIns="45700" lIns="91425" spcFirstLastPara="1" rIns="91425" wrap="square" tIns="45700">
-            <a:spAutoFit/>
-          </a:bodyPr>
-          <a:lstStyle/>
-          <a:p>
-            <a:pPr indent="0" lvl="0" marL="0" marR="0" rtl="0" algn="ctr">
-              <a:spcBef>
-                <a:spcPts val="0"/>
-              </a:spcBef>
-              <a:spcAft>
-                <a:spcPts val="0"/>
-              </a:spcAft>
-              <a:buNone/>
-            </a:pPr>
-            <a:r>
-              <a:rPr b="0" i="0" lang="en-US" sz="2400" u="none" cap="none" strike="noStrike">
-                <a:solidFill>
-                  <a:srgbClr val="666666"/>
-                </a:solidFill>
-                <a:latin typeface="Arial"/>
-                <a:ea typeface="Arial"/>
-                <a:cs typeface="Arial"/>
-                <a:sym typeface="Arial"/>
-              </a:rPr>
-              <a:t>Questions?</a:t>
             </a:r>
             <a:endParaRPr/>
           </a:p>
@@ -17928,7 +18042,7 @@
             <a:tbl>
               <a:tblPr bandRow="1" firstRow="1">
                 <a:noFill/>
-                <a:tableStyleId>{6BF11DA5-D60C-43FA-A1B7-15BA222CE41B}</a:tableStyleId>
+                <a:tableStyleId>{53756993-92F7-49EF-9B74-DAA4B2E32409}</a:tableStyleId>
               </a:tblPr>
               <a:tblGrid>
                 <a:gridCol w="2743200"/>
@@ -20055,7 +20169,7 @@
             <a:tbl>
               <a:tblPr bandRow="1" firstRow="1">
                 <a:noFill/>
-                <a:tableStyleId>{6BF11DA5-D60C-43FA-A1B7-15BA222CE41B}</a:tableStyleId>
+                <a:tableStyleId>{53756993-92F7-49EF-9B74-DAA4B2E32409}</a:tableStyleId>
               </a:tblPr>
               <a:tblGrid>
                 <a:gridCol w="2133600"/>
@@ -21251,7 +21365,7 @@
       </p:grpSpPr>
       <p:sp>
         <p:nvSpPr>
-          <p:cNvPr id="152" name="Google Shape;152;p8"/>
+          <p:cNvPr id="152" name="Google Shape;152;p10"/>
           <p:cNvSpPr txBox="1"/>
           <p:nvPr/>
         </p:nvSpPr>
@@ -21289,7 +21403,7 @@
                   <a:srgbClr val="000000"/>
                 </a:solidFill>
               </a:rPr>
-              <a:t>Insights - Scenario Categories</a:t>
+              <a:t>Insights - Anomaly Co-occurrence</a:t>
             </a:r>
             <a:endParaRPr/>
           </a:p>
@@ -21297,7 +21411,7 @@
       </p:sp>
       <p:sp>
         <p:nvSpPr>
-          <p:cNvPr id="153" name="Google Shape;153;p8"/>
+          <p:cNvPr id="153" name="Google Shape;153;p10"/>
           <p:cNvSpPr txBox="1"/>
           <p:nvPr/>
         </p:nvSpPr>
@@ -21347,7 +21461,7 @@
       </p:sp>
       <p:sp>
         <p:nvSpPr>
-          <p:cNvPr id="154" name="Google Shape;154;p8"/>
+          <p:cNvPr id="154" name="Google Shape;154;p10"/>
           <p:cNvSpPr/>
           <p:nvPr/>
         </p:nvSpPr>
@@ -21405,14 +21519,14 @@
       </p:sp>
       <p:sp>
         <p:nvSpPr>
-          <p:cNvPr id="155" name="Google Shape;155;p8"/>
+          <p:cNvPr id="155" name="Google Shape;155;p10"/>
           <p:cNvSpPr txBox="1"/>
           <p:nvPr/>
         </p:nvSpPr>
         <p:spPr>
           <a:xfrm>
-            <a:off x="640080" y="1463040"/>
-            <a:ext cx="10972800" cy="3304200"/>
+            <a:off x="609450" y="1682381"/>
+            <a:ext cx="10972800" cy="1826400"/>
           </a:xfrm>
           <a:prstGeom prst="rect">
             <a:avLst/>
@@ -21447,7 +21561,19 @@
                 <a:cs typeface="Arial"/>
                 <a:sym typeface="Arial"/>
               </a:rPr>
-              <a:t>• Door-width scenarios (120 runs):</a:t>
+              <a:t>• position_error_spike + high_yaw_error (Jaccard = 0</a:t>
+            </a:r>
+            <a:r>
+              <a:rPr b="0" i="0" lang="en-US" sz="1800" u="none" cap="none" strike="noStrike">
+                <a:solidFill>
+                  <a:srgbClr val="333333"/>
+                </a:solidFill>
+                <a:latin typeface="Arial"/>
+                <a:ea typeface="Arial"/>
+                <a:cs typeface="Arial"/>
+                <a:sym typeface="Arial"/>
+              </a:rPr>
+              <a:t>.60)</a:t>
             </a:r>
             <a:endParaRPr/>
           </a:p>
@@ -21471,7 +21597,7 @@
                 <a:cs typeface="Arial"/>
                 <a:sym typeface="Arial"/>
               </a:rPr>
-              <a:t>•   -&gt; Narrow doors are primary failure points</a:t>
+              <a:t>•   -&gt; Poor orientation tracking leads to position drift</a:t>
             </a:r>
             <a:endParaRPr/>
           </a:p>
@@ -21495,7 +21621,19 @@
                 <a:cs typeface="Arial"/>
                 <a:sym typeface="Arial"/>
               </a:rPr>
-              <a:t>•   -&gt; Robots struggle with precise navigation through tight passages</a:t>
+              <a:t>• high_yaw_error + path_inefficiency (Jaccar</a:t>
+            </a:r>
+            <a:r>
+              <a:rPr b="0" i="0" lang="en-US" sz="1800" u="none" cap="none" strike="noStrike">
+                <a:solidFill>
+                  <a:srgbClr val="333333"/>
+                </a:solidFill>
+                <a:latin typeface="Arial"/>
+                <a:ea typeface="Arial"/>
+                <a:cs typeface="Arial"/>
+                <a:sym typeface="Arial"/>
+              </a:rPr>
+              <a:t>d = 0.78)</a:t>
             </a:r>
             <a:endParaRPr/>
           </a:p>
@@ -21519,7 +21657,7 @@
                 <a:cs typeface="Arial"/>
                 <a:sym typeface="Arial"/>
               </a:rPr>
-              <a:t>• Hallway-window scenarios (120 runs):</a:t>
+              <a:t>•   -&gt; Orientation errors cause inefficient path execution</a:t>
             </a:r>
             <a:endParaRPr/>
           </a:p>
@@ -21534,116 +21672,9 @@
               <a:buNone/>
             </a:pPr>
             <a:r>
-              <a:rPr b="0" i="0" lang="en-US" sz="1800" u="none" cap="none" strike="noStrike">
-                <a:solidFill>
-                  <a:srgbClr val="333333"/>
-                </a:solidFill>
-                <a:latin typeface="Arial"/>
-                <a:ea typeface="Arial"/>
-                <a:cs typeface="Arial"/>
-                <a:sym typeface="Arial"/>
-              </a:rPr>
-              <a:t>•   -&gt; Window features confuse laser-based localization (AMCL)</a:t>
+              <a:t/>
             </a:r>
             <a:endParaRPr/>
-          </a:p>
-          <a:p>
-            <a:pPr indent="0" lvl="0" marL="0" marR="0" rtl="0" algn="l">
-              <a:spcBef>
-                <a:spcPts val="800"/>
-              </a:spcBef>
-              <a:spcAft>
-                <a:spcPts val="0"/>
-              </a:spcAft>
-              <a:buNone/>
-            </a:pPr>
-            <a:r>
-              <a:rPr b="0" i="0" lang="en-US" sz="1800" u="none" cap="none" strike="noStrike">
-                <a:solidFill>
-                  <a:srgbClr val="333333"/>
-                </a:solidFill>
-                <a:latin typeface="Arial"/>
-                <a:ea typeface="Arial"/>
-                <a:cs typeface="Arial"/>
-                <a:sym typeface="Arial"/>
-              </a:rPr>
-              <a:t>• Room-size scenarios (60 runs):</a:t>
-            </a:r>
-            <a:endParaRPr/>
-          </a:p>
-          <a:p>
-            <a:pPr indent="0" lvl="0" marL="0" marR="0" rtl="0" algn="l">
-              <a:spcBef>
-                <a:spcPts val="800"/>
-              </a:spcBef>
-              <a:spcAft>
-                <a:spcPts val="0"/>
-              </a:spcAft>
-              <a:buNone/>
-            </a:pPr>
-            <a:r>
-              <a:rPr b="0" i="0" lang="en-US" sz="1800" u="none" cap="none" strike="noStrike">
-                <a:solidFill>
-                  <a:srgbClr val="333333"/>
-                </a:solidFill>
-                <a:latin typeface="Arial"/>
-                <a:ea typeface="Arial"/>
-                <a:cs typeface="Arial"/>
-                <a:sym typeface="Arial"/>
-              </a:rPr>
-              <a:t>•   -&gt; Larger rooms with fewer features -&gt; higher localization uncertainty</a:t>
-            </a:r>
-            <a:endParaRPr b="0" i="0" sz="1800" u="none" cap="none" strike="noStrike">
-              <a:solidFill>
-                <a:srgbClr val="333333"/>
-              </a:solidFill>
-              <a:latin typeface="Arial"/>
-              <a:ea typeface="Arial"/>
-              <a:cs typeface="Arial"/>
-              <a:sym typeface="Arial"/>
-            </a:endParaRPr>
-          </a:p>
-          <a:p>
-            <a:pPr indent="0" lvl="0" marL="0" marR="0" rtl="0" algn="l">
-              <a:spcBef>
-                <a:spcPts val="800"/>
-              </a:spcBef>
-              <a:spcAft>
-                <a:spcPts val="0"/>
-              </a:spcAft>
-              <a:buNone/>
-            </a:pPr>
-            <a:r>
-              <a:t/>
-            </a:r>
-            <a:endParaRPr sz="1800">
-              <a:solidFill>
-                <a:srgbClr val="333333"/>
-              </a:solidFill>
-            </a:endParaRPr>
-          </a:p>
-          <a:p>
-            <a:pPr indent="0" lvl="0" marL="0" rtl="0" algn="l">
-              <a:lnSpc>
-                <a:spcPct val="115000"/>
-              </a:lnSpc>
-              <a:spcBef>
-                <a:spcPts val="0"/>
-              </a:spcBef>
-              <a:spcAft>
-                <a:spcPts val="0"/>
-              </a:spcAft>
-              <a:buSzPts val="1100"/>
-              <a:buNone/>
-            </a:pPr>
-            <a:r>
-              <a:t/>
-            </a:r>
-            <a:endParaRPr sz="1800">
-              <a:solidFill>
-                <a:srgbClr val="333333"/>
-              </a:solidFill>
-            </a:endParaRPr>
           </a:p>
         </p:txBody>
       </p:sp>
@@ -21656,6 +21687,285 @@
 </file>
 
 <file path=ppt/theme/theme1.xml><?xml version="1.0" encoding="utf-8"?>
+<a:theme xmlns:a="http://schemas.openxmlformats.org/drawingml/2006/main" xmlns:r="http://schemas.openxmlformats.org/officeDocument/2006/relationships" name="Office Theme">
+  <a:themeElements>
+    <a:clrScheme name="Office">
+      <a:dk1>
+        <a:srgbClr val="000000"/>
+      </a:dk1>
+      <a:lt1>
+        <a:srgbClr val="FFFFFF"/>
+      </a:lt1>
+      <a:dk2>
+        <a:srgbClr val="1F497D"/>
+      </a:dk2>
+      <a:lt2>
+        <a:srgbClr val="EEECE1"/>
+      </a:lt2>
+      <a:accent1>
+        <a:srgbClr val="4F81BD"/>
+      </a:accent1>
+      <a:accent2>
+        <a:srgbClr val="C0504D"/>
+      </a:accent2>
+      <a:accent3>
+        <a:srgbClr val="9BBB59"/>
+      </a:accent3>
+      <a:accent4>
+        <a:srgbClr val="8064A2"/>
+      </a:accent4>
+      <a:accent5>
+        <a:srgbClr val="4BACC6"/>
+      </a:accent5>
+      <a:accent6>
+        <a:srgbClr val="F79646"/>
+      </a:accent6>
+      <a:hlink>
+        <a:srgbClr val="0000FF"/>
+      </a:hlink>
+      <a:folHlink>
+        <a:srgbClr val="800080"/>
+      </a:folHlink>
+    </a:clrScheme>
+    <a:fontScheme name="Office">
+      <a:majorFont>
+        <a:latin typeface="Arial"/>
+        <a:ea typeface=""/>
+        <a:cs typeface=""/>
+        <a:font script="Jpan" typeface="ＭＳ Ｐゴシック"/>
+        <a:font script="Hang" typeface="맑은 고딕"/>
+        <a:font script="Hans" typeface="宋体"/>
+        <a:font script="Hant" typeface="新細明體"/>
+        <a:font script="Arab" typeface="Times New Roman"/>
+        <a:font script="Hebr" typeface="Times New Roman"/>
+        <a:font script="Thai" typeface="Angsana New"/>
+        <a:font script="Ethi" typeface="Nyala"/>
+        <a:font script="Beng" typeface="Vrinda"/>
+        <a:font script="Gujr" typeface="Shruti"/>
+        <a:font script="Khmr" typeface="MoolBoran"/>
+        <a:font script="Knda" typeface="Tunga"/>
+        <a:font script="Guru" typeface="Raavi"/>
+        <a:font script="Cans" typeface="Euphemia"/>
+        <a:font script="Cher" typeface="Plantagenet Cherokee"/>
+        <a:font script="Yiii" typeface="Microsoft Yi Baiti"/>
+        <a:font script="Tibt" typeface="Microsoft Himalaya"/>
+        <a:font script="Thaa" typeface="MV Boli"/>
+        <a:font script="Deva" typeface="Mangal"/>
+        <a:font script="Telu" typeface="Gautami"/>
+        <a:font script="Taml" typeface="Latha"/>
+        <a:font script="Syrc" typeface="Estrangelo Edessa"/>
+        <a:font script="Orya" typeface="Kalinga"/>
+        <a:font script="Mlym" typeface="Kartika"/>
+        <a:font script="Laoo" typeface="DokChampa"/>
+        <a:font script="Sinh" typeface="Iskoola Pota"/>
+        <a:font script="Mong" typeface="Mongolian Baiti"/>
+        <a:font script="Viet" typeface="Times New Roman"/>
+        <a:font script="Uigh" typeface="Microsoft Uighur"/>
+        <a:font script="Geor" typeface="Sylfaen"/>
+      </a:majorFont>
+      <a:minorFont>
+        <a:latin typeface="Arial"/>
+        <a:ea typeface=""/>
+        <a:cs typeface=""/>
+        <a:font script="Jpan" typeface="ＭＳ Ｐゴシック"/>
+        <a:font script="Hang" typeface="맑은 고딕"/>
+        <a:font script="Hans" typeface="宋体"/>
+        <a:font script="Hant" typeface="新細明體"/>
+        <a:font script="Arab" typeface="Arial"/>
+        <a:font script="Hebr" typeface="Arial"/>
+        <a:font script="Thai" typeface="Cordia New"/>
+        <a:font script="Ethi" typeface="Nyala"/>
+        <a:font script="Beng" typeface="Vrinda"/>
+        <a:font script="Gujr" typeface="Shruti"/>
+        <a:font script="Khmr" typeface="DaunPenh"/>
+        <a:font script="Knda" typeface="Tunga"/>
+        <a:font script="Guru" typeface="Raavi"/>
+        <a:font script="Cans" typeface="Euphemia"/>
+        <a:font script="Cher" typeface="Plantagenet Cherokee"/>
+        <a:font script="Yiii" typeface="Microsoft Yi Baiti"/>
+        <a:font script="Tibt" typeface="Microsoft Himalaya"/>
+        <a:font script="Thaa" typeface="MV Boli"/>
+        <a:font script="Deva" typeface="Mangal"/>
+        <a:font script="Telu" typeface="Gautami"/>
+        <a:font script="Taml" typeface="Latha"/>
+        <a:font script="Syrc" typeface="Estrangelo Edessa"/>
+        <a:font script="Orya" typeface="Kalinga"/>
+        <a:font script="Mlym" typeface="Kartika"/>
+        <a:font script="Laoo" typeface="DokChampa"/>
+        <a:font script="Sinh" typeface="Iskoola Pota"/>
+        <a:font script="Mong" typeface="Mongolian Baiti"/>
+        <a:font script="Viet" typeface="Arial"/>
+        <a:font script="Uigh" typeface="Microsoft Uighur"/>
+        <a:font script="Geor" typeface="Sylfaen"/>
+      </a:minorFont>
+    </a:fontScheme>
+    <a:fmtScheme name="Office">
+      <a:fillStyleLst>
+        <a:solidFill>
+          <a:schemeClr val="phClr"/>
+        </a:solidFill>
+        <a:gradFill rotWithShape="1">
+          <a:gsLst>
+            <a:gs pos="0">
+              <a:schemeClr val="phClr">
+                <a:tint val="50000"/>
+                <a:satMod val="300000"/>
+              </a:schemeClr>
+            </a:gs>
+            <a:gs pos="35000">
+              <a:schemeClr val="phClr">
+                <a:tint val="37000"/>
+                <a:satMod val="300000"/>
+              </a:schemeClr>
+            </a:gs>
+            <a:gs pos="100000">
+              <a:schemeClr val="phClr">
+                <a:tint val="15000"/>
+                <a:satMod val="350000"/>
+              </a:schemeClr>
+            </a:gs>
+          </a:gsLst>
+          <a:lin ang="16200000" scaled="1"/>
+        </a:gradFill>
+        <a:gradFill rotWithShape="1">
+          <a:gsLst>
+            <a:gs pos="0">
+              <a:schemeClr val="phClr">
+                <a:tint val="100000"/>
+                <a:shade val="100000"/>
+                <a:satMod val="130000"/>
+              </a:schemeClr>
+            </a:gs>
+            <a:gs pos="100000">
+              <a:schemeClr val="phClr">
+                <a:tint val="50000"/>
+                <a:shade val="100000"/>
+                <a:satMod val="350000"/>
+              </a:schemeClr>
+            </a:gs>
+          </a:gsLst>
+          <a:lin ang="16200000" scaled="0"/>
+        </a:gradFill>
+      </a:fillStyleLst>
+      <a:lnStyleLst>
+        <a:ln w="9525" cap="flat" cmpd="sng" algn="ctr">
+          <a:solidFill>
+            <a:schemeClr val="phClr">
+              <a:shade val="95000"/>
+              <a:satMod val="105000"/>
+            </a:schemeClr>
+          </a:solidFill>
+          <a:prstDash val="solid"/>
+        </a:ln>
+        <a:ln w="25400" cap="flat" cmpd="sng" algn="ctr">
+          <a:solidFill>
+            <a:schemeClr val="phClr"/>
+          </a:solidFill>
+          <a:prstDash val="solid"/>
+        </a:ln>
+        <a:ln w="38100" cap="flat" cmpd="sng" algn="ctr">
+          <a:solidFill>
+            <a:schemeClr val="phClr"/>
+          </a:solidFill>
+          <a:prstDash val="solid"/>
+        </a:ln>
+      </a:lnStyleLst>
+      <a:effectStyleLst>
+        <a:effectStyle>
+          <a:effectLst>
+            <a:outerShdw blurRad="40000" dist="20000" dir="5400000" rotWithShape="0">
+              <a:srgbClr val="000000">
+                <a:alpha val="38000"/>
+              </a:srgbClr>
+            </a:outerShdw>
+          </a:effectLst>
+        </a:effectStyle>
+        <a:effectStyle>
+          <a:effectLst>
+            <a:outerShdw blurRad="40000" dist="23000" dir="5400000" rotWithShape="0">
+              <a:srgbClr val="000000">
+                <a:alpha val="35000"/>
+              </a:srgbClr>
+            </a:outerShdw>
+          </a:effectLst>
+        </a:effectStyle>
+        <a:effectStyle>
+          <a:effectLst>
+            <a:outerShdw blurRad="40000" dist="23000" dir="5400000" rotWithShape="0">
+              <a:srgbClr val="000000">
+                <a:alpha val="35000"/>
+              </a:srgbClr>
+            </a:outerShdw>
+          </a:effectLst>
+          <a:scene3d>
+            <a:camera prst="orthographicFront">
+              <a:rot lat="0" lon="0" rev="0"/>
+            </a:camera>
+            <a:lightRig rig="threePt" dir="t">
+              <a:rot lat="0" lon="0" rev="1200000"/>
+            </a:lightRig>
+          </a:scene3d>
+          <a:sp3d>
+            <a:bevelT w="63500" h="25400"/>
+          </a:sp3d>
+        </a:effectStyle>
+      </a:effectStyleLst>
+      <a:bgFillStyleLst>
+        <a:solidFill>
+          <a:schemeClr val="phClr"/>
+        </a:solidFill>
+        <a:gradFill rotWithShape="1">
+          <a:gsLst>
+            <a:gs pos="0">
+              <a:schemeClr val="phClr">
+                <a:tint val="40000"/>
+                <a:satMod val="350000"/>
+              </a:schemeClr>
+            </a:gs>
+            <a:gs pos="40000">
+              <a:schemeClr val="phClr">
+                <a:tint val="45000"/>
+                <a:shade val="99000"/>
+                <a:satMod val="350000"/>
+              </a:schemeClr>
+            </a:gs>
+            <a:gs pos="100000">
+              <a:schemeClr val="phClr">
+                <a:shade val="20000"/>
+                <a:satMod val="255000"/>
+              </a:schemeClr>
+            </a:gs>
+          </a:gsLst>
+          <a:path path="circle">
+            <a:fillToRect l="50000" t="-80000" r="50000" b="180000"/>
+          </a:path>
+        </a:gradFill>
+        <a:gradFill rotWithShape="1">
+          <a:gsLst>
+            <a:gs pos="0">
+              <a:schemeClr val="phClr">
+                <a:tint val="80000"/>
+                <a:satMod val="300000"/>
+              </a:schemeClr>
+            </a:gs>
+            <a:gs pos="100000">
+              <a:schemeClr val="phClr">
+                <a:shade val="30000"/>
+                <a:satMod val="200000"/>
+              </a:schemeClr>
+            </a:gs>
+          </a:gsLst>
+          <a:path path="circle">
+            <a:fillToRect l="50000" t="50000" r="50000" b="50000"/>
+          </a:path>
+        </a:gradFill>
+      </a:bgFillStyleLst>
+    </a:fmtScheme>
+  </a:themeElements>
+</a:theme>
+</file>
+
+<file path=ppt/theme/theme2.xml><?xml version="1.0" encoding="utf-8"?>
 <a:theme xmlns:a="http://schemas.openxmlformats.org/drawingml/2006/main" xmlns:r="http://schemas.openxmlformats.org/officeDocument/2006/relationships">
   <a:themeElements>
     <a:clrScheme name="Default">
@@ -21932,283 +22242,4 @@
     </a:fmtScheme>
   </a:themeElements>
 </a:theme>
-</file>
-
-<file path=ppt/theme/theme2.xml><?xml version="1.0" encoding="utf-8"?>
-<a:theme xmlns:a="http://schemas.openxmlformats.org/drawingml/2006/main" xmlns:r="http://schemas.openxmlformats.org/officeDocument/2006/relationships" name="Office Theme">
-  <a:themeElements>
-    <a:clrScheme name="Office">
-      <a:dk1>
-        <a:srgbClr val="000000"/>
-      </a:dk1>
-      <a:lt1>
-        <a:srgbClr val="FFFFFF"/>
-      </a:lt1>
-      <a:dk2>
-        <a:srgbClr val="1F497D"/>
-      </a:dk2>
-      <a:lt2>
-        <a:srgbClr val="EEECE1"/>
-      </a:lt2>
-      <a:accent1>
-        <a:srgbClr val="4F81BD"/>
-      </a:accent1>
-      <a:accent2>
-        <a:srgbClr val="C0504D"/>
-      </a:accent2>
-      <a:accent3>
-        <a:srgbClr val="9BBB59"/>
-      </a:accent3>
-      <a:accent4>
-        <a:srgbClr val="8064A2"/>
-      </a:accent4>
-      <a:accent5>
-        <a:srgbClr val="4BACC6"/>
-      </a:accent5>
-      <a:accent6>
-        <a:srgbClr val="F79646"/>
-      </a:accent6>
-      <a:hlink>
-        <a:srgbClr val="0000FF"/>
-      </a:hlink>
-      <a:folHlink>
-        <a:srgbClr val="800080"/>
-      </a:folHlink>
-    </a:clrScheme>
-    <a:fontScheme name="Office">
-      <a:majorFont>
-        <a:latin typeface="Arial"/>
-        <a:ea typeface=""/>
-        <a:cs typeface=""/>
-        <a:font script="Jpan" typeface="ＭＳ Ｐゴシック"/>
-        <a:font script="Hang" typeface="맑은 고딕"/>
-        <a:font script="Hans" typeface="宋体"/>
-        <a:font script="Hant" typeface="新細明體"/>
-        <a:font script="Arab" typeface="Times New Roman"/>
-        <a:font script="Hebr" typeface="Times New Roman"/>
-        <a:font script="Thai" typeface="Angsana New"/>
-        <a:font script="Ethi" typeface="Nyala"/>
-        <a:font script="Beng" typeface="Vrinda"/>
-        <a:font script="Gujr" typeface="Shruti"/>
-        <a:font script="Khmr" typeface="MoolBoran"/>
-        <a:font script="Knda" typeface="Tunga"/>
-        <a:font script="Guru" typeface="Raavi"/>
-        <a:font script="Cans" typeface="Euphemia"/>
-        <a:font script="Cher" typeface="Plantagenet Cherokee"/>
-        <a:font script="Yiii" typeface="Microsoft Yi Baiti"/>
-        <a:font script="Tibt" typeface="Microsoft Himalaya"/>
-        <a:font script="Thaa" typeface="MV Boli"/>
-        <a:font script="Deva" typeface="Mangal"/>
-        <a:font script="Telu" typeface="Gautami"/>
-        <a:font script="Taml" typeface="Latha"/>
-        <a:font script="Syrc" typeface="Estrangelo Edessa"/>
-        <a:font script="Orya" typeface="Kalinga"/>
-        <a:font script="Mlym" typeface="Kartika"/>
-        <a:font script="Laoo" typeface="DokChampa"/>
-        <a:font script="Sinh" typeface="Iskoola Pota"/>
-        <a:font script="Mong" typeface="Mongolian Baiti"/>
-        <a:font script="Viet" typeface="Times New Roman"/>
-        <a:font script="Uigh" typeface="Microsoft Uighur"/>
-        <a:font script="Geor" typeface="Sylfaen"/>
-      </a:majorFont>
-      <a:minorFont>
-        <a:latin typeface="Arial"/>
-        <a:ea typeface=""/>
-        <a:cs typeface=""/>
-        <a:font script="Jpan" typeface="ＭＳ Ｐゴシック"/>
-        <a:font script="Hang" typeface="맑은 고딕"/>
-        <a:font script="Hans" typeface="宋体"/>
-        <a:font script="Hant" typeface="新細明體"/>
-        <a:font script="Arab" typeface="Arial"/>
-        <a:font script="Hebr" typeface="Arial"/>
-        <a:font script="Thai" typeface="Cordia New"/>
-        <a:font script="Ethi" typeface="Nyala"/>
-        <a:font script="Beng" typeface="Vrinda"/>
-        <a:font script="Gujr" typeface="Shruti"/>
-        <a:font script="Khmr" typeface="DaunPenh"/>
-        <a:font script="Knda" typeface="Tunga"/>
-        <a:font script="Guru" typeface="Raavi"/>
-        <a:font script="Cans" typeface="Euphemia"/>
-        <a:font script="Cher" typeface="Plantagenet Cherokee"/>
-        <a:font script="Yiii" typeface="Microsoft Yi Baiti"/>
-        <a:font script="Tibt" typeface="Microsoft Himalaya"/>
-        <a:font script="Thaa" typeface="MV Boli"/>
-        <a:font script="Deva" typeface="Mangal"/>
-        <a:font script="Telu" typeface="Gautami"/>
-        <a:font script="Taml" typeface="Latha"/>
-        <a:font script="Syrc" typeface="Estrangelo Edessa"/>
-        <a:font script="Orya" typeface="Kalinga"/>
-        <a:font script="Mlym" typeface="Kartika"/>
-        <a:font script="Laoo" typeface="DokChampa"/>
-        <a:font script="Sinh" typeface="Iskoola Pota"/>
-        <a:font script="Mong" typeface="Mongolian Baiti"/>
-        <a:font script="Viet" typeface="Arial"/>
-        <a:font script="Uigh" typeface="Microsoft Uighur"/>
-        <a:font script="Geor" typeface="Sylfaen"/>
-      </a:minorFont>
-    </a:fontScheme>
-    <a:fmtScheme name="Office">
-      <a:fillStyleLst>
-        <a:solidFill>
-          <a:schemeClr val="phClr"/>
-        </a:solidFill>
-        <a:gradFill rotWithShape="1">
-          <a:gsLst>
-            <a:gs pos="0">
-              <a:schemeClr val="phClr">
-                <a:tint val="50000"/>
-                <a:satMod val="300000"/>
-              </a:schemeClr>
-            </a:gs>
-            <a:gs pos="35000">
-              <a:schemeClr val="phClr">
-                <a:tint val="37000"/>
-                <a:satMod val="300000"/>
-              </a:schemeClr>
-            </a:gs>
-            <a:gs pos="100000">
-              <a:schemeClr val="phClr">
-                <a:tint val="15000"/>
-                <a:satMod val="350000"/>
-              </a:schemeClr>
-            </a:gs>
-          </a:gsLst>
-          <a:lin ang="16200000" scaled="1"/>
-        </a:gradFill>
-        <a:gradFill rotWithShape="1">
-          <a:gsLst>
-            <a:gs pos="0">
-              <a:schemeClr val="phClr">
-                <a:tint val="100000"/>
-                <a:shade val="100000"/>
-                <a:satMod val="130000"/>
-              </a:schemeClr>
-            </a:gs>
-            <a:gs pos="100000">
-              <a:schemeClr val="phClr">
-                <a:tint val="50000"/>
-                <a:shade val="100000"/>
-                <a:satMod val="350000"/>
-              </a:schemeClr>
-            </a:gs>
-          </a:gsLst>
-          <a:lin ang="16200000" scaled="0"/>
-        </a:gradFill>
-      </a:fillStyleLst>
-      <a:lnStyleLst>
-        <a:ln w="9525" cap="flat" cmpd="sng" algn="ctr">
-          <a:solidFill>
-            <a:schemeClr val="phClr">
-              <a:shade val="95000"/>
-              <a:satMod val="105000"/>
-            </a:schemeClr>
-          </a:solidFill>
-          <a:prstDash val="solid"/>
-        </a:ln>
-        <a:ln w="25400" cap="flat" cmpd="sng" algn="ctr">
-          <a:solidFill>
-            <a:schemeClr val="phClr"/>
-          </a:solidFill>
-          <a:prstDash val="solid"/>
-        </a:ln>
-        <a:ln w="38100" cap="flat" cmpd="sng" algn="ctr">
-          <a:solidFill>
-            <a:schemeClr val="phClr"/>
-          </a:solidFill>
-          <a:prstDash val="solid"/>
-        </a:ln>
-      </a:lnStyleLst>
-      <a:effectStyleLst>
-        <a:effectStyle>
-          <a:effectLst>
-            <a:outerShdw blurRad="40000" dist="20000" dir="5400000" rotWithShape="0">
-              <a:srgbClr val="000000">
-                <a:alpha val="38000"/>
-              </a:srgbClr>
-            </a:outerShdw>
-          </a:effectLst>
-        </a:effectStyle>
-        <a:effectStyle>
-          <a:effectLst>
-            <a:outerShdw blurRad="40000" dist="23000" dir="5400000" rotWithShape="0">
-              <a:srgbClr val="000000">
-                <a:alpha val="35000"/>
-              </a:srgbClr>
-            </a:outerShdw>
-          </a:effectLst>
-        </a:effectStyle>
-        <a:effectStyle>
-          <a:effectLst>
-            <a:outerShdw blurRad="40000" dist="23000" dir="5400000" rotWithShape="0">
-              <a:srgbClr val="000000">
-                <a:alpha val="35000"/>
-              </a:srgbClr>
-            </a:outerShdw>
-          </a:effectLst>
-          <a:scene3d>
-            <a:camera prst="orthographicFront">
-              <a:rot lat="0" lon="0" rev="0"/>
-            </a:camera>
-            <a:lightRig rig="threePt" dir="t">
-              <a:rot lat="0" lon="0" rev="1200000"/>
-            </a:lightRig>
-          </a:scene3d>
-          <a:sp3d>
-            <a:bevelT w="63500" h="25400"/>
-          </a:sp3d>
-        </a:effectStyle>
-      </a:effectStyleLst>
-      <a:bgFillStyleLst>
-        <a:solidFill>
-          <a:schemeClr val="phClr"/>
-        </a:solidFill>
-        <a:gradFill rotWithShape="1">
-          <a:gsLst>
-            <a:gs pos="0">
-              <a:schemeClr val="phClr">
-                <a:tint val="40000"/>
-                <a:satMod val="350000"/>
-              </a:schemeClr>
-            </a:gs>
-            <a:gs pos="40000">
-              <a:schemeClr val="phClr">
-                <a:tint val="45000"/>
-                <a:shade val="99000"/>
-                <a:satMod val="350000"/>
-              </a:schemeClr>
-            </a:gs>
-            <a:gs pos="100000">
-              <a:schemeClr val="phClr">
-                <a:shade val="20000"/>
-                <a:satMod val="255000"/>
-              </a:schemeClr>
-            </a:gs>
-          </a:gsLst>
-          <a:path path="circle">
-            <a:fillToRect l="50000" t="-80000" r="50000" b="180000"/>
-          </a:path>
-        </a:gradFill>
-        <a:gradFill rotWithShape="1">
-          <a:gsLst>
-            <a:gs pos="0">
-              <a:schemeClr val="phClr">
-                <a:tint val="80000"/>
-                <a:satMod val="300000"/>
-              </a:schemeClr>
-            </a:gs>
-            <a:gs pos="100000">
-              <a:schemeClr val="phClr">
-                <a:shade val="30000"/>
-                <a:satMod val="200000"/>
-              </a:schemeClr>
-            </a:gs>
-          </a:gsLst>
-          <a:path path="circle">
-            <a:fillToRect l="50000" t="50000" r="50000" b="50000"/>
-          </a:path>
-        </a:gradFill>
-      </a:bgFillStyleLst>
-    </a:fmtScheme>
-  </a:themeElements>
-</a:theme>
 </file>
--- a/assignment3/Team2_Presentation.pptx
+++ b/assignment3/Team2_Presentation.pptx
@@ -275,7 +275,7 @@
       </p15:sldGuideLst>
     </p:ext>
     <p:ext uri="GoogleSlidesCustomDataVersion2">
-      <go:slidesCustomData xmlns:go="http://customooxmlschemas.google.com/" r:id="rId26" roundtripDataSignature="AMtx7miD7d3XlHPavAwvvWtOqct76C5FIA=="/>
+      <go:slidesCustomData xmlns:go="http://customooxmlschemas.google.com/" r:id="rId26" roundtripDataSignature="AMtx7mivfXbB/Fl7D76lu6Q+g5yRhAkwyg=="/>
     </p:ext>
   </p:extLst>
 </p:presentation>
@@ -1108,7 +1108,7 @@
   <p:cSld>
     <p:spTree>
       <p:nvGrpSpPr>
-        <p:cNvPr id="181" name="Shape 181"/>
+        <p:cNvPr id="182" name="Shape 182"/>
         <p:cNvGrpSpPr/>
         <p:nvPr/>
       </p:nvGrpSpPr>
@@ -1122,7 +1122,7 @@
       </p:grpSpPr>
       <p:sp>
         <p:nvSpPr>
-          <p:cNvPr id="182" name="Google Shape;182;p12:notes"/>
+          <p:cNvPr id="183" name="Google Shape;183;p12:notes"/>
           <p:cNvSpPr txBox="1"/>
           <p:nvPr>
             <p:ph idx="1" type="body"/>
@@ -1161,7 +1161,7 @@
       </p:sp>
       <p:sp>
         <p:nvSpPr>
-          <p:cNvPr id="183" name="Google Shape;183;p12:notes"/>
+          <p:cNvPr id="184" name="Google Shape;184;p12:notes"/>
           <p:cNvSpPr/>
           <p:nvPr>
             <p:ph idx="2" type="sldImg"/>
@@ -1207,7 +1207,7 @@
   <p:cSld>
     <p:spTree>
       <p:nvGrpSpPr>
-        <p:cNvPr id="188" name="Shape 188"/>
+        <p:cNvPr id="189" name="Shape 189"/>
         <p:cNvGrpSpPr/>
         <p:nvPr/>
       </p:nvGrpSpPr>
@@ -1221,7 +1221,7 @@
       </p:grpSpPr>
       <p:sp>
         <p:nvSpPr>
-          <p:cNvPr id="189" name="Google Shape;189;p13:notes"/>
+          <p:cNvPr id="190" name="Google Shape;190;p13:notes"/>
           <p:cNvSpPr txBox="1"/>
           <p:nvPr>
             <p:ph idx="1" type="body"/>
@@ -1260,7 +1260,7 @@
       </p:sp>
       <p:sp>
         <p:nvSpPr>
-          <p:cNvPr id="190" name="Google Shape;190;p13:notes"/>
+          <p:cNvPr id="191" name="Google Shape;191;p13:notes"/>
           <p:cNvSpPr/>
           <p:nvPr>
             <p:ph idx="2" type="sldImg"/>
@@ -1306,7 +1306,7 @@
   <p:cSld>
     <p:spTree>
       <p:nvGrpSpPr>
-        <p:cNvPr id="196" name="Shape 196"/>
+        <p:cNvPr id="197" name="Shape 197"/>
         <p:cNvGrpSpPr/>
         <p:nvPr/>
       </p:nvGrpSpPr>
@@ -1320,7 +1320,7 @@
       </p:grpSpPr>
       <p:sp>
         <p:nvSpPr>
-          <p:cNvPr id="197" name="Google Shape;197;g3923dfd7fba_4_92:notes"/>
+          <p:cNvPr id="198" name="Google Shape;198;g3923dfd7fba_4_92:notes"/>
           <p:cNvSpPr/>
           <p:nvPr>
             <p:ph idx="2" type="sldImg"/>
@@ -1355,7 +1355,7 @@
       </p:sp>
       <p:sp>
         <p:nvSpPr>
-          <p:cNvPr id="198" name="Google Shape;198;g3923dfd7fba_4_92:notes"/>
+          <p:cNvPr id="199" name="Google Shape;199;g3923dfd7fba_4_92:notes"/>
           <p:cNvSpPr txBox="1"/>
           <p:nvPr>
             <p:ph idx="1" type="body"/>
@@ -1405,7 +1405,7 @@
   <p:cSld>
     <p:spTree>
       <p:nvGrpSpPr>
-        <p:cNvPr id="203" name="Shape 203"/>
+        <p:cNvPr id="204" name="Shape 204"/>
         <p:cNvGrpSpPr/>
         <p:nvPr/>
       </p:nvGrpSpPr>
@@ -1419,7 +1419,7 @@
       </p:grpSpPr>
       <p:sp>
         <p:nvSpPr>
-          <p:cNvPr id="204" name="Google Shape;204;g3923dfd7fba_4_98:notes"/>
+          <p:cNvPr id="205" name="Google Shape;205;g3923dfd7fba_4_98:notes"/>
           <p:cNvSpPr/>
           <p:nvPr>
             <p:ph idx="2" type="sldImg"/>
@@ -1454,7 +1454,7 @@
       </p:sp>
       <p:sp>
         <p:nvSpPr>
-          <p:cNvPr id="205" name="Google Shape;205;g3923dfd7fba_4_98:notes"/>
+          <p:cNvPr id="206" name="Google Shape;206;g3923dfd7fba_4_98:notes"/>
           <p:cNvSpPr txBox="1"/>
           <p:nvPr>
             <p:ph idx="1" type="body"/>
@@ -1504,7 +1504,7 @@
   <p:cSld>
     <p:spTree>
       <p:nvGrpSpPr>
-        <p:cNvPr id="210" name="Shape 210"/>
+        <p:cNvPr id="211" name="Shape 211"/>
         <p:cNvGrpSpPr/>
         <p:nvPr/>
       </p:nvGrpSpPr>
@@ -1518,7 +1518,7 @@
       </p:grpSpPr>
       <p:sp>
         <p:nvSpPr>
-          <p:cNvPr id="211" name="Google Shape;211;g3923dfd7fba_4_0:notes"/>
+          <p:cNvPr id="212" name="Google Shape;212;g3923dfd7fba_4_0:notes"/>
           <p:cNvSpPr/>
           <p:nvPr>
             <p:ph idx="2" type="sldImg"/>
@@ -1553,7 +1553,7 @@
       </p:sp>
       <p:sp>
         <p:nvSpPr>
-          <p:cNvPr id="212" name="Google Shape;212;g3923dfd7fba_4_0:notes"/>
+          <p:cNvPr id="213" name="Google Shape;213;g3923dfd7fba_4_0:notes"/>
           <p:cNvSpPr txBox="1"/>
           <p:nvPr>
             <p:ph idx="1" type="body"/>
@@ -1603,7 +1603,7 @@
   <p:cSld>
     <p:spTree>
       <p:nvGrpSpPr>
-        <p:cNvPr id="215" name="Shape 215"/>
+        <p:cNvPr id="217" name="Shape 217"/>
         <p:cNvGrpSpPr/>
         <p:nvPr/>
       </p:nvGrpSpPr>
@@ -1617,7 +1617,7 @@
       </p:grpSpPr>
       <p:sp>
         <p:nvSpPr>
-          <p:cNvPr id="216" name="Google Shape;216;p14:notes"/>
+          <p:cNvPr id="218" name="Google Shape;218;p14:notes"/>
           <p:cNvSpPr txBox="1"/>
           <p:nvPr>
             <p:ph idx="1" type="body"/>
@@ -1656,7 +1656,7 @@
       </p:sp>
       <p:sp>
         <p:nvSpPr>
-          <p:cNvPr id="217" name="Google Shape;217;p14:notes"/>
+          <p:cNvPr id="219" name="Google Shape;219;p14:notes"/>
           <p:cNvSpPr/>
           <p:nvPr>
             <p:ph idx="2" type="sldImg"/>
@@ -1702,7 +1702,7 @@
   <p:cSld>
     <p:spTree>
       <p:nvGrpSpPr>
-        <p:cNvPr id="226" name="Shape 226"/>
+        <p:cNvPr id="228" name="Shape 228"/>
         <p:cNvGrpSpPr/>
         <p:nvPr/>
       </p:nvGrpSpPr>
@@ -1716,7 +1716,7 @@
       </p:grpSpPr>
       <p:sp>
         <p:nvSpPr>
-          <p:cNvPr id="227" name="Google Shape;227;p16:notes"/>
+          <p:cNvPr id="229" name="Google Shape;229;p16:notes"/>
           <p:cNvSpPr txBox="1"/>
           <p:nvPr>
             <p:ph idx="1" type="body"/>
@@ -1755,7 +1755,7 @@
       </p:sp>
       <p:sp>
         <p:nvSpPr>
-          <p:cNvPr id="228" name="Google Shape;228;p16:notes"/>
+          <p:cNvPr id="230" name="Google Shape;230;p16:notes"/>
           <p:cNvSpPr/>
           <p:nvPr>
             <p:ph idx="2" type="sldImg"/>
@@ -12495,7 +12495,7 @@
             <a:tbl>
               <a:tblPr bandRow="1" firstRow="1">
                 <a:noFill/>
-                <a:tableStyleId>{53756993-92F7-49EF-9B74-DAA4B2E32409}</a:tableStyleId>
+                <a:tableStyleId>{CF4B9878-068A-49D3-B5BF-C7D720519EED}</a:tableStyleId>
               </a:tblPr>
               <a:tblGrid>
                 <a:gridCol w="2194550"/>
@@ -13343,8 +13343,8 @@
         </p:nvSpPr>
         <p:spPr>
           <a:xfrm>
-            <a:off x="640080" y="1371600"/>
-            <a:ext cx="5029200" cy="457200"/>
+            <a:off x="640075" y="2053850"/>
+            <a:ext cx="5029200" cy="400200"/>
           </a:xfrm>
           <a:prstGeom prst="rect">
             <a:avLst/>
@@ -13379,7 +13379,11 @@
                 <a:cs typeface="Arial"/>
                 <a:sym typeface="Arial"/>
               </a:rPr>
-              <a:t>Goal Failure ('Lost Robot')</a:t>
+              <a:t>Goal Failure </a:t>
+            </a:r>
+            <a:r>
+              <a:rPr b="1" lang="en-US" sz="2000"/>
+              <a:t>:</a:t>
             </a:r>
             <a:endParaRPr/>
           </a:p>
@@ -13393,8 +13397,8 @@
         </p:nvSpPr>
         <p:spPr>
           <a:xfrm>
-            <a:off x="640080" y="1920240"/>
-            <a:ext cx="5029200" cy="4114800"/>
+            <a:off x="640075" y="2334551"/>
+            <a:ext cx="5029200" cy="1679400"/>
           </a:xfrm>
           <a:prstGeom prst="rect">
             <a:avLst/>
@@ -13420,18 +13424,109 @@
               <a:buNone/>
             </a:pPr>
             <a:r>
-              <a:rPr b="0" i="0" lang="en-US" sz="1600" u="none" cap="none" strike="noStrike">
+              <a:t/>
+            </a:r>
+            <a:endParaRPr b="0" i="0" sz="1800" u="none" cap="none" strike="noStrike">
+              <a:solidFill>
+                <a:srgbClr val="333333"/>
+              </a:solidFill>
+              <a:latin typeface="Arial"/>
+              <a:ea typeface="Arial"/>
+              <a:cs typeface="Arial"/>
+              <a:sym typeface="Arial"/>
+            </a:endParaRPr>
+          </a:p>
+          <a:p>
+            <a:pPr indent="0" lvl="0" marL="0" rtl="0" algn="l">
+              <a:lnSpc>
+                <a:spcPct val="115000"/>
+              </a:lnSpc>
+              <a:spcBef>
+                <a:spcPts val="0"/>
+              </a:spcBef>
+              <a:spcAft>
+                <a:spcPts val="0"/>
+              </a:spcAft>
+              <a:buSzPts val="1100"/>
+              <a:buNone/>
+            </a:pPr>
+            <a:r>
+              <a:rPr lang="en-US" sz="1800">
                 <a:solidFill>
                   <a:srgbClr val="333333"/>
                 </a:solidFill>
-                <a:latin typeface="Arial"/>
-                <a:ea typeface="Arial"/>
-                <a:cs typeface="Arial"/>
-                <a:sym typeface="Arial"/>
               </a:rPr>
-              <a:t>• UP amcl_std (+1.176) - Inconsistent localization</a:t>
+              <a:t>path_length                   : r=-0.491 ***</a:t>
             </a:r>
-            <a:endParaRPr/>
+            <a:endParaRPr sz="1800">
+              <a:solidFill>
+                <a:srgbClr val="333333"/>
+              </a:solidFill>
+            </a:endParaRPr>
+          </a:p>
+          <a:p>
+            <a:pPr indent="0" lvl="0" marL="0" rtl="0" algn="l">
+              <a:lnSpc>
+                <a:spcPct val="115000"/>
+              </a:lnSpc>
+              <a:spcBef>
+                <a:spcPts val="0"/>
+              </a:spcBef>
+              <a:spcAft>
+                <a:spcPts val="0"/>
+              </a:spcAft>
+              <a:buClr>
+                <a:schemeClr val="dk1"/>
+              </a:buClr>
+              <a:buSzPts val="1100"/>
+              <a:buFont typeface="Arial"/>
+              <a:buNone/>
+            </a:pPr>
+            <a:r>
+              <a:rPr lang="en-US" sz="1800">
+                <a:solidFill>
+                  <a:srgbClr val="333333"/>
+                </a:solidFill>
+              </a:rPr>
+              <a:t>std_velocity                  : r=-0.437 ***</a:t>
+            </a:r>
+            <a:endParaRPr sz="1800">
+              <a:solidFill>
+                <a:srgbClr val="333333"/>
+              </a:solidFill>
+            </a:endParaRPr>
+          </a:p>
+          <a:p>
+            <a:pPr indent="0" lvl="0" marL="0" rtl="0" algn="l">
+              <a:lnSpc>
+                <a:spcPct val="115000"/>
+              </a:lnSpc>
+              <a:spcBef>
+                <a:spcPts val="0"/>
+              </a:spcBef>
+              <a:spcAft>
+                <a:spcPts val="0"/>
+              </a:spcAft>
+              <a:buClr>
+                <a:schemeClr val="dk1"/>
+              </a:buClr>
+              <a:buSzPts val="1100"/>
+              <a:buFont typeface="Arial"/>
+              <a:buNone/>
+            </a:pPr>
+            <a:r>
+              <a:rPr lang="en-US" sz="1800">
+                <a:solidFill>
+                  <a:srgbClr val="333333"/>
+                </a:solidFill>
+              </a:rPr>
+              <a:t>path_efficiency               : r=-0.384 ***</a:t>
+            </a:r>
+            <a:endParaRPr sz="1800">
+              <a:solidFill>
+                <a:srgbClr val="333333"/>
+              </a:solidFill>
+            </a:endParaRPr>
           </a:p>
           <a:p>
             <a:pPr indent="0" lvl="0" marL="0" marR="0" rtl="0" algn="l">
@@ -13444,66 +13539,13 @@
               <a:buNone/>
             </a:pPr>
             <a:r>
-              <a:rPr b="0" i="0" lang="en-US" sz="1600" u="none" cap="none" strike="noStrike">
-                <a:solidFill>
-                  <a:srgbClr val="333333"/>
-                </a:solidFill>
-                <a:latin typeface="Arial"/>
-                <a:ea typeface="Arial"/>
-                <a:cs typeface="Arial"/>
-                <a:sym typeface="Arial"/>
-              </a:rPr>
-              <a:t>• DOWN amcl_median (-0.969) - Dropping confidence</a:t>
+              <a:t/>
             </a:r>
-            <a:endParaRPr/>
-          </a:p>
-          <a:p>
-            <a:pPr indent="0" lvl="0" marL="0" marR="0" rtl="0" algn="l">
-              <a:spcBef>
-                <a:spcPts val="600"/>
-              </a:spcBef>
-              <a:spcAft>
-                <a:spcPts val="0"/>
-              </a:spcAft>
-              <a:buNone/>
-            </a:pPr>
-            <a:r>
-              <a:rPr b="0" i="0" lang="en-US" sz="1600" u="none" cap="none" strike="noStrike">
-                <a:solidFill>
-                  <a:srgbClr val="333333"/>
-                </a:solidFill>
-                <a:latin typeface="Arial"/>
-                <a:ea typeface="Arial"/>
-                <a:cs typeface="Arial"/>
-                <a:sym typeface="Arial"/>
-              </a:rPr>
-              <a:t>• DOWN std_velocity (-0.930) - Robot slowing/stopped</a:t>
-            </a:r>
-            <a:endParaRPr/>
-          </a:p>
-          <a:p>
-            <a:pPr indent="0" lvl="0" marL="0" marR="0" rtl="0" algn="l">
-              <a:spcBef>
-                <a:spcPts val="600"/>
-              </a:spcBef>
-              <a:spcAft>
-                <a:spcPts val="0"/>
-              </a:spcAft>
-              <a:buNone/>
-            </a:pPr>
-            <a:r>
-              <a:rPr b="0" i="0" lang="en-US" sz="1600" u="none" cap="none" strike="noStrike">
-                <a:solidFill>
-                  <a:srgbClr val="333333"/>
-                </a:solidFill>
-                <a:latin typeface="Arial"/>
-                <a:ea typeface="Arial"/>
-                <a:cs typeface="Arial"/>
-                <a:sym typeface="Arial"/>
-              </a:rPr>
-              <a:t>• Interpretation: AMCL unstable + velocity drops</a:t>
-            </a:r>
-            <a:endParaRPr/>
+            <a:endParaRPr sz="1800">
+              <a:solidFill>
+                <a:srgbClr val="333333"/>
+              </a:solidFill>
+            </a:endParaRPr>
           </a:p>
         </p:txBody>
       </p:sp>
@@ -13515,8 +13557,8 @@
         </p:nvSpPr>
         <p:spPr>
           <a:xfrm>
-            <a:off x="6217920" y="1371600"/>
-            <a:ext cx="5029200" cy="457200"/>
+            <a:off x="6283650" y="1934350"/>
+            <a:ext cx="5029200" cy="400200"/>
           </a:xfrm>
           <a:prstGeom prst="rect">
             <a:avLst/>
@@ -13551,7 +13593,11 @@
                 <a:cs typeface="Arial"/>
                 <a:sym typeface="Arial"/>
               </a:rPr>
-              <a:t>Stuck ('Persistent Obstacle')</a:t>
+              <a:t>Stuck </a:t>
+            </a:r>
+            <a:r>
+              <a:rPr b="1" lang="en-US" sz="2000"/>
+              <a:t>:</a:t>
             </a:r>
             <a:endParaRPr/>
           </a:p>
@@ -13565,8 +13611,8 @@
         </p:nvSpPr>
         <p:spPr>
           <a:xfrm>
-            <a:off x="6217920" y="1920240"/>
-            <a:ext cx="5029200" cy="4114800"/>
+            <a:off x="6217925" y="2530350"/>
+            <a:ext cx="5029200" cy="1265100"/>
           </a:xfrm>
           <a:prstGeom prst="rect">
             <a:avLst/>
@@ -13582,28 +13628,100 @@
           </a:bodyPr>
           <a:lstStyle/>
           <a:p>
-            <a:pPr indent="0" lvl="0" marL="0" marR="0" rtl="0" algn="l">
-              <a:spcBef>
-                <a:spcPts val="0"/>
-              </a:spcBef>
-              <a:spcAft>
-                <a:spcPts val="0"/>
-              </a:spcAft>
+            <a:pPr indent="0" lvl="0" marL="0" rtl="0" algn="l">
+              <a:lnSpc>
+                <a:spcPct val="115000"/>
+              </a:lnSpc>
+              <a:spcBef>
+                <a:spcPts val="0"/>
+              </a:spcBef>
+              <a:spcAft>
+                <a:spcPts val="0"/>
+              </a:spcAft>
+              <a:buClr>
+                <a:schemeClr val="dk1"/>
+              </a:buClr>
+              <a:buSzPts val="1100"/>
+              <a:buFont typeface="Arial"/>
               <a:buNone/>
             </a:pPr>
             <a:r>
-              <a:rPr b="0" i="0" lang="en-US" sz="1600" u="none" cap="none" strike="noStrike">
+              <a:rPr lang="en-US" sz="1600">
                 <a:solidFill>
                   <a:srgbClr val="333333"/>
                 </a:solidFill>
-                <a:latin typeface="Arial"/>
-                <a:ea typeface="Arial"/>
-                <a:cs typeface="Arial"/>
-                <a:sym typeface="Arial"/>
               </a:rPr>
-              <a:t>• UP max_pos_error (+1.355) - Far from target</a:t>
+              <a:t>duration                      : r=+0.524 ***</a:t>
             </a:r>
-            <a:endParaRPr/>
+            <a:endParaRPr sz="1600">
+              <a:solidFill>
+                <a:srgbClr val="333333"/>
+              </a:solidFill>
+            </a:endParaRPr>
+          </a:p>
+          <a:p>
+            <a:pPr indent="0" lvl="0" marL="0" rtl="0" algn="l">
+              <a:lnSpc>
+                <a:spcPct val="115000"/>
+              </a:lnSpc>
+              <a:spcBef>
+                <a:spcPts val="0"/>
+              </a:spcBef>
+              <a:spcAft>
+                <a:spcPts val="0"/>
+              </a:spcAft>
+              <a:buClr>
+                <a:schemeClr val="dk1"/>
+              </a:buClr>
+              <a:buSzPts val="1100"/>
+              <a:buFont typeface="Arial"/>
+              <a:buNone/>
+            </a:pPr>
+            <a:r>
+              <a:rPr lang="en-US" sz="1600">
+                <a:solidFill>
+                  <a:srgbClr val="333333"/>
+                </a:solidFill>
+              </a:rPr>
+              <a:t>mean_angular_vel              : r=-0.283 ***</a:t>
+            </a:r>
+            <a:endParaRPr sz="1600">
+              <a:solidFill>
+                <a:srgbClr val="333333"/>
+              </a:solidFill>
+            </a:endParaRPr>
+          </a:p>
+          <a:p>
+            <a:pPr indent="0" lvl="0" marL="0" rtl="0" algn="l">
+              <a:lnSpc>
+                <a:spcPct val="115000"/>
+              </a:lnSpc>
+              <a:spcBef>
+                <a:spcPts val="0"/>
+              </a:spcBef>
+              <a:spcAft>
+                <a:spcPts val="0"/>
+              </a:spcAft>
+              <a:buClr>
+                <a:schemeClr val="dk1"/>
+              </a:buClr>
+              <a:buSzPts val="1100"/>
+              <a:buFont typeface="Arial"/>
+              <a:buNone/>
+            </a:pPr>
+            <a:r>
+              <a:rPr lang="en-US" sz="1600">
+                <a:solidFill>
+                  <a:srgbClr val="333333"/>
+                </a:solidFill>
+              </a:rPr>
+              <a:t>path_length                   : r=+0.276 ***</a:t>
+            </a:r>
+            <a:endParaRPr sz="1600">
+              <a:solidFill>
+                <a:srgbClr val="333333"/>
+              </a:solidFill>
+            </a:endParaRPr>
           </a:p>
           <a:p>
             <a:pPr indent="0" lvl="0" marL="0" marR="0" rtl="0" algn="l">
@@ -13616,66 +13734,13 @@
               <a:buNone/>
             </a:pPr>
             <a:r>
-              <a:rPr b="0" i="0" lang="en-US" sz="1600" u="none" cap="none" strike="noStrike">
-                <a:solidFill>
-                  <a:srgbClr val="333333"/>
-                </a:solidFill>
-                <a:latin typeface="Arial"/>
-                <a:ea typeface="Arial"/>
-                <a:cs typeface="Arial"/>
-                <a:sym typeface="Arial"/>
-              </a:rPr>
-              <a:t>• UP duration (+1.294) - No progress over time</a:t>
+              <a:t/>
             </a:r>
-            <a:endParaRPr/>
-          </a:p>
-          <a:p>
-            <a:pPr indent="0" lvl="0" marL="0" marR="0" rtl="0" algn="l">
-              <a:spcBef>
-                <a:spcPts val="600"/>
-              </a:spcBef>
-              <a:spcAft>
-                <a:spcPts val="0"/>
-              </a:spcAft>
-              <a:buNone/>
-            </a:pPr>
-            <a:r>
-              <a:rPr b="0" i="0" lang="en-US" sz="1600" u="none" cap="none" strike="noStrike">
-                <a:solidFill>
-                  <a:srgbClr val="333333"/>
-                </a:solidFill>
-                <a:latin typeface="Arial"/>
-                <a:ea typeface="Arial"/>
-                <a:cs typeface="Arial"/>
-                <a:sym typeface="Arial"/>
-              </a:rPr>
-              <a:t>• DOWN std_pos_error (-1.279) - Constant high error</a:t>
-            </a:r>
-            <a:endParaRPr/>
-          </a:p>
-          <a:p>
-            <a:pPr indent="0" lvl="0" marL="0" marR="0" rtl="0" algn="l">
-              <a:spcBef>
-                <a:spcPts val="600"/>
-              </a:spcBef>
-              <a:spcAft>
-                <a:spcPts val="0"/>
-              </a:spcAft>
-              <a:buNone/>
-            </a:pPr>
-            <a:r>
-              <a:rPr b="0" i="0" lang="en-US" sz="1600" u="none" cap="none" strike="noStrike">
-                <a:solidFill>
-                  <a:srgbClr val="333333"/>
-                </a:solidFill>
-                <a:latin typeface="Arial"/>
-                <a:ea typeface="Arial"/>
-                <a:cs typeface="Arial"/>
-                <a:sym typeface="Arial"/>
-              </a:rPr>
-              <a:t>• Interpretation: Immobile behind obstacle</a:t>
-            </a:r>
-            <a:endParaRPr/>
+            <a:endParaRPr sz="1600">
+              <a:solidFill>
+                <a:srgbClr val="333333"/>
+              </a:solidFill>
+            </a:endParaRPr>
           </a:p>
         </p:txBody>
       </p:sp>
@@ -13713,7 +13778,7 @@
         <p:spPr>
           <a:xfrm>
             <a:off x="1169825" y="1670375"/>
-            <a:ext cx="5088900" cy="3509400"/>
+            <a:ext cx="5088900" cy="677100"/>
           </a:xfrm>
           <a:prstGeom prst="rect">
             <a:avLst/>
@@ -13728,166 +13793,6 @@
             <a:spAutoFit/>
           </a:bodyPr>
           <a:lstStyle/>
-          <a:p>
-            <a:pPr indent="0" lvl="0" marL="0" rtl="0" algn="l">
-              <a:lnSpc>
-                <a:spcPct val="115000"/>
-              </a:lnSpc>
-              <a:spcBef>
-                <a:spcPts val="0"/>
-              </a:spcBef>
-              <a:spcAft>
-                <a:spcPts val="0"/>
-              </a:spcAft>
-              <a:buClr>
-                <a:schemeClr val="dk1"/>
-              </a:buClr>
-              <a:buSzPts val="1100"/>
-              <a:buFont typeface="Arial"/>
-              <a:buNone/>
-            </a:pPr>
-            <a:r>
-              <a:rPr lang="en-US" sz="3200">
-                <a:solidFill>
-                  <a:schemeClr val="dk1"/>
-                </a:solidFill>
-                <a:latin typeface="Calibri"/>
-                <a:ea typeface="Calibri"/>
-                <a:cs typeface="Calibri"/>
-                <a:sym typeface="Calibri"/>
-              </a:rPr>
-              <a:t>position_error_spike:</a:t>
-            </a:r>
-            <a:endParaRPr sz="3200">
-              <a:solidFill>
-                <a:schemeClr val="dk1"/>
-              </a:solidFill>
-              <a:latin typeface="Calibri"/>
-              <a:ea typeface="Calibri"/>
-              <a:cs typeface="Calibri"/>
-              <a:sym typeface="Calibri"/>
-            </a:endParaRPr>
-          </a:p>
-          <a:p>
-            <a:pPr indent="0" lvl="0" marL="0" rtl="0" algn="l">
-              <a:lnSpc>
-                <a:spcPct val="115000"/>
-              </a:lnSpc>
-              <a:spcBef>
-                <a:spcPts val="0"/>
-              </a:spcBef>
-              <a:spcAft>
-                <a:spcPts val="0"/>
-              </a:spcAft>
-              <a:buClr>
-                <a:schemeClr val="dk1"/>
-              </a:buClr>
-              <a:buSzPts val="1100"/>
-              <a:buFont typeface="Arial"/>
-              <a:buNone/>
-            </a:pPr>
-            <a:r>
-              <a:rPr lang="en-US" sz="3200">
-                <a:solidFill>
-                  <a:schemeClr val="dk1"/>
-                </a:solidFill>
-                <a:latin typeface="Calibri"/>
-                <a:ea typeface="Calibri"/>
-                <a:cs typeface="Calibri"/>
-                <a:sym typeface="Calibri"/>
-              </a:rPr>
-              <a:t>  ↑ mean_lin_acc: coef=+2.195</a:t>
-            </a:r>
-            <a:endParaRPr sz="3200">
-              <a:solidFill>
-                <a:schemeClr val="dk1"/>
-              </a:solidFill>
-              <a:latin typeface="Calibri"/>
-              <a:ea typeface="Calibri"/>
-              <a:cs typeface="Calibri"/>
-              <a:sym typeface="Calibri"/>
-            </a:endParaRPr>
-          </a:p>
-          <a:p>
-            <a:pPr indent="0" lvl="0" marL="0" rtl="0" algn="l">
-              <a:lnSpc>
-                <a:spcPct val="115000"/>
-              </a:lnSpc>
-              <a:spcBef>
-                <a:spcPts val="0"/>
-              </a:spcBef>
-              <a:spcAft>
-                <a:spcPts val="0"/>
-              </a:spcAft>
-              <a:buClr>
-                <a:schemeClr val="dk1"/>
-              </a:buClr>
-              <a:buSzPts val="1100"/>
-              <a:buFont typeface="Arial"/>
-              <a:buNone/>
-            </a:pPr>
-            <a:r>
-              <a:rPr lang="en-US" sz="3200">
-                <a:solidFill>
-                  <a:schemeClr val="dk1"/>
-                </a:solidFill>
-                <a:latin typeface="Calibri"/>
-                <a:ea typeface="Calibri"/>
-                <a:cs typeface="Calibri"/>
-                <a:sym typeface="Calibri"/>
-              </a:rPr>
-              <a:t>  ↑ std_velocity: coef=+1.844</a:t>
-            </a:r>
-            <a:endParaRPr sz="3200">
-              <a:solidFill>
-                <a:schemeClr val="dk1"/>
-              </a:solidFill>
-              <a:latin typeface="Calibri"/>
-              <a:ea typeface="Calibri"/>
-              <a:cs typeface="Calibri"/>
-              <a:sym typeface="Calibri"/>
-            </a:endParaRPr>
-          </a:p>
-          <a:p>
-            <a:pPr indent="0" lvl="0" marL="0" rtl="0" algn="l">
-              <a:lnSpc>
-                <a:spcPct val="115000"/>
-              </a:lnSpc>
-              <a:spcBef>
-                <a:spcPts val="0"/>
-              </a:spcBef>
-              <a:spcAft>
-                <a:spcPts val="0"/>
-              </a:spcAft>
-              <a:buClr>
-                <a:schemeClr val="dk1"/>
-              </a:buClr>
-              <a:buSzPts val="1100"/>
-              <a:buFont typeface="Arial"/>
-              <a:buNone/>
-            </a:pPr>
-            <a:r>
-              <a:rPr lang="en-US" sz="3200">
-                <a:solidFill>
-                  <a:schemeClr val="dk1"/>
-                </a:solidFill>
-                <a:latin typeface="Calibri"/>
-                <a:ea typeface="Calibri"/>
-                <a:cs typeface="Calibri"/>
-                <a:sym typeface="Calibri"/>
-              </a:rPr>
-              <a:t>  ↑ stuck_ratio: coef=+1.716</a:t>
-            </a:r>
-            <a:endParaRPr sz="3200">
-              <a:solidFill>
-                <a:schemeClr val="dk1"/>
-              </a:solidFill>
-              <a:latin typeface="Calibri"/>
-              <a:ea typeface="Calibri"/>
-              <a:cs typeface="Calibri"/>
-              <a:sym typeface="Calibri"/>
-            </a:endParaRPr>
-          </a:p>
           <a:p>
             <a:pPr indent="0" lvl="0" marL="0" rtl="0" algn="l">
               <a:spcBef>
@@ -13921,8 +13826,8 @@
         </p:nvSpPr>
         <p:spPr>
           <a:xfrm>
-            <a:off x="6525575" y="1571950"/>
-            <a:ext cx="5262000" cy="3509400"/>
+            <a:off x="772250" y="2366050"/>
+            <a:ext cx="5486400" cy="1736100"/>
           </a:xfrm>
           <a:prstGeom prst="rect">
             <a:avLst/>
@@ -13956,7 +13861,7 @@
               <a:buNone/>
             </a:pPr>
             <a:r>
-              <a:rPr lang="en-US" sz="3200">
+              <a:rPr lang="en-US" sz="1800">
                 <a:solidFill>
                   <a:schemeClr val="dk1"/>
                 </a:solidFill>
@@ -13967,7 +13872,7 @@
               </a:rPr>
               <a:t>high_amcl_uncertainty:</a:t>
             </a:r>
-            <a:endParaRPr sz="3200">
+            <a:endParaRPr sz="1800">
               <a:solidFill>
                 <a:schemeClr val="dk1"/>
               </a:solidFill>
@@ -13996,7 +13901,7 @@
               <a:buNone/>
             </a:pPr>
             <a:r>
-              <a:rPr lang="en-US" sz="3200">
+              <a:rPr lang="en-US" sz="1800">
                 <a:solidFill>
                   <a:schemeClr val="dk1"/>
                 </a:solidFill>
@@ -14005,9 +13910,9 @@
                 <a:cs typeface="Calibri"/>
                 <a:sym typeface="Calibri"/>
               </a:rPr>
-              <a:t>  ↑ pos_error_trend: coef=+1.653</a:t>
+              <a:t>  rmse_pos                      : r=+0.291 ***</a:t>
             </a:r>
-            <a:endParaRPr sz="3200">
+            <a:endParaRPr sz="1800">
               <a:solidFill>
                 <a:schemeClr val="dk1"/>
               </a:solidFill>
@@ -14036,7 +13941,7 @@
               <a:buNone/>
             </a:pPr>
             <a:r>
-              <a:rPr lang="en-US" sz="3200">
+              <a:rPr lang="en-US" sz="1800">
                 <a:solidFill>
                   <a:schemeClr val="dk1"/>
                 </a:solidFill>
@@ -14045,9 +13950,9 @@
                 <a:cs typeface="Calibri"/>
                 <a:sym typeface="Calibri"/>
               </a:rPr>
-              <a:t>  ↑ mean_lin_acc: coef=+1.484</a:t>
+              <a:t>  max_velocity                  : r=+0.277 ***</a:t>
             </a:r>
-            <a:endParaRPr sz="3200">
+            <a:endParaRPr sz="1800">
               <a:solidFill>
                 <a:schemeClr val="dk1"/>
               </a:solidFill>
@@ -14076,7 +13981,7 @@
               <a:buNone/>
             </a:pPr>
             <a:r>
-              <a:rPr lang="en-US" sz="3200">
+              <a:rPr lang="en-US" sz="1800">
                 <a:solidFill>
                   <a:schemeClr val="dk1"/>
                 </a:solidFill>
@@ -14085,9 +13990,9 @@
                 <a:cs typeface="Calibri"/>
                 <a:sym typeface="Calibri"/>
               </a:rPr>
-              <a:t>  ↓ amcl_mean: coef=-1.210</a:t>
+              <a:t>  std_pos_error                 : r=+0.274 ***</a:t>
             </a:r>
-            <a:endParaRPr sz="3200">
+            <a:endParaRPr sz="1800">
               <a:solidFill>
                 <a:schemeClr val="dk1"/>
               </a:solidFill>
@@ -14110,7 +14015,65 @@
             <a:r>
               <a:t/>
             </a:r>
-            <a:endParaRPr sz="3200">
+            <a:endParaRPr sz="1800">
+              <a:solidFill>
+                <a:schemeClr val="dk1"/>
+              </a:solidFill>
+              <a:latin typeface="Calibri"/>
+              <a:ea typeface="Calibri"/>
+              <a:cs typeface="Calibri"/>
+              <a:sym typeface="Calibri"/>
+            </a:endParaRPr>
+          </a:p>
+        </p:txBody>
+      </p:sp>
+      <p:sp>
+        <p:nvSpPr>
+          <p:cNvPr id="181" name="Google Shape;181;g3923dfd7fba_0_4"/>
+          <p:cNvSpPr/>
+          <p:nvPr/>
+        </p:nvSpPr>
+        <p:spPr>
+          <a:xfrm>
+            <a:off x="457200" y="1188720"/>
+            <a:ext cx="11277300" cy="18300"/>
+          </a:xfrm>
+          <a:prstGeom prst="rect">
+            <a:avLst/>
+          </a:prstGeom>
+          <a:solidFill>
+            <a:srgbClr val="C8C8C8"/>
+          </a:solidFill>
+          <a:ln>
+            <a:noFill/>
+          </a:ln>
+          <a:effectLst>
+            <a:outerShdw blurRad="40000" rotWithShape="0" dir="5400000" dist="23000">
+              <a:srgbClr val="000000">
+                <a:alpha val="34900"/>
+              </a:srgbClr>
+            </a:outerShdw>
+          </a:effectLst>
+        </p:spPr>
+        <p:txBody>
+          <a:bodyPr anchorCtr="0" anchor="ctr" bIns="45700" lIns="91425" spcFirstLastPara="1" rIns="91425" wrap="square" tIns="45700">
+            <a:noAutofit/>
+          </a:bodyPr>
+          <a:lstStyle/>
+          <a:p>
+            <a:pPr indent="0" lvl="0" marL="0" marR="0" rtl="0" algn="ctr">
+              <a:spcBef>
+                <a:spcPts val="0"/>
+              </a:spcBef>
+              <a:spcAft>
+                <a:spcPts val="0"/>
+              </a:spcAft>
+              <a:buNone/>
+            </a:pPr>
+            <a:r>
+              <a:t/>
+            </a:r>
+            <a:endParaRPr b="0" i="0" sz="1800" u="none" cap="none" strike="noStrike">
               <a:solidFill>
                 <a:schemeClr val="dk1"/>
               </a:solidFill>
@@ -14135,7 +14098,7 @@
   <p:cSld>
     <p:spTree>
       <p:nvGrpSpPr>
-        <p:cNvPr id="184" name="Shape 184"/>
+        <p:cNvPr id="185" name="Shape 185"/>
         <p:cNvGrpSpPr/>
         <p:nvPr/>
       </p:nvGrpSpPr>
@@ -14149,7 +14112,7 @@
       </p:grpSpPr>
       <p:sp>
         <p:nvSpPr>
-          <p:cNvPr id="185" name="Google Shape;185;p12"/>
+          <p:cNvPr id="186" name="Google Shape;186;p12"/>
           <p:cNvSpPr txBox="1"/>
           <p:nvPr/>
         </p:nvSpPr>
@@ -14203,7 +14166,7 @@
       </p:sp>
       <p:sp>
         <p:nvSpPr>
-          <p:cNvPr id="186" name="Google Shape;186;p12"/>
+          <p:cNvPr id="187" name="Google Shape;187;p12"/>
           <p:cNvSpPr/>
           <p:nvPr/>
         </p:nvSpPr>
@@ -14261,7 +14224,7 @@
       </p:sp>
       <p:sp>
         <p:nvSpPr>
-          <p:cNvPr id="187" name="Google Shape;187;p12"/>
+          <p:cNvPr id="188" name="Google Shape;188;p12"/>
           <p:cNvSpPr txBox="1"/>
           <p:nvPr/>
         </p:nvSpPr>
@@ -14648,7 +14611,7 @@
   <p:cSld>
     <p:spTree>
       <p:nvGrpSpPr>
-        <p:cNvPr id="191" name="Shape 191"/>
+        <p:cNvPr id="192" name="Shape 192"/>
         <p:cNvGrpSpPr/>
         <p:nvPr/>
       </p:nvGrpSpPr>
@@ -14662,7 +14625,7 @@
       </p:grpSpPr>
       <p:sp>
         <p:nvSpPr>
-          <p:cNvPr id="192" name="Google Shape;192;p13"/>
+          <p:cNvPr id="193" name="Google Shape;193;p13"/>
           <p:cNvSpPr txBox="1"/>
           <p:nvPr/>
         </p:nvSpPr>
@@ -14708,7 +14671,7 @@
       </p:sp>
       <p:sp>
         <p:nvSpPr>
-          <p:cNvPr id="193" name="Google Shape;193;p13"/>
+          <p:cNvPr id="194" name="Google Shape;194;p13"/>
           <p:cNvSpPr txBox="1"/>
           <p:nvPr/>
         </p:nvSpPr>
@@ -14758,7 +14721,7 @@
       </p:sp>
       <p:sp>
         <p:nvSpPr>
-          <p:cNvPr id="194" name="Google Shape;194;p13"/>
+          <p:cNvPr id="195" name="Google Shape;195;p13"/>
           <p:cNvSpPr/>
           <p:nvPr/>
         </p:nvSpPr>
@@ -14816,7 +14779,7 @@
       </p:sp>
       <p:sp>
         <p:nvSpPr>
-          <p:cNvPr id="195" name="Google Shape;195;p13"/>
+          <p:cNvPr id="196" name="Google Shape;196;p13"/>
           <p:cNvSpPr txBox="1"/>
           <p:nvPr/>
         </p:nvSpPr>
@@ -15242,7 +15205,7 @@
   <p:cSld>
     <p:spTree>
       <p:nvGrpSpPr>
-        <p:cNvPr id="199" name="Shape 199"/>
+        <p:cNvPr id="200" name="Shape 200"/>
         <p:cNvGrpSpPr/>
         <p:nvPr/>
       </p:nvGrpSpPr>
@@ -15256,7 +15219,7 @@
       </p:grpSpPr>
       <p:sp>
         <p:nvSpPr>
-          <p:cNvPr id="200" name="Google Shape;200;g3923dfd7fba_4_92"/>
+          <p:cNvPr id="201" name="Google Shape;201;g3923dfd7fba_4_92"/>
           <p:cNvSpPr txBox="1"/>
           <p:nvPr/>
         </p:nvSpPr>
@@ -15570,7 +15533,7 @@
       </p:sp>
       <p:sp>
         <p:nvSpPr>
-          <p:cNvPr id="201" name="Google Shape;201;g3923dfd7fba_4_92"/>
+          <p:cNvPr id="202" name="Google Shape;202;g3923dfd7fba_4_92"/>
           <p:cNvSpPr txBox="1"/>
           <p:nvPr/>
         </p:nvSpPr>
@@ -15616,7 +15579,7 @@
       </p:sp>
       <p:sp>
         <p:nvSpPr>
-          <p:cNvPr id="202" name="Google Shape;202;g3923dfd7fba_4_92"/>
+          <p:cNvPr id="203" name="Google Shape;203;g3923dfd7fba_4_92"/>
           <p:cNvSpPr/>
           <p:nvPr/>
         </p:nvSpPr>
@@ -15685,7 +15648,7 @@
   <p:cSld>
     <p:spTree>
       <p:nvGrpSpPr>
-        <p:cNvPr id="206" name="Shape 206"/>
+        <p:cNvPr id="207" name="Shape 207"/>
         <p:cNvGrpSpPr/>
         <p:nvPr/>
       </p:nvGrpSpPr>
@@ -15699,7 +15662,7 @@
       </p:grpSpPr>
       <p:sp>
         <p:nvSpPr>
-          <p:cNvPr id="207" name="Google Shape;207;g3923dfd7fba_4_98"/>
+          <p:cNvPr id="208" name="Google Shape;208;g3923dfd7fba_4_98"/>
           <p:cNvSpPr txBox="1"/>
           <p:nvPr/>
         </p:nvSpPr>
@@ -15963,7 +15926,7 @@
       </p:sp>
       <p:sp>
         <p:nvSpPr>
-          <p:cNvPr id="208" name="Google Shape;208;g3923dfd7fba_4_98"/>
+          <p:cNvPr id="209" name="Google Shape;209;g3923dfd7fba_4_98"/>
           <p:cNvSpPr txBox="1"/>
           <p:nvPr/>
         </p:nvSpPr>
@@ -16009,7 +15972,7 @@
       </p:sp>
       <p:sp>
         <p:nvSpPr>
-          <p:cNvPr id="209" name="Google Shape;209;g3923dfd7fba_4_98"/>
+          <p:cNvPr id="210" name="Google Shape;210;g3923dfd7fba_4_98"/>
           <p:cNvSpPr/>
           <p:nvPr/>
         </p:nvSpPr>
@@ -16078,7 +16041,7 @@
   <p:cSld>
     <p:spTree>
       <p:nvGrpSpPr>
-        <p:cNvPr id="213" name="Shape 213"/>
+        <p:cNvPr id="214" name="Shape 214"/>
         <p:cNvGrpSpPr/>
         <p:nvPr/>
       </p:nvGrpSpPr>
@@ -16092,7 +16055,7 @@
       </p:grpSpPr>
       <p:pic>
         <p:nvPicPr>
-          <p:cNvPr id="214" name="Google Shape;214;g3923dfd7fba_4_0" title="model_comparison_f1.png"/>
+          <p:cNvPr id="215" name="Google Shape;215;g3923dfd7fba_4_0" title="model_comparison_f1.png"/>
           <p:cNvPicPr preferRelativeResize="0"/>
           <p:nvPr/>
         </p:nvPicPr>
@@ -16118,6 +16081,64 @@
           </a:ln>
         </p:spPr>
       </p:pic>
+      <p:sp>
+        <p:nvSpPr>
+          <p:cNvPr id="216" name="Google Shape;216;g3923dfd7fba_4_0"/>
+          <p:cNvSpPr/>
+          <p:nvPr/>
+        </p:nvSpPr>
+        <p:spPr>
+          <a:xfrm>
+            <a:off x="457188" y="1073720"/>
+            <a:ext cx="11277300" cy="18300"/>
+          </a:xfrm>
+          <a:prstGeom prst="rect">
+            <a:avLst/>
+          </a:prstGeom>
+          <a:solidFill>
+            <a:srgbClr val="C8C8C8"/>
+          </a:solidFill>
+          <a:ln>
+            <a:noFill/>
+          </a:ln>
+          <a:effectLst>
+            <a:outerShdw blurRad="40000" rotWithShape="0" dir="5400000" dist="23000">
+              <a:srgbClr val="000000">
+                <a:alpha val="34900"/>
+              </a:srgbClr>
+            </a:outerShdw>
+          </a:effectLst>
+        </p:spPr>
+        <p:txBody>
+          <a:bodyPr anchorCtr="0" anchor="ctr" bIns="45700" lIns="91425" spcFirstLastPara="1" rIns="91425" wrap="square" tIns="45700">
+            <a:noAutofit/>
+          </a:bodyPr>
+          <a:lstStyle/>
+          <a:p>
+            <a:pPr indent="0" lvl="0" marL="0" marR="0" rtl="0" algn="ctr">
+              <a:spcBef>
+                <a:spcPts val="0"/>
+              </a:spcBef>
+              <a:spcAft>
+                <a:spcPts val="0"/>
+              </a:spcAft>
+              <a:buNone/>
+            </a:pPr>
+            <a:r>
+              <a:t/>
+            </a:r>
+            <a:endParaRPr b="0" i="0" sz="1800" u="none" cap="none" strike="noStrike">
+              <a:solidFill>
+                <a:schemeClr val="dk1"/>
+              </a:solidFill>
+              <a:latin typeface="Calibri"/>
+              <a:ea typeface="Calibri"/>
+              <a:cs typeface="Calibri"/>
+              <a:sym typeface="Calibri"/>
+            </a:endParaRPr>
+          </a:p>
+        </p:txBody>
+      </p:sp>
     </p:spTree>
   </p:cSld>
   <p:clrMapOvr>
@@ -16131,7 +16152,7 @@
   <p:cSld>
     <p:spTree>
       <p:nvGrpSpPr>
-        <p:cNvPr id="218" name="Shape 218"/>
+        <p:cNvPr id="220" name="Shape 220"/>
         <p:cNvGrpSpPr/>
         <p:nvPr/>
       </p:nvGrpSpPr>
@@ -16145,7 +16166,7 @@
       </p:grpSpPr>
       <p:sp>
         <p:nvSpPr>
-          <p:cNvPr id="219" name="Google Shape;219;p14"/>
+          <p:cNvPr id="221" name="Google Shape;221;p14"/>
           <p:cNvSpPr txBox="1"/>
           <p:nvPr/>
         </p:nvSpPr>
@@ -16195,7 +16216,7 @@
       </p:sp>
       <p:sp>
         <p:nvSpPr>
-          <p:cNvPr id="220" name="Google Shape;220;p14"/>
+          <p:cNvPr id="222" name="Google Shape;222;p14"/>
           <p:cNvSpPr txBox="1"/>
           <p:nvPr/>
         </p:nvSpPr>
@@ -16245,7 +16266,7 @@
       </p:sp>
       <p:sp>
         <p:nvSpPr>
-          <p:cNvPr id="221" name="Google Shape;221;p14"/>
+          <p:cNvPr id="223" name="Google Shape;223;p14"/>
           <p:cNvSpPr/>
           <p:nvPr/>
         </p:nvSpPr>
@@ -16303,7 +16324,7 @@
       </p:sp>
       <p:sp>
         <p:nvSpPr>
-          <p:cNvPr id="222" name="Google Shape;222;p14"/>
+          <p:cNvPr id="224" name="Google Shape;224;p14"/>
           <p:cNvSpPr txBox="1"/>
           <p:nvPr/>
         </p:nvSpPr>
@@ -16353,7 +16374,7 @@
       </p:sp>
       <p:sp>
         <p:nvSpPr>
-          <p:cNvPr id="223" name="Google Shape;223;p14"/>
+          <p:cNvPr id="225" name="Google Shape;225;p14"/>
           <p:cNvSpPr txBox="1"/>
           <p:nvPr/>
         </p:nvSpPr>
@@ -16451,7 +16472,7 @@
       </p:sp>
       <p:sp>
         <p:nvSpPr>
-          <p:cNvPr id="224" name="Google Shape;224;p14"/>
+          <p:cNvPr id="226" name="Google Shape;226;p14"/>
           <p:cNvSpPr txBox="1"/>
           <p:nvPr/>
         </p:nvSpPr>
@@ -16501,7 +16522,7 @@
       </p:sp>
       <p:sp>
         <p:nvSpPr>
-          <p:cNvPr id="225" name="Google Shape;225;p14"/>
+          <p:cNvPr id="227" name="Google Shape;227;p14"/>
           <p:cNvSpPr txBox="1"/>
           <p:nvPr/>
         </p:nvSpPr>
@@ -16673,7 +16694,7 @@
   <p:cSld>
     <p:spTree>
       <p:nvGrpSpPr>
-        <p:cNvPr id="229" name="Shape 229"/>
+        <p:cNvPr id="231" name="Shape 231"/>
         <p:cNvGrpSpPr/>
         <p:nvPr/>
       </p:nvGrpSpPr>
@@ -16687,7 +16708,7 @@
       </p:grpSpPr>
       <p:sp>
         <p:nvSpPr>
-          <p:cNvPr id="230" name="Google Shape;230;p16"/>
+          <p:cNvPr id="232" name="Google Shape;232;p16"/>
           <p:cNvSpPr txBox="1"/>
           <p:nvPr/>
         </p:nvSpPr>
@@ -16737,14 +16758,14 @@
       </p:sp>
       <p:sp>
         <p:nvSpPr>
-          <p:cNvPr id="231" name="Google Shape;231;p16"/>
+          <p:cNvPr id="233" name="Google Shape;233;p16"/>
           <p:cNvSpPr txBox="1"/>
           <p:nvPr/>
         </p:nvSpPr>
         <p:spPr>
           <a:xfrm>
             <a:off x="457200" y="3840480"/>
-            <a:ext cx="11277295" cy="914400"/>
+            <a:ext cx="11277300" cy="307800"/>
           </a:xfrm>
           <a:prstGeom prst="rect">
             <a:avLst/>
@@ -16770,16 +16791,7 @@
               <a:buNone/>
             </a:pPr>
             <a:r>
-              <a:rPr b="0" i="0" lang="en-US" sz="2400" u="none" cap="none" strike="noStrike">
-                <a:solidFill>
-                  <a:srgbClr val="666666"/>
-                </a:solidFill>
-                <a:latin typeface="Arial"/>
-                <a:ea typeface="Arial"/>
-                <a:cs typeface="Arial"/>
-                <a:sym typeface="Arial"/>
-              </a:rPr>
-              <a:t>Questions?</a:t>
+              <a:t/>
             </a:r>
             <a:endParaRPr/>
           </a:p>
@@ -18042,7 +18054,7 @@
             <a:tbl>
               <a:tblPr bandRow="1" firstRow="1">
                 <a:noFill/>
-                <a:tableStyleId>{53756993-92F7-49EF-9B74-DAA4B2E32409}</a:tableStyleId>
+                <a:tableStyleId>{CF4B9878-068A-49D3-B5BF-C7D720519EED}</a:tableStyleId>
               </a:tblPr>
               <a:tblGrid>
                 <a:gridCol w="2743200"/>
@@ -20169,7 +20181,7 @@
             <a:tbl>
               <a:tblPr bandRow="1" firstRow="1">
                 <a:noFill/>
-                <a:tableStyleId>{53756993-92F7-49EF-9B74-DAA4B2E32409}</a:tableStyleId>
+                <a:tableStyleId>{CF4B9878-068A-49D3-B5BF-C7D720519EED}</a:tableStyleId>
               </a:tblPr>
               <a:tblGrid>
                 <a:gridCol w="2133600"/>

--- a/assignment3/Team2_Presentation.pptx
+++ b/assignment3/Team2_Presentation.pptx
@@ -12495,7 +12495,7 @@
             <a:tbl>
               <a:tblPr bandRow="1" firstRow="1">
                 <a:noFill/>
-                <a:tableStyleId>{CF4B9878-068A-49D3-B5BF-C7D720519EED}</a:tableStyleId>
+                <a:tableStyleId>{E28EF216-A2B3-4FF7-8C58-26E7DE7CF612}</a:tableStyleId>
               </a:tblPr>
               <a:tblGrid>
                 <a:gridCol w="2194550"/>
@@ -16381,7 +16381,7 @@
         <p:spPr>
           <a:xfrm>
             <a:off x="640080" y="1920240"/>
-            <a:ext cx="5029200" cy="4114800"/>
+            <a:ext cx="5029200" cy="985200"/>
           </a:xfrm>
           <a:prstGeom prst="rect">
             <a:avLst/>
@@ -16416,7 +16416,27 @@
                 <a:cs typeface="Arial"/>
                 <a:sym typeface="Arial"/>
               </a:rPr>
-              <a:t>• Hyperparameter tuning on surrogate tree</a:t>
+              <a:t>• </a:t>
+            </a:r>
+            <a:r>
+              <a:rPr b="1" i="0" lang="en-US" sz="1600" u="none" cap="none" strike="noStrike">
+                <a:solidFill>
+                  <a:srgbClr val="333333"/>
+                </a:solidFill>
+              </a:rPr>
+              <a:t>Hyperparameter tuning:</a:t>
+            </a:r>
+            <a:r>
+              <a:rPr b="0" i="0" lang="en-US" sz="1600" u="none" cap="none" strike="noStrike">
+                <a:solidFill>
+                  <a:srgbClr val="333333"/>
+                </a:solidFill>
+                <a:latin typeface="Arial"/>
+                <a:ea typeface="Arial"/>
+                <a:cs typeface="Arial"/>
+                <a:sym typeface="Arial"/>
+              </a:rPr>
+              <a:t> on surrogate tree</a:t>
             </a:r>
             <a:endParaRPr/>
           </a:p>
@@ -16529,7 +16549,7 @@
         <p:spPr>
           <a:xfrm>
             <a:off x="6217920" y="1920240"/>
-            <a:ext cx="5029200" cy="1923900"/>
+            <a:ext cx="5029200" cy="3078300"/>
           </a:xfrm>
           <a:prstGeom prst="rect">
             <a:avLst/>
@@ -16564,9 +16584,53 @@
                 <a:cs typeface="Arial"/>
                 <a:sym typeface="Arial"/>
               </a:rPr>
-              <a:t>• Feature engineering enhancements</a:t>
+              <a:t>• </a:t>
             </a:r>
-            <a:endParaRPr/>
+            <a:r>
+              <a:rPr b="1" i="0" lang="en-US" sz="1600" u="none" cap="none" strike="noStrike">
+                <a:solidFill>
+                  <a:srgbClr val="333333"/>
+                </a:solidFill>
+              </a:rPr>
+              <a:t>Feature engineering enhancements:</a:t>
+            </a:r>
+            <a:endParaRPr b="1" i="0" sz="1600" u="none" cap="none" strike="noStrike">
+              <a:solidFill>
+                <a:srgbClr val="333333"/>
+              </a:solidFill>
+            </a:endParaRPr>
+          </a:p>
+          <a:p>
+            <a:pPr indent="0" lvl="0" marL="0" marR="0" rtl="0" algn="l">
+              <a:spcBef>
+                <a:spcPts val="0"/>
+              </a:spcBef>
+              <a:spcAft>
+                <a:spcPts val="0"/>
+              </a:spcAft>
+              <a:buNone/>
+            </a:pPr>
+            <a:r>
+              <a:rPr lang="en-US" sz="1600">
+                <a:solidFill>
+                  <a:srgbClr val="333333"/>
+                </a:solidFill>
+              </a:rPr>
+              <a:t>    -&gt; </a:t>
+            </a:r>
+            <a:r>
+              <a:rPr lang="en-US" sz="1600">
+                <a:solidFill>
+                  <a:srgbClr val="333333"/>
+                </a:solidFill>
+              </a:rPr>
+              <a:t>Initially we also considered path length but we       removed it because of data leakage in the form of reverse causality</a:t>
+            </a:r>
+            <a:endParaRPr sz="1600">
+              <a:solidFill>
+                <a:srgbClr val="333333"/>
+              </a:solidFill>
+            </a:endParaRPr>
           </a:p>
           <a:p>
             <a:pPr indent="0" lvl="0" marL="0" marR="0" rtl="0" algn="l">
@@ -16588,33 +16652,21 @@
                 <a:cs typeface="Arial"/>
                 <a:sym typeface="Arial"/>
               </a:rPr>
-              <a:t>•   -&gt; Add more obstacle-related features</a:t>
+              <a:t>•   -&gt; Include temporal dynamics (robot's movement and error metrics change over time. While "Computable Functions" and "Atomic Relations" focus primarily on spatial context) </a:t>
             </a:r>
-            <a:endParaRPr/>
-          </a:p>
-          <a:p>
-            <a:pPr indent="0" lvl="0" marL="0" marR="0" rtl="0" algn="l">
-              <a:spcBef>
-                <a:spcPts val="600"/>
-              </a:spcBef>
-              <a:spcAft>
-                <a:spcPts val="0"/>
-              </a:spcAft>
-              <a:buNone/>
-            </a:pPr>
             <a:r>
-              <a:rPr b="0" i="0" lang="en-US" sz="1600" u="none" cap="none" strike="noStrike">
+              <a:rPr lang="en-US" sz="1600">
                 <a:solidFill>
                   <a:srgbClr val="333333"/>
                 </a:solidFill>
-                <a:latin typeface="Arial"/>
-                <a:ea typeface="Arial"/>
-                <a:cs typeface="Arial"/>
-                <a:sym typeface="Arial"/>
               </a:rPr>
-              <a:t>•   -&gt; Include temporal dynamics</a:t>
+              <a:t>, etc..</a:t>
             </a:r>
-            <a:endParaRPr/>
+            <a:endParaRPr sz="1600">
+              <a:solidFill>
+                <a:srgbClr val="333333"/>
+              </a:solidFill>
+            </a:endParaRPr>
           </a:p>
           <a:p>
             <a:pPr indent="0" lvl="0" marL="0" marR="0" rtl="0" algn="l">
@@ -18054,7 +18106,7 @@
             <a:tbl>
               <a:tblPr bandRow="1" firstRow="1">
                 <a:noFill/>
-                <a:tableStyleId>{CF4B9878-068A-49D3-B5BF-C7D720519EED}</a:tableStyleId>
+                <a:tableStyleId>{E28EF216-A2B3-4FF7-8C58-26E7DE7CF612}</a:tableStyleId>
               </a:tblPr>
               <a:tblGrid>
                 <a:gridCol w="2743200"/>
@@ -20181,7 +20233,7 @@
             <a:tbl>
               <a:tblPr bandRow="1" firstRow="1">
                 <a:noFill/>
-                <a:tableStyleId>{CF4B9878-068A-49D3-B5BF-C7D720519EED}</a:tableStyleId>
+                <a:tableStyleId>{E28EF216-A2B3-4FF7-8C58-26E7DE7CF612}</a:tableStyleId>
               </a:tblPr>
               <a:tblGrid>
                 <a:gridCol w="2133600"/>
@@ -21699,6 +21751,285 @@
 </file>
 
 <file path=ppt/theme/theme1.xml><?xml version="1.0" encoding="utf-8"?>
+<a:theme xmlns:a="http://schemas.openxmlformats.org/drawingml/2006/main" xmlns:r="http://schemas.openxmlformats.org/officeDocument/2006/relationships">
+  <a:themeElements>
+    <a:clrScheme name="Default">
+      <a:dk1>
+        <a:srgbClr val="000000"/>
+      </a:dk1>
+      <a:lt1>
+        <a:srgbClr val="FFFFFF"/>
+      </a:lt1>
+      <a:dk2>
+        <a:srgbClr val="158158"/>
+      </a:dk2>
+      <a:lt2>
+        <a:srgbClr val="F3F3F3"/>
+      </a:lt2>
+      <a:accent1>
+        <a:srgbClr val="058DC7"/>
+      </a:accent1>
+      <a:accent2>
+        <a:srgbClr val="50B432"/>
+      </a:accent2>
+      <a:accent3>
+        <a:srgbClr val="ED561B"/>
+      </a:accent3>
+      <a:accent4>
+        <a:srgbClr val="EDEF00"/>
+      </a:accent4>
+      <a:accent5>
+        <a:srgbClr val="24CBE5"/>
+      </a:accent5>
+      <a:accent6>
+        <a:srgbClr val="64E572"/>
+      </a:accent6>
+      <a:hlink>
+        <a:srgbClr val="2200CC"/>
+      </a:hlink>
+      <a:folHlink>
+        <a:srgbClr val="551A8B"/>
+      </a:folHlink>
+    </a:clrScheme>
+    <a:fontScheme name="Office">
+      <a:majorFont>
+        <a:latin typeface="Arial"/>
+        <a:ea typeface=""/>
+        <a:cs typeface=""/>
+        <a:font script="Jpan" typeface="ＭＳ Ｐゴシック"/>
+        <a:font script="Hang" typeface="맑은 고딕"/>
+        <a:font script="Hans" typeface="宋体"/>
+        <a:font script="Hant" typeface="新細明體"/>
+        <a:font script="Arab" typeface="Times New Roman"/>
+        <a:font script="Hebr" typeface="Times New Roman"/>
+        <a:font script="Thai" typeface="Angsana New"/>
+        <a:font script="Ethi" typeface="Nyala"/>
+        <a:font script="Beng" typeface="Vrinda"/>
+        <a:font script="Gujr" typeface="Shruti"/>
+        <a:font script="Khmr" typeface="MoolBoran"/>
+        <a:font script="Knda" typeface="Tunga"/>
+        <a:font script="Guru" typeface="Raavi"/>
+        <a:font script="Cans" typeface="Euphemia"/>
+        <a:font script="Cher" typeface="Plantagenet Cherokee"/>
+        <a:font script="Yiii" typeface="Microsoft Yi Baiti"/>
+        <a:font script="Tibt" typeface="Microsoft Himalaya"/>
+        <a:font script="Thaa" typeface="MV Boli"/>
+        <a:font script="Deva" typeface="Mangal"/>
+        <a:font script="Telu" typeface="Gautami"/>
+        <a:font script="Taml" typeface="Latha"/>
+        <a:font script="Syrc" typeface="Estrangelo Edessa"/>
+        <a:font script="Orya" typeface="Kalinga"/>
+        <a:font script="Mlym" typeface="Kartika"/>
+        <a:font script="Laoo" typeface="DokChampa"/>
+        <a:font script="Sinh" typeface="Iskoola Pota"/>
+        <a:font script="Mong" typeface="Mongolian Baiti"/>
+        <a:font script="Viet" typeface="Times New Roman"/>
+        <a:font script="Uigh" typeface="Microsoft Uighur"/>
+        <a:font script="Geor" typeface="Sylfaen"/>
+      </a:majorFont>
+      <a:minorFont>
+        <a:latin typeface="Arial"/>
+        <a:ea typeface=""/>
+        <a:cs typeface=""/>
+        <a:font script="Jpan" typeface="ＭＳ Ｐゴシック"/>
+        <a:font script="Hang" typeface="맑은 고딕"/>
+        <a:font script="Hans" typeface="宋体"/>
+        <a:font script="Hant" typeface="新細明體"/>
+        <a:font script="Arab" typeface="Arial"/>
+        <a:font script="Hebr" typeface="Arial"/>
+        <a:font script="Thai" typeface="Cordia New"/>
+        <a:font script="Ethi" typeface="Nyala"/>
+        <a:font script="Beng" typeface="Vrinda"/>
+        <a:font script="Gujr" typeface="Shruti"/>
+        <a:font script="Khmr" typeface="DaunPenh"/>
+        <a:font script="Knda" typeface="Tunga"/>
+        <a:font script="Guru" typeface="Raavi"/>
+        <a:font script="Cans" typeface="Euphemia"/>
+        <a:font script="Cher" typeface="Plantagenet Cherokee"/>
+        <a:font script="Yiii" typeface="Microsoft Yi Baiti"/>
+        <a:font script="Tibt" typeface="Microsoft Himalaya"/>
+        <a:font script="Thaa" typeface="MV Boli"/>
+        <a:font script="Deva" typeface="Mangal"/>
+        <a:font script="Telu" typeface="Gautami"/>
+        <a:font script="Taml" typeface="Latha"/>
+        <a:font script="Syrc" typeface="Estrangelo Edessa"/>
+        <a:font script="Orya" typeface="Kalinga"/>
+        <a:font script="Mlym" typeface="Kartika"/>
+        <a:font script="Laoo" typeface="DokChampa"/>
+        <a:font script="Sinh" typeface="Iskoola Pota"/>
+        <a:font script="Mong" typeface="Mongolian Baiti"/>
+        <a:font script="Viet" typeface="Arial"/>
+        <a:font script="Uigh" typeface="Microsoft Uighur"/>
+        <a:font script="Geor" typeface="Sylfaen"/>
+      </a:minorFont>
+    </a:fontScheme>
+    <a:fmtScheme name="Office">
+      <a:fillStyleLst>
+        <a:solidFill>
+          <a:schemeClr val="phClr"/>
+        </a:solidFill>
+        <a:gradFill rotWithShape="1">
+          <a:gsLst>
+            <a:gs pos="0">
+              <a:schemeClr val="phClr">
+                <a:tint val="50000"/>
+                <a:satMod val="300000"/>
+              </a:schemeClr>
+            </a:gs>
+            <a:gs pos="35000">
+              <a:schemeClr val="phClr">
+                <a:tint val="37000"/>
+                <a:satMod val="300000"/>
+              </a:schemeClr>
+            </a:gs>
+            <a:gs pos="100000">
+              <a:schemeClr val="phClr">
+                <a:tint val="15000"/>
+                <a:satMod val="350000"/>
+              </a:schemeClr>
+            </a:gs>
+          </a:gsLst>
+          <a:lin ang="16200000" scaled="1"/>
+        </a:gradFill>
+        <a:gradFill rotWithShape="1">
+          <a:gsLst>
+            <a:gs pos="0">
+              <a:schemeClr val="phClr">
+                <a:tint val="100000"/>
+                <a:shade val="100000"/>
+                <a:satMod val="130000"/>
+              </a:schemeClr>
+            </a:gs>
+            <a:gs pos="100000">
+              <a:schemeClr val="phClr">
+                <a:tint val="50000"/>
+                <a:shade val="100000"/>
+                <a:satMod val="350000"/>
+              </a:schemeClr>
+            </a:gs>
+          </a:gsLst>
+          <a:lin ang="16200000" scaled="0"/>
+        </a:gradFill>
+      </a:fillStyleLst>
+      <a:lnStyleLst>
+        <a:ln w="9525" cap="flat" cmpd="sng" algn="ctr">
+          <a:solidFill>
+            <a:schemeClr val="phClr">
+              <a:shade val="95000"/>
+              <a:satMod val="105000"/>
+            </a:schemeClr>
+          </a:solidFill>
+          <a:prstDash val="solid"/>
+        </a:ln>
+        <a:ln w="25400" cap="flat" cmpd="sng" algn="ctr">
+          <a:solidFill>
+            <a:schemeClr val="phClr"/>
+          </a:solidFill>
+          <a:prstDash val="solid"/>
+        </a:ln>
+        <a:ln w="38100" cap="flat" cmpd="sng" algn="ctr">
+          <a:solidFill>
+            <a:schemeClr val="phClr"/>
+          </a:solidFill>
+          <a:prstDash val="solid"/>
+        </a:ln>
+      </a:lnStyleLst>
+      <a:effectStyleLst>
+        <a:effectStyle>
+          <a:effectLst>
+            <a:outerShdw blurRad="40000" dist="20000" dir="5400000" rotWithShape="0">
+              <a:srgbClr val="000000">
+                <a:alpha val="38000"/>
+              </a:srgbClr>
+            </a:outerShdw>
+          </a:effectLst>
+        </a:effectStyle>
+        <a:effectStyle>
+          <a:effectLst>
+            <a:outerShdw blurRad="40000" dist="23000" dir="5400000" rotWithShape="0">
+              <a:srgbClr val="000000">
+                <a:alpha val="35000"/>
+              </a:srgbClr>
+            </a:outerShdw>
+          </a:effectLst>
+        </a:effectStyle>
+        <a:effectStyle>
+          <a:effectLst>
+            <a:outerShdw blurRad="40000" dist="23000" dir="5400000" rotWithShape="0">
+              <a:srgbClr val="000000">
+                <a:alpha val="35000"/>
+              </a:srgbClr>
+            </a:outerShdw>
+          </a:effectLst>
+          <a:scene3d>
+            <a:camera prst="orthographicFront">
+              <a:rot lat="0" lon="0" rev="0"/>
+            </a:camera>
+            <a:lightRig rig="threePt" dir="t">
+              <a:rot lat="0" lon="0" rev="1200000"/>
+            </a:lightRig>
+          </a:scene3d>
+          <a:sp3d>
+            <a:bevelT w="63500" h="25400"/>
+          </a:sp3d>
+        </a:effectStyle>
+      </a:effectStyleLst>
+      <a:bgFillStyleLst>
+        <a:solidFill>
+          <a:schemeClr val="phClr"/>
+        </a:solidFill>
+        <a:gradFill rotWithShape="1">
+          <a:gsLst>
+            <a:gs pos="0">
+              <a:schemeClr val="phClr">
+                <a:tint val="40000"/>
+                <a:satMod val="350000"/>
+              </a:schemeClr>
+            </a:gs>
+            <a:gs pos="40000">
+              <a:schemeClr val="phClr">
+                <a:tint val="45000"/>
+                <a:shade val="99000"/>
+                <a:satMod val="350000"/>
+              </a:schemeClr>
+            </a:gs>
+            <a:gs pos="100000">
+              <a:schemeClr val="phClr">
+                <a:shade val="20000"/>
+                <a:satMod val="255000"/>
+              </a:schemeClr>
+            </a:gs>
+          </a:gsLst>
+          <a:path path="circle">
+            <a:fillToRect l="50000" t="-80000" r="50000" b="180000"/>
+          </a:path>
+        </a:gradFill>
+        <a:gradFill rotWithShape="1">
+          <a:gsLst>
+            <a:gs pos="0">
+              <a:schemeClr val="phClr">
+                <a:tint val="80000"/>
+                <a:satMod val="300000"/>
+              </a:schemeClr>
+            </a:gs>
+            <a:gs pos="100000">
+              <a:schemeClr val="phClr">
+                <a:shade val="30000"/>
+                <a:satMod val="200000"/>
+              </a:schemeClr>
+            </a:gs>
+          </a:gsLst>
+          <a:path path="circle">
+            <a:fillToRect l="50000" t="50000" r="50000" b="50000"/>
+          </a:path>
+        </a:gradFill>
+      </a:bgFillStyleLst>
+    </a:fmtScheme>
+  </a:themeElements>
+</a:theme>
+</file>
+
+<file path=ppt/theme/theme2.xml><?xml version="1.0" encoding="utf-8"?>
 <a:theme xmlns:a="http://schemas.openxmlformats.org/drawingml/2006/main" xmlns:r="http://schemas.openxmlformats.org/officeDocument/2006/relationships" name="Office Theme">
   <a:themeElements>
     <a:clrScheme name="Office">
@@ -21975,283 +22306,4 @@
     </a:fmtScheme>
   </a:themeElements>
 </a:theme>
-</file>
-
-<file path=ppt/theme/theme2.xml><?xml version="1.0" encoding="utf-8"?>
-<a:theme xmlns:a="http://schemas.openxmlformats.org/drawingml/2006/main" xmlns:r="http://schemas.openxmlformats.org/officeDocument/2006/relationships">
-  <a:themeElements>
-    <a:clrScheme name="Default">
-      <a:dk1>
-        <a:srgbClr val="000000"/>
-      </a:dk1>
-      <a:lt1>
-        <a:srgbClr val="FFFFFF"/>
-      </a:lt1>
-      <a:dk2>
-        <a:srgbClr val="158158"/>
-      </a:dk2>
-      <a:lt2>
-        <a:srgbClr val="F3F3F3"/>
-      </a:lt2>
-      <a:accent1>
-        <a:srgbClr val="058DC7"/>
-      </a:accent1>
-      <a:accent2>
-        <a:srgbClr val="50B432"/>
-      </a:accent2>
-      <a:accent3>
-        <a:srgbClr val="ED561B"/>
-      </a:accent3>
-      <a:accent4>
-        <a:srgbClr val="EDEF00"/>
-      </a:accent4>
-      <a:accent5>
-        <a:srgbClr val="24CBE5"/>
-      </a:accent5>
-      <a:accent6>
-        <a:srgbClr val="64E572"/>
-      </a:accent6>
-      <a:hlink>
-        <a:srgbClr val="2200CC"/>
-      </a:hlink>
-      <a:folHlink>
-        <a:srgbClr val="551A8B"/>
-      </a:folHlink>
-    </a:clrScheme>
-    <a:fontScheme name="Office">
-      <a:majorFont>
-        <a:latin typeface="Arial"/>
-        <a:ea typeface=""/>
-        <a:cs typeface=""/>
-        <a:font script="Jpan" typeface="ＭＳ Ｐゴシック"/>
-        <a:font script="Hang" typeface="맑은 고딕"/>
-        <a:font script="Hans" typeface="宋体"/>
-        <a:font script="Hant" typeface="新細明體"/>
-        <a:font script="Arab" typeface="Times New Roman"/>
-        <a:font script="Hebr" typeface="Times New Roman"/>
-        <a:font script="Thai" typeface="Angsana New"/>
-        <a:font script="Ethi" typeface="Nyala"/>
-        <a:font script="Beng" typeface="Vrinda"/>
-        <a:font script="Gujr" typeface="Shruti"/>
-        <a:font script="Khmr" typeface="MoolBoran"/>
-        <a:font script="Knda" typeface="Tunga"/>
-        <a:font script="Guru" typeface="Raavi"/>
-        <a:font script="Cans" typeface="Euphemia"/>
-        <a:font script="Cher" typeface="Plantagenet Cherokee"/>
-        <a:font script="Yiii" typeface="Microsoft Yi Baiti"/>
-        <a:font script="Tibt" typeface="Microsoft Himalaya"/>
-        <a:font script="Thaa" typeface="MV Boli"/>
-        <a:font script="Deva" typeface="Mangal"/>
-        <a:font script="Telu" typeface="Gautami"/>
-        <a:font script="Taml" typeface="Latha"/>
-        <a:font script="Syrc" typeface="Estrangelo Edessa"/>
-        <a:font script="Orya" typeface="Kalinga"/>
-        <a:font script="Mlym" typeface="Kartika"/>
-        <a:font script="Laoo" typeface="DokChampa"/>
-        <a:font script="Sinh" typeface="Iskoola Pota"/>
-        <a:font script="Mong" typeface="Mongolian Baiti"/>
-        <a:font script="Viet" typeface="Times New Roman"/>
-        <a:font script="Uigh" typeface="Microsoft Uighur"/>
-        <a:font script="Geor" typeface="Sylfaen"/>
-      </a:majorFont>
-      <a:minorFont>
-        <a:latin typeface="Arial"/>
-        <a:ea typeface=""/>
-        <a:cs typeface=""/>
-        <a:font script="Jpan" typeface="ＭＳ Ｐゴシック"/>
-        <a:font script="Hang" typeface="맑은 고딕"/>
-        <a:font script="Hans" typeface="宋体"/>
-        <a:font script="Hant" typeface="新細明體"/>
-        <a:font script="Arab" typeface="Arial"/>
-        <a:font script="Hebr" typeface="Arial"/>
-        <a:font script="Thai" typeface="Cordia New"/>
-        <a:font script="Ethi" typeface="Nyala"/>
-        <a:font script="Beng" typeface="Vrinda"/>
-        <a:font script="Gujr" typeface="Shruti"/>
-        <a:font script="Khmr" typeface="DaunPenh"/>
-        <a:font script="Knda" typeface="Tunga"/>
-        <a:font script="Guru" typeface="Raavi"/>
-        <a:font script="Cans" typeface="Euphemia"/>
-        <a:font script="Cher" typeface="Plantagenet Cherokee"/>
-        <a:font script="Yiii" typeface="Microsoft Yi Baiti"/>
-        <a:font script="Tibt" typeface="Microsoft Himalaya"/>
-        <a:font script="Thaa" typeface="MV Boli"/>
-        <a:font script="Deva" typeface="Mangal"/>
-        <a:font script="Telu" typeface="Gautami"/>
-        <a:font script="Taml" typeface="Latha"/>
-        <a:font script="Syrc" typeface="Estrangelo Edessa"/>
-        <a:font script="Orya" typeface="Kalinga"/>
-        <a:font script="Mlym" typeface="Kartika"/>
-        <a:font script="Laoo" typeface="DokChampa"/>
-        <a:font script="Sinh" typeface="Iskoola Pota"/>
-        <a:font script="Mong" typeface="Mongolian Baiti"/>
-        <a:font script="Viet" typeface="Arial"/>
-        <a:font script="Uigh" typeface="Microsoft Uighur"/>
-        <a:font script="Geor" typeface="Sylfaen"/>
-      </a:minorFont>
-    </a:fontScheme>
-    <a:fmtScheme name="Office">
-      <a:fillStyleLst>
-        <a:solidFill>
-          <a:schemeClr val="phClr"/>
-        </a:solidFill>
-        <a:gradFill rotWithShape="1">
-          <a:gsLst>
-            <a:gs pos="0">
-              <a:schemeClr val="phClr">
-                <a:tint val="50000"/>
-                <a:satMod val="300000"/>
-              </a:schemeClr>
-            </a:gs>
-            <a:gs pos="35000">
-              <a:schemeClr val="phClr">
-                <a:tint val="37000"/>
-                <a:satMod val="300000"/>
-              </a:schemeClr>
-            </a:gs>
-            <a:gs pos="100000">
-              <a:schemeClr val="phClr">
-                <a:tint val="15000"/>
-                <a:satMod val="350000"/>
-              </a:schemeClr>
-            </a:gs>
-          </a:gsLst>
-          <a:lin ang="16200000" scaled="1"/>
-        </a:gradFill>
-        <a:gradFill rotWithShape="1">
-          <a:gsLst>
-            <a:gs pos="0">
-              <a:schemeClr val="phClr">
-                <a:tint val="100000"/>
-                <a:shade val="100000"/>
-                <a:satMod val="130000"/>
-              </a:schemeClr>
-            </a:gs>
-            <a:gs pos="100000">
-              <a:schemeClr val="phClr">
-                <a:tint val="50000"/>
-                <a:shade val="100000"/>
-                <a:satMod val="350000"/>
-              </a:schemeClr>
-            </a:gs>
-          </a:gsLst>
-          <a:lin ang="16200000" scaled="0"/>
-        </a:gradFill>
-      </a:fillStyleLst>
-      <a:lnStyleLst>
-        <a:ln w="9525" cap="flat" cmpd="sng" algn="ctr">
-          <a:solidFill>
-            <a:schemeClr val="phClr">
-              <a:shade val="95000"/>
-              <a:satMod val="105000"/>
-            </a:schemeClr>
-          </a:solidFill>
-          <a:prstDash val="solid"/>
-        </a:ln>
-        <a:ln w="25400" cap="flat" cmpd="sng" algn="ctr">
-          <a:solidFill>
-            <a:schemeClr val="phClr"/>
-          </a:solidFill>
-          <a:prstDash val="solid"/>
-        </a:ln>
-        <a:ln w="38100" cap="flat" cmpd="sng" algn="ctr">
-          <a:solidFill>
-            <a:schemeClr val="phClr"/>
-          </a:solidFill>
-          <a:prstDash val="solid"/>
-        </a:ln>
-      </a:lnStyleLst>
-      <a:effectStyleLst>
-        <a:effectStyle>
-          <a:effectLst>
-            <a:outerShdw blurRad="40000" dist="20000" dir="5400000" rotWithShape="0">
-              <a:srgbClr val="000000">
-                <a:alpha val="38000"/>
-              </a:srgbClr>
-            </a:outerShdw>
-          </a:effectLst>
-        </a:effectStyle>
-        <a:effectStyle>
-          <a:effectLst>
-            <a:outerShdw blurRad="40000" dist="23000" dir="5400000" rotWithShape="0">
-              <a:srgbClr val="000000">
-                <a:alpha val="35000"/>
-              </a:srgbClr>
-            </a:outerShdw>
-          </a:effectLst>
-        </a:effectStyle>
-        <a:effectStyle>
-          <a:effectLst>
-            <a:outerShdw blurRad="40000" dist="23000" dir="5400000" rotWithShape="0">
-              <a:srgbClr val="000000">
-                <a:alpha val="35000"/>
-              </a:srgbClr>
-            </a:outerShdw>
-          </a:effectLst>
-          <a:scene3d>
-            <a:camera prst="orthographicFront">
-              <a:rot lat="0" lon="0" rev="0"/>
-            </a:camera>
-            <a:lightRig rig="threePt" dir="t">
-              <a:rot lat="0" lon="0" rev="1200000"/>
-            </a:lightRig>
-          </a:scene3d>
-          <a:sp3d>
-            <a:bevelT w="63500" h="25400"/>
-          </a:sp3d>
-        </a:effectStyle>
-      </a:effectStyleLst>
-      <a:bgFillStyleLst>
-        <a:solidFill>
-          <a:schemeClr val="phClr"/>
-        </a:solidFill>
-        <a:gradFill rotWithShape="1">
-          <a:gsLst>
-            <a:gs pos="0">
-              <a:schemeClr val="phClr">
-                <a:tint val="40000"/>
-                <a:satMod val="350000"/>
-              </a:schemeClr>
-            </a:gs>
-            <a:gs pos="40000">
-              <a:schemeClr val="phClr">
-                <a:tint val="45000"/>
-                <a:shade val="99000"/>
-                <a:satMod val="350000"/>
-              </a:schemeClr>
-            </a:gs>
-            <a:gs pos="100000">
-              <a:schemeClr val="phClr">
-                <a:shade val="20000"/>
-                <a:satMod val="255000"/>
-              </a:schemeClr>
-            </a:gs>
-          </a:gsLst>
-          <a:path path="circle">
-            <a:fillToRect l="50000" t="-80000" r="50000" b="180000"/>
-          </a:path>
-        </a:gradFill>
-        <a:gradFill rotWithShape="1">
-          <a:gsLst>
-            <a:gs pos="0">
-              <a:schemeClr val="phClr">
-                <a:tint val="80000"/>
-                <a:satMod val="300000"/>
-              </a:schemeClr>
-            </a:gs>
-            <a:gs pos="100000">
-              <a:schemeClr val="phClr">
-                <a:shade val="30000"/>
-                <a:satMod val="200000"/>
-              </a:schemeClr>
-            </a:gs>
-          </a:gsLst>
-          <a:path path="circle">
-            <a:fillToRect l="50000" t="50000" r="50000" b="50000"/>
-          </a:path>
-        </a:gradFill>
-      </a:bgFillStyleLst>
-    </a:fmtScheme>
-  </a:themeElements>
-</a:theme>
 </file>